--- a/presentation/DemandIQ_Presentation.pptx
+++ b/presentation/DemandIQ_Presentation.pptx
@@ -4,28 +4,31 @@
   <p:sldMasterIdLst>
     <p:sldMasterId id="2147483648" r:id="rId1"/>
   </p:sldMasterIdLst>
+  <p:notesMasterIdLst>
+    <p:notesMasterId r:id="rId21"/>
+  </p:notesMasterIdLst>
   <p:sldIdLst>
-    <p:sldId id="256" r:id="rId7"/>
-    <p:sldId id="257" r:id="rId9"/>
-    <p:sldId id="258" r:id="rId10"/>
-    <p:sldId id="259" r:id="rId11"/>
-    <p:sldId id="260" r:id="rId12"/>
-    <p:sldId id="261" r:id="rId13"/>
-    <p:sldId id="262" r:id="rId14"/>
-    <p:sldId id="263" r:id="rId15"/>
-    <p:sldId id="264" r:id="rId16"/>
-    <p:sldId id="265" r:id="rId17"/>
-    <p:sldId id="266" r:id="rId18"/>
-    <p:sldId id="267" r:id="rId19"/>
-    <p:sldId id="268" r:id="rId20"/>
-    <p:sldId id="269" r:id="rId21"/>
-    <p:sldId id="270" r:id="rId22"/>
-    <p:sldId id="271" r:id="rId23"/>
-    <p:sldId id="272" r:id="rId24"/>
-    <p:sldId id="273" r:id="rId25"/>
-    <p:sldId id="274" r:id="rId26"/>
+    <p:sldId id="256" r:id="rId2"/>
+    <p:sldId id="257" r:id="rId3"/>
+    <p:sldId id="258" r:id="rId4"/>
+    <p:sldId id="259" r:id="rId5"/>
+    <p:sldId id="260" r:id="rId6"/>
+    <p:sldId id="261" r:id="rId7"/>
+    <p:sldId id="262" r:id="rId8"/>
+    <p:sldId id="263" r:id="rId9"/>
+    <p:sldId id="264" r:id="rId10"/>
+    <p:sldId id="265" r:id="rId11"/>
+    <p:sldId id="266" r:id="rId12"/>
+    <p:sldId id="267" r:id="rId13"/>
+    <p:sldId id="268" r:id="rId14"/>
+    <p:sldId id="269" r:id="rId15"/>
+    <p:sldId id="270" r:id="rId16"/>
+    <p:sldId id="271" r:id="rId17"/>
+    <p:sldId id="272" r:id="rId18"/>
+    <p:sldId id="273" r:id="rId19"/>
+    <p:sldId id="274" r:id="rId20"/>
   </p:sldIdLst>
-  <p:sldSz cx="12191695" cy="6858000" type="screen4x3"/>
+  <p:sldSz cx="12192000" cy="6858000"/>
   <p:notesSz cx="6858000" cy="9144000"/>
   <p:defaultTextStyle>
     <a:defPPr>
@@ -122,12 +125,31 @@
       </a:defRPr>
     </a:lvl9pPr>
   </p:defaultTextStyle>
+  <p:extLst>
+    <p:ext uri="{EFAFB233-063F-42B5-8137-9DF3F51BA10A}">
+      <p15:sldGuideLst xmlns:p15="http://schemas.microsoft.com/office/powerpoint/2012/main">
+        <p15:guide id="1" orient="horz" pos="2160">
+          <p15:clr>
+            <a:srgbClr val="A4A3A4"/>
+          </p15:clr>
+        </p15:guide>
+        <p15:guide id="2" pos="2880">
+          <p15:clr>
+            <a:srgbClr val="A4A3A4"/>
+          </p15:clr>
+        </p15:guide>
+      </p15:sldGuideLst>
+    </p:ext>
+  </p:extLst>
 </p:presentation>
 </file>
 
 <file path=ppt/charts/chart1.xml><?xml version="1.0" encoding="utf-8"?>
-<c:chartSpace xmlns:c="http://schemas.openxmlformats.org/drawingml/2006/chart" xmlns:a="http://schemas.openxmlformats.org/drawingml/2006/main" xmlns:r="http://schemas.openxmlformats.org/officeDocument/2006/relationships">
+<c:chartSpace xmlns:c="http://schemas.openxmlformats.org/drawingml/2006/chart" xmlns:a="http://schemas.openxmlformats.org/drawingml/2006/main" xmlns:r="http://schemas.openxmlformats.org/officeDocument/2006/relationships" xmlns:c16r2="http://schemas.microsoft.com/office/drawing/2015/06/chart">
   <c:date1904 val="0"/>
+  <c:lang val="en-US"/>
+  <c:roundedCorners val="1"/>
+  <c:style val="2"/>
   <c:chart>
     <c:title>
       <c:tx>
@@ -136,7 +158,7 @@
           <a:lstStyle/>
           <a:p>
             <a:r>
-              <a:rPr sz="1400" b="1">
+              <a:rPr lang="en-US" sz="1400" b="1">
                 <a:solidFill>
                   <a:srgbClr val="1E242C"/>
                 </a:solidFill>
@@ -146,14 +168,15 @@
           </a:p>
         </c:rich>
       </c:tx>
-      <c:layout/>
       <c:overlay val="0"/>
     </c:title>
     <c:autoTitleDeleted val="0"/>
     <c:plotArea>
+      <c:layout/>
       <c:barChart>
         <c:barDir val="bar"/>
         <c:grouping val="clustered"/>
+        <c:varyColors val="1"/>
         <c:ser>
           <c:idx val="0"/>
           <c:order val="0"/>
@@ -168,46 +191,115 @@
               </c:strCache>
             </c:strRef>
           </c:tx>
+          <c:invertIfNegative val="1"/>
           <c:dPt>
             <c:idx val="0"/>
+            <c:invertIfNegative val="1"/>
+            <c:bubble3D val="0"/>
             <c:spPr>
               <a:solidFill>
                 <a:srgbClr val="8A8F98"/>
               </a:solidFill>
             </c:spPr>
+            <c:extLst>
+              <c:ext xmlns:c16="http://schemas.microsoft.com/office/drawing/2014/chart" uri="{C3380CC4-5D6E-409C-BE32-E72D297353CC}">
+                <c16:uniqueId val="{00000001-FD43-47BB-94C2-9FFBFAA81E57}"/>
+              </c:ext>
+            </c:extLst>
           </c:dPt>
           <c:dPt>
             <c:idx val="1"/>
+            <c:invertIfNegative val="1"/>
+            <c:bubble3D val="0"/>
             <c:spPr>
               <a:solidFill>
                 <a:srgbClr val="8A8F98"/>
               </a:solidFill>
             </c:spPr>
+            <c:extLst>
+              <c:ext xmlns:c16="http://schemas.microsoft.com/office/drawing/2014/chart" uri="{C3380CC4-5D6E-409C-BE32-E72D297353CC}">
+                <c16:uniqueId val="{00000003-FD43-47BB-94C2-9FFBFAA81E57}"/>
+              </c:ext>
+            </c:extLst>
           </c:dPt>
           <c:dPt>
             <c:idx val="2"/>
+            <c:invertIfNegative val="1"/>
+            <c:bubble3D val="0"/>
             <c:spPr>
               <a:solidFill>
                 <a:srgbClr val="2E8B8B"/>
               </a:solidFill>
             </c:spPr>
+            <c:extLst>
+              <c:ext xmlns:c16="http://schemas.microsoft.com/office/drawing/2014/chart" uri="{C3380CC4-5D6E-409C-BE32-E72D297353CC}">
+                <c16:uniqueId val="{00000005-FD43-47BB-94C2-9FFBFAA81E57}"/>
+              </c:ext>
+            </c:extLst>
           </c:dPt>
           <c:dPt>
             <c:idx val="3"/>
+            <c:invertIfNegative val="1"/>
+            <c:bubble3D val="0"/>
             <c:spPr>
               <a:solidFill>
                 <a:srgbClr val="2E8B8B"/>
               </a:solidFill>
             </c:spPr>
+            <c:extLst>
+              <c:ext xmlns:c16="http://schemas.microsoft.com/office/drawing/2014/chart" uri="{C3380CC4-5D6E-409C-BE32-E72D297353CC}">
+                <c16:uniqueId val="{00000007-FD43-47BB-94C2-9FFBFAA81E57}"/>
+              </c:ext>
+            </c:extLst>
           </c:dPt>
           <c:dPt>
             <c:idx val="4"/>
+            <c:invertIfNegative val="1"/>
+            <c:bubble3D val="0"/>
             <c:spPr>
               <a:solidFill>
                 <a:srgbClr val="1F3A5F"/>
               </a:solidFill>
             </c:spPr>
+            <c:extLst>
+              <c:ext xmlns:c16="http://schemas.microsoft.com/office/drawing/2014/chart" uri="{C3380CC4-5D6E-409C-BE32-E72D297353CC}">
+                <c16:uniqueId val="{00000009-FD43-47BB-94C2-9FFBFAA81E57}"/>
+              </c:ext>
+            </c:extLst>
           </c:dPt>
+          <c:dLbls>
+            <c:numFmt formatCode="0.0&quot;%&quot;" sourceLinked="0"/>
+            <c:spPr>
+              <a:noFill/>
+              <a:ln>
+                <a:noFill/>
+              </a:ln>
+              <a:effectLst/>
+            </c:spPr>
+            <c:txPr>
+              <a:bodyPr/>
+              <a:lstStyle/>
+              <a:p>
+                <a:pPr>
+                  <a:defRPr sz="1300" b="1"/>
+                </a:pPr>
+                <a:endParaRPr lang="en-US"/>
+              </a:p>
+            </c:txPr>
+            <c:dLblPos val="outEnd"/>
+            <c:showLegendKey val="0"/>
+            <c:showVal val="1"/>
+            <c:showCatName val="0"/>
+            <c:showSerName val="0"/>
+            <c:showPercent val="0"/>
+            <c:showBubbleSize val="0"/>
+            <c:showLeaderLines val="0"/>
+            <c:extLst>
+              <c:ext xmlns:c15="http://schemas.microsoft.com/office/drawing/2012/chart" uri="{CE6537A1-D6FC-4f65-9D91-7224C49458BB}">
+                <c15:showLeaderLines val="0"/>
+              </c:ext>
+            </c:extLst>
+          </c:dLbls>
           <c:cat>
             <c:strRef>
               <c:f>Sheet1!$A$2:$A$6</c:f>
@@ -241,7 +333,7 @@
                   <c:v>31.55</c:v>
                 </c:pt>
                 <c:pt idx="1">
-                  <c:v>10.22</c:v>
+                  <c:v>10.220000000000001</c:v>
                 </c:pt>
                 <c:pt idx="2">
                   <c:v>12.4</c:v>
@@ -255,18 +347,13 @@
               </c:numCache>
             </c:numRef>
           </c:val>
+          <c:extLst>
+            <c:ext xmlns:c16="http://schemas.microsoft.com/office/drawing/2014/chart" uri="{C3380CC4-5D6E-409C-BE32-E72D297353CC}">
+              <c16:uniqueId val="{0000000A-FD43-47BB-94C2-9FFBFAA81E57}"/>
+            </c:ext>
+          </c:extLst>
         </c:ser>
         <c:dLbls>
-          <c:numFmt formatCode="0.0&quot;%&quot;" sourceLinked="0"/>
-          <c:txPr>
-            <a:bodyPr/>
-            <a:lstStyle/>
-            <a:p>
-              <a:pPr>
-                <a:defRPr sz="1300" b="1"/>
-              </a:pPr>
-            </a:p>
-          </c:txPr>
           <c:dLblPos val="outEnd"/>
           <c:showLegendKey val="0"/>
           <c:showVal val="1"/>
@@ -274,7 +361,6 @@
           <c:showSerName val="0"/>
           <c:showPercent val="0"/>
           <c:showBubbleSize val="0"/>
-          <c:showLeaderLines val="1"/>
         </c:dLbls>
         <c:gapWidth val="55"/>
         <c:axId val="-2068027336"/>
@@ -287,6 +373,7 @@
         </c:scaling>
         <c:delete val="0"/>
         <c:axPos val="l"/>
+        <c:numFmt formatCode="General" sourceLinked="0"/>
         <c:majorTickMark val="out"/>
         <c:minorTickMark val="none"/>
         <c:tickLblPos val="nextTo"/>
@@ -304,6 +391,7 @@
             <a:pPr>
               <a:defRPr sz="1300"/>
             </a:pPr>
+            <a:endParaRPr lang="en-US"/>
           </a:p>
         </c:txPr>
         <c:crossAx val="-2113994440"/>
@@ -316,11 +404,12 @@
       <c:valAx>
         <c:axId val="-2113994440"/>
         <c:scaling>
-          <c:max val="36.0"/>
-          <c:min val="0.0"/>
+          <c:orientation val="minMax"/>
+          <c:max val="36"/>
+          <c:min val="0"/>
         </c:scaling>
         <c:delete val="0"/>
-        <c:axPos val="b"/>
+        <c:axPos val="t"/>
         <c:majorGridlines>
           <c:spPr>
             <a:ln>
@@ -330,6 +419,7 @@
             </a:ln>
           </c:spPr>
         </c:majorGridlines>
+        <c:numFmt formatCode="General" sourceLinked="1"/>
         <c:majorTickMark val="out"/>
         <c:minorTickMark val="none"/>
         <c:tickLblPos val="none"/>
@@ -340,10 +430,13 @@
         </c:spPr>
         <c:crossAx val="-2068027336"/>
         <c:crosses val="autoZero"/>
-        <c:majorUnit val="10.0"/>
+        <c:crossBetween val="between"/>
+        <c:majorUnit val="10"/>
       </c:valAx>
     </c:plotArea>
+    <c:plotVisOnly val="1"/>
     <c:dispBlanksAs val="gap"/>
+    <c:showDLblsOverMax val="1"/>
   </c:chart>
   <c:txPr>
     <a:bodyPr/>
@@ -367,8 +460,11 @@
 </file>
 
 <file path=ppt/charts/chart2.xml><?xml version="1.0" encoding="utf-8"?>
-<c:chartSpace xmlns:c="http://schemas.openxmlformats.org/drawingml/2006/chart" xmlns:a="http://schemas.openxmlformats.org/drawingml/2006/main" xmlns:r="http://schemas.openxmlformats.org/officeDocument/2006/relationships">
+<c:chartSpace xmlns:c="http://schemas.openxmlformats.org/drawingml/2006/chart" xmlns:a="http://schemas.openxmlformats.org/drawingml/2006/main" xmlns:r="http://schemas.openxmlformats.org/officeDocument/2006/relationships" xmlns:c16r2="http://schemas.microsoft.com/office/drawing/2015/06/chart">
   <c:date1904 val="0"/>
+  <c:lang val="en-US"/>
+  <c:roundedCorners val="1"/>
+  <c:style val="2"/>
   <c:chart>
     <c:title>
       <c:tx>
@@ -387,14 +483,15 @@
           </a:p>
         </c:rich>
       </c:tx>
-      <c:layout/>
       <c:overlay val="0"/>
     </c:title>
     <c:autoTitleDeleted val="0"/>
     <c:plotArea>
+      <c:layout/>
       <c:barChart>
         <c:barDir val="col"/>
         <c:grouping val="clustered"/>
+        <c:varyColors val="1"/>
         <c:ser>
           <c:idx val="0"/>
           <c:order val="0"/>
@@ -409,30 +506,85 @@
               </c:strCache>
             </c:strRef>
           </c:tx>
+          <c:invertIfNegative val="1"/>
           <c:dPt>
             <c:idx val="0"/>
+            <c:invertIfNegative val="1"/>
+            <c:bubble3D val="0"/>
             <c:spPr>
               <a:solidFill>
                 <a:srgbClr val="8A8F98"/>
               </a:solidFill>
             </c:spPr>
+            <c:extLst>
+              <c:ext xmlns:c16="http://schemas.microsoft.com/office/drawing/2014/chart" uri="{C3380CC4-5D6E-409C-BE32-E72D297353CC}">
+                <c16:uniqueId val="{00000001-9DB0-4E09-97E0-999A525ECE3E}"/>
+              </c:ext>
+            </c:extLst>
           </c:dPt>
           <c:dPt>
             <c:idx val="1"/>
+            <c:invertIfNegative val="1"/>
+            <c:bubble3D val="0"/>
             <c:spPr>
               <a:solidFill>
                 <a:srgbClr val="2E8B8B"/>
               </a:solidFill>
             </c:spPr>
+            <c:extLst>
+              <c:ext xmlns:c16="http://schemas.microsoft.com/office/drawing/2014/chart" uri="{C3380CC4-5D6E-409C-BE32-E72D297353CC}">
+                <c16:uniqueId val="{00000003-9DB0-4E09-97E0-999A525ECE3E}"/>
+              </c:ext>
+            </c:extLst>
           </c:dPt>
           <c:dPt>
             <c:idx val="2"/>
+            <c:invertIfNegative val="1"/>
+            <c:bubble3D val="0"/>
             <c:spPr>
               <a:solidFill>
                 <a:srgbClr val="1F3A5F"/>
               </a:solidFill>
             </c:spPr>
+            <c:extLst>
+              <c:ext xmlns:c16="http://schemas.microsoft.com/office/drawing/2014/chart" uri="{C3380CC4-5D6E-409C-BE32-E72D297353CC}">
+                <c16:uniqueId val="{00000005-9DB0-4E09-97E0-999A525ECE3E}"/>
+              </c:ext>
+            </c:extLst>
           </c:dPt>
+          <c:dLbls>
+            <c:numFmt formatCode="0.00&quot;%&quot;" sourceLinked="0"/>
+            <c:spPr>
+              <a:noFill/>
+              <a:ln>
+                <a:noFill/>
+              </a:ln>
+              <a:effectLst/>
+            </c:spPr>
+            <c:txPr>
+              <a:bodyPr/>
+              <a:lstStyle/>
+              <a:p>
+                <a:pPr>
+                  <a:defRPr sz="1400" b="1"/>
+                </a:pPr>
+                <a:endParaRPr lang="en-US"/>
+              </a:p>
+            </c:txPr>
+            <c:dLblPos val="outEnd"/>
+            <c:showLegendKey val="0"/>
+            <c:showVal val="1"/>
+            <c:showCatName val="0"/>
+            <c:showSerName val="0"/>
+            <c:showPercent val="0"/>
+            <c:showBubbleSize val="0"/>
+            <c:showLeaderLines val="0"/>
+            <c:extLst>
+              <c:ext xmlns:c15="http://schemas.microsoft.com/office/drawing/2012/chart" uri="{CE6537A1-D6FC-4f65-9D91-7224C49458BB}">
+                <c15:showLeaderLines val="0"/>
+              </c:ext>
+            </c:extLst>
+          </c:dLbls>
           <c:cat>
             <c:strRef>
               <c:f>Sheet1!$A$2:$A$4</c:f>
@@ -468,18 +620,13 @@
               </c:numCache>
             </c:numRef>
           </c:val>
+          <c:extLst>
+            <c:ext xmlns:c16="http://schemas.microsoft.com/office/drawing/2014/chart" uri="{C3380CC4-5D6E-409C-BE32-E72D297353CC}">
+              <c16:uniqueId val="{00000006-9DB0-4E09-97E0-999A525ECE3E}"/>
+            </c:ext>
+          </c:extLst>
         </c:ser>
         <c:dLbls>
-          <c:numFmt formatCode="0.00&quot;%&quot;" sourceLinked="0"/>
-          <c:txPr>
-            <a:bodyPr/>
-            <a:lstStyle/>
-            <a:p>
-              <a:pPr>
-                <a:defRPr sz="1400" b="1"/>
-              </a:pPr>
-            </a:p>
-          </c:txPr>
           <c:dLblPos val="outEnd"/>
           <c:showLegendKey val="0"/>
           <c:showVal val="1"/>
@@ -487,7 +634,6 @@
           <c:showSerName val="0"/>
           <c:showPercent val="0"/>
           <c:showBubbleSize val="0"/>
-          <c:showLeaderLines val="1"/>
         </c:dLbls>
         <c:gapWidth val="70"/>
         <c:axId val="-2068027336"/>
@@ -500,6 +646,7 @@
         </c:scaling>
         <c:delete val="0"/>
         <c:axPos val="b"/>
+        <c:numFmt formatCode="General" sourceLinked="0"/>
         <c:majorTickMark val="out"/>
         <c:minorTickMark val="none"/>
         <c:tickLblPos val="nextTo"/>
@@ -510,6 +657,7 @@
             <a:pPr>
               <a:defRPr sz="1200"/>
             </a:pPr>
+            <a:endParaRPr lang="en-US"/>
           </a:p>
         </c:txPr>
         <c:crossAx val="-2113994440"/>
@@ -522,7 +670,8 @@
       <c:valAx>
         <c:axId val="-2113994440"/>
         <c:scaling>
-          <c:max val="9.0"/>
+          <c:orientation val="minMax"/>
+          <c:max val="9"/>
         </c:scaling>
         <c:delete val="0"/>
         <c:axPos val="l"/>
@@ -535,6 +684,7 @@
             </a:ln>
           </c:spPr>
         </c:majorGridlines>
+        <c:numFmt formatCode="General" sourceLinked="1"/>
         <c:majorTickMark val="out"/>
         <c:minorTickMark val="none"/>
         <c:tickLblPos val="nextTo"/>
@@ -545,9 +695,12 @@
         </c:spPr>
         <c:crossAx val="-2068027336"/>
         <c:crosses val="autoZero"/>
+        <c:crossBetween val="between"/>
       </c:valAx>
     </c:plotArea>
+    <c:plotVisOnly val="1"/>
     <c:dispBlanksAs val="gap"/>
+    <c:showDLblsOverMax val="1"/>
   </c:chart>
   <c:txPr>
     <a:bodyPr/>
@@ -571,7 +724,7 @@
 </file>
 
 <file path=ppt/notesMasters/notesMaster1.xml><?xml version="1.0" encoding="utf-8"?>
-<p:notesMaster xmlns:a="http://schemas.openxmlformats.org/drawingml/2006/main" xmlns:p="http://schemas.openxmlformats.org/presentationml/2006/main" xmlns:r="http://schemas.openxmlformats.org/officeDocument/2006/relationships">
+<p:notesMaster xmlns:a="http://schemas.openxmlformats.org/drawingml/2006/main" xmlns:r="http://schemas.openxmlformats.org/officeDocument/2006/relationships" xmlns:p="http://schemas.openxmlformats.org/presentationml/2006/main">
   <p:cSld>
     <p:bg>
       <p:bgRef idx="1001">
@@ -592,241 +745,16 @@
           <a:chExt cx="0" cy="0"/>
         </a:xfrm>
       </p:grpSpPr>
-      <p:sp>
-        <p:nvSpPr>
-          <p:cNvPr id="2" name="Header Placeholder 1"/>
-          <p:cNvSpPr>
-            <a:spLocks noGrp="1"/>
-          </p:cNvSpPr>
-          <p:nvPr>
-            <p:ph type="hdr" sz="quarter"/>
-          </p:nvPr>
-        </p:nvSpPr>
-        <p:spPr>
-          <a:xfrm>
-            <a:off x="0" y="0"/>
-            <a:ext cx="2971800" cy="457200"/>
-          </a:xfrm>
-          <a:prstGeom prst="rect">
-            <a:avLst/>
-          </a:prstGeom>
-        </p:spPr>
-        <p:txBody>
-          <a:bodyPr vert="horz" lIns="91440" tIns="45720" rIns="91440" bIns="45720" rtlCol="0"/>
-          <a:lstStyle>
-            <a:lvl1pPr algn="l">
-              <a:defRPr sz="1200"/>
-            </a:lvl1pPr>
-          </a:lstStyle>
-          <a:p>
-            <a:endParaRPr lang="en-US"/>
-          </a:p>
-        </p:txBody>
-      </p:sp>
-      <p:sp>
-        <p:nvSpPr>
-          <p:cNvPr id="3" name="Date Placeholder 2"/>
-          <p:cNvSpPr>
-            <a:spLocks noGrp="1"/>
-          </p:cNvSpPr>
-          <p:nvPr>
-            <p:ph type="dt" idx="1"/>
-          </p:nvPr>
-        </p:nvSpPr>
-        <p:spPr>
-          <a:xfrm>
-            <a:off x="3884613" y="0"/>
-            <a:ext cx="2971800" cy="457200"/>
-          </a:xfrm>
-          <a:prstGeom prst="rect">
-            <a:avLst/>
-          </a:prstGeom>
-        </p:spPr>
-        <p:txBody>
-          <a:bodyPr vert="horz" lIns="91440" tIns="45720" rIns="91440" bIns="45720" rtlCol="0"/>
-          <a:lstStyle>
-            <a:lvl1pPr algn="r">
-              <a:defRPr sz="1200"/>
-            </a:lvl1pPr>
-          </a:lstStyle>
-          <a:p>
-            <a:fld id="{0F89C1C7-3DCD-1040-A9CF-14679D8B5DDD}" type="datetimeFigureOut">
-              <a:rPr lang="en-US" smtClean="0"/>
-              <a:t>10/17/16</a:t>
-            </a:fld>
-            <a:endParaRPr lang="en-US"/>
-          </a:p>
-        </p:txBody>
-      </p:sp>
-      <p:sp>
-        <p:nvSpPr>
-          <p:cNvPr id="4" name="Slide Image Placeholder 3"/>
-          <p:cNvSpPr>
-            <a:spLocks noGrp="1" noRot="1" noChangeAspect="1"/>
-          </p:cNvSpPr>
-          <p:nvPr>
-            <p:ph type="sldImg" idx="2"/>
-          </p:nvPr>
-        </p:nvSpPr>
-        <p:spPr>
-          <a:xfrm>
-            <a:off x="1143000" y="685800"/>
-            <a:ext cx="4572000" cy="3429000"/>
-          </a:xfrm>
-          <a:prstGeom prst="rect">
-            <a:avLst/>
-          </a:prstGeom>
-          <a:noFill/>
-          <a:ln w="12700">
-            <a:solidFill>
-              <a:prstClr val="black"/>
-            </a:solidFill>
-          </a:ln>
-        </p:spPr>
-        <p:txBody>
-          <a:bodyPr vert="horz" lIns="91440" tIns="45720" rIns="91440" bIns="45720" rtlCol="0" anchor="ctr"/>
-          <a:lstStyle/>
-          <a:p>
-            <a:endParaRPr lang="en-US"/>
-          </a:p>
-        </p:txBody>
-      </p:sp>
-      <p:sp>
-        <p:nvSpPr>
-          <p:cNvPr id="5" name="Notes Placeholder 4"/>
-          <p:cNvSpPr>
-            <a:spLocks noGrp="1"/>
-          </p:cNvSpPr>
-          <p:nvPr>
-            <p:ph type="body" sz="quarter" idx="3"/>
-          </p:nvPr>
-        </p:nvSpPr>
-        <p:spPr>
-          <a:xfrm>
-            <a:off x="685800" y="4343400"/>
-            <a:ext cx="5486400" cy="4114800"/>
-          </a:xfrm>
-          <a:prstGeom prst="rect">
-            <a:avLst/>
-          </a:prstGeom>
-        </p:spPr>
-        <p:txBody>
-          <a:bodyPr vert="horz" lIns="91440" tIns="45720" rIns="91440" bIns="45720" rtlCol="0"/>
-          <a:lstStyle/>
-          <a:p>
-            <a:pPr lvl="0"/>
-            <a:r>
-              <a:rPr lang="en-US" smtClean="0"/>
-              <a:t>Click to edit Master text styles</a:t>
-            </a:r>
-          </a:p>
-          <a:p>
-            <a:pPr lvl="1"/>
-            <a:r>
-              <a:rPr lang="en-US" smtClean="0"/>
-              <a:t>Second level</a:t>
-            </a:r>
-          </a:p>
-          <a:p>
-            <a:pPr lvl="2"/>
-            <a:r>
-              <a:rPr lang="en-US" smtClean="0"/>
-              <a:t>Third level</a:t>
-            </a:r>
-          </a:p>
-          <a:p>
-            <a:pPr lvl="3"/>
-            <a:r>
-              <a:rPr lang="en-US" smtClean="0"/>
-              <a:t>Fourth level</a:t>
-            </a:r>
-          </a:p>
-          <a:p>
-            <a:pPr lvl="4"/>
-            <a:r>
-              <a:rPr lang="en-US" smtClean="0"/>
-              <a:t>Fifth level</a:t>
-            </a:r>
-            <a:endParaRPr lang="en-US"/>
-          </a:p>
-        </p:txBody>
-      </p:sp>
-      <p:sp>
-        <p:nvSpPr>
-          <p:cNvPr id="6" name="Footer Placeholder 5"/>
-          <p:cNvSpPr>
-            <a:spLocks noGrp="1"/>
-          </p:cNvSpPr>
-          <p:nvPr>
-            <p:ph type="ftr" sz="quarter" idx="4"/>
-          </p:nvPr>
-        </p:nvSpPr>
-        <p:spPr>
-          <a:xfrm>
-            <a:off x="0" y="8685213"/>
-            <a:ext cx="2971800" cy="457200"/>
-          </a:xfrm>
-          <a:prstGeom prst="rect">
-            <a:avLst/>
-          </a:prstGeom>
-        </p:spPr>
-        <p:txBody>
-          <a:bodyPr vert="horz" lIns="91440" tIns="45720" rIns="91440" bIns="45720" rtlCol="0" anchor="b"/>
-          <a:lstStyle>
-            <a:lvl1pPr algn="l">
-              <a:defRPr sz="1200"/>
-            </a:lvl1pPr>
-          </a:lstStyle>
-          <a:p>
-            <a:endParaRPr lang="en-US"/>
-          </a:p>
-        </p:txBody>
-      </p:sp>
-      <p:sp>
-        <p:nvSpPr>
-          <p:cNvPr id="7" name="Slide Number Placeholder 6"/>
-          <p:cNvSpPr>
-            <a:spLocks noGrp="1"/>
-          </p:cNvSpPr>
-          <p:nvPr>
-            <p:ph type="sldNum" sz="quarter" idx="5"/>
-          </p:nvPr>
-        </p:nvSpPr>
-        <p:spPr>
-          <a:xfrm>
-            <a:off x="3884613" y="8685213"/>
-            <a:ext cx="2971800" cy="457200"/>
-          </a:xfrm>
-          <a:prstGeom prst="rect">
-            <a:avLst/>
-          </a:prstGeom>
-        </p:spPr>
-        <p:txBody>
-          <a:bodyPr vert="horz" lIns="91440" tIns="45720" rIns="91440" bIns="45720" rtlCol="0" anchor="b"/>
-          <a:lstStyle>
-            <a:lvl1pPr algn="r">
-              <a:defRPr sz="1200"/>
-            </a:lvl1pPr>
-          </a:lstStyle>
-          <a:p>
-            <a:fld id="{BB5E49A5-4136-284D-997B-48E1D791AD67}" type="slidenum">
-              <a:rPr lang="en-US" smtClean="0"/>
-              <a:t>‹#›</a:t>
-            </a:fld>
-            <a:endParaRPr lang="en-US"/>
-          </a:p>
-        </p:txBody>
-      </p:sp>
     </p:spTree>
     <p:extLst>
       <p:ext uri="{BB962C8B-B14F-4D97-AF65-F5344CB8AC3E}">
-        <p14:creationId xmlns:p14="http://schemas.microsoft.com/office/powerpoint/2010/main" val="2623252185"/>
+        <p14:creationId xmlns:p14="http://schemas.microsoft.com/office/powerpoint/2010/main" val="2093003528"/>
       </p:ext>
     </p:extLst>
   </p:cSld>
   <p:clrMap bg1="lt1" tx1="dk1" bg2="lt2" tx2="dk2" accent1="accent1" accent2="accent2" accent3="accent3" accent4="accent4" accent5="accent5" accent6="accent6" hlink="hlink" folHlink="folHlink"/>
   <p:notesStyle>
-    <a:lvl1pPr marL="0" algn="l" defTabSz="457200" rtl="0" eaLnBrk="1" latinLnBrk="0" hangingPunct="1">
+    <a:lvl1pPr marL="0" algn="l" defTabSz="914400" rtl="0" eaLnBrk="1" latinLnBrk="0" hangingPunct="1">
       <a:defRPr sz="1200" kern="1200">
         <a:solidFill>
           <a:schemeClr val="tx1"/>
@@ -836,7 +764,7 @@
         <a:cs typeface="+mn-cs"/>
       </a:defRPr>
     </a:lvl1pPr>
-    <a:lvl2pPr marL="457200" algn="l" defTabSz="457200" rtl="0" eaLnBrk="1" latinLnBrk="0" hangingPunct="1">
+    <a:lvl2pPr marL="457200" algn="l" defTabSz="914400" rtl="0" eaLnBrk="1" latinLnBrk="0" hangingPunct="1">
       <a:defRPr sz="1200" kern="1200">
         <a:solidFill>
           <a:schemeClr val="tx1"/>
@@ -846,7 +774,7 @@
         <a:cs typeface="+mn-cs"/>
       </a:defRPr>
     </a:lvl2pPr>
-    <a:lvl3pPr marL="914400" algn="l" defTabSz="457200" rtl="0" eaLnBrk="1" latinLnBrk="0" hangingPunct="1">
+    <a:lvl3pPr marL="914400" algn="l" defTabSz="914400" rtl="0" eaLnBrk="1" latinLnBrk="0" hangingPunct="1">
       <a:defRPr sz="1200" kern="1200">
         <a:solidFill>
           <a:schemeClr val="tx1"/>
@@ -856,7 +784,7 @@
         <a:cs typeface="+mn-cs"/>
       </a:defRPr>
     </a:lvl3pPr>
-    <a:lvl4pPr marL="1371600" algn="l" defTabSz="457200" rtl="0" eaLnBrk="1" latinLnBrk="0" hangingPunct="1">
+    <a:lvl4pPr marL="1371600" algn="l" defTabSz="914400" rtl="0" eaLnBrk="1" latinLnBrk="0" hangingPunct="1">
       <a:defRPr sz="1200" kern="1200">
         <a:solidFill>
           <a:schemeClr val="tx1"/>
@@ -866,7 +794,7 @@
         <a:cs typeface="+mn-cs"/>
       </a:defRPr>
     </a:lvl4pPr>
-    <a:lvl5pPr marL="1828800" algn="l" defTabSz="457200" rtl="0" eaLnBrk="1" latinLnBrk="0" hangingPunct="1">
+    <a:lvl5pPr marL="1828800" algn="l" defTabSz="914400" rtl="0" eaLnBrk="1" latinLnBrk="0" hangingPunct="1">
       <a:defRPr sz="1200" kern="1200">
         <a:solidFill>
           <a:schemeClr val="tx1"/>
@@ -876,7 +804,7 @@
         <a:cs typeface="+mn-cs"/>
       </a:defRPr>
     </a:lvl5pPr>
-    <a:lvl6pPr marL="2286000" algn="l" defTabSz="457200" rtl="0" eaLnBrk="1" latinLnBrk="0" hangingPunct="1">
+    <a:lvl6pPr marL="2286000" algn="l" defTabSz="914400" rtl="0" eaLnBrk="1" latinLnBrk="0" hangingPunct="1">
       <a:defRPr sz="1200" kern="1200">
         <a:solidFill>
           <a:schemeClr val="tx1"/>
@@ -886,7 +814,7 @@
         <a:cs typeface="+mn-cs"/>
       </a:defRPr>
     </a:lvl6pPr>
-    <a:lvl7pPr marL="2743200" algn="l" defTabSz="457200" rtl="0" eaLnBrk="1" latinLnBrk="0" hangingPunct="1">
+    <a:lvl7pPr marL="2743200" algn="l" defTabSz="914400" rtl="0" eaLnBrk="1" latinLnBrk="0" hangingPunct="1">
       <a:defRPr sz="1200" kern="1200">
         <a:solidFill>
           <a:schemeClr val="tx1"/>
@@ -896,7 +824,7 @@
         <a:cs typeface="+mn-cs"/>
       </a:defRPr>
     </a:lvl7pPr>
-    <a:lvl8pPr marL="3200400" algn="l" defTabSz="457200" rtl="0" eaLnBrk="1" latinLnBrk="0" hangingPunct="1">
+    <a:lvl8pPr marL="3200400" algn="l" defTabSz="914400" rtl="0" eaLnBrk="1" latinLnBrk="0" hangingPunct="1">
       <a:defRPr sz="1200" kern="1200">
         <a:solidFill>
           <a:schemeClr val="tx1"/>
@@ -906,7 +834,7 @@
         <a:cs typeface="+mn-cs"/>
       </a:defRPr>
     </a:lvl8pPr>
-    <a:lvl9pPr marL="3657600" algn="l" defTabSz="457200" rtl="0" eaLnBrk="1" latinLnBrk="0" hangingPunct="1">
+    <a:lvl9pPr marL="3657600" algn="l" defTabSz="914400" rtl="0" eaLnBrk="1" latinLnBrk="0" hangingPunct="1">
       <a:defRPr sz="1200" kern="1200">
         <a:solidFill>
           <a:schemeClr val="tx1"/>
@@ -921,7 +849,7 @@
 </file>
 
 <file path=ppt/notesSlides/notesSlide1.xml><?xml version="1.0" encoding="utf-8"?>
-<p:notes xmlns:a="http://schemas.openxmlformats.org/drawingml/2006/main" xmlns:p="http://schemas.openxmlformats.org/presentationml/2006/main" xmlns:r="http://schemas.openxmlformats.org/officeDocument/2006/relationships">
+<p:notes xmlns:a="http://schemas.openxmlformats.org/drawingml/2006/main" xmlns:r="http://schemas.openxmlformats.org/officeDocument/2006/relationships" xmlns:p="http://schemas.openxmlformats.org/presentationml/2006/main">
   <p:cSld>
     <p:spTree>
       <p:nvGrpSpPr>
@@ -941,7 +869,7 @@
         <p:nvSpPr>
           <p:cNvPr id="2" name="Slide Image Placeholder 1"/>
           <p:cNvSpPr>
-            <a:spLocks noGrp="1"/>
+            <a:spLocks noGrp="1" noRot="1" noChangeAspect="1"/>
           </p:cNvSpPr>
           <p:nvPr>
             <p:ph type="sldImg" idx="2"/>
@@ -956,7 +884,7 @@
             <a:spLocks noGrp="1"/>
           </p:cNvSpPr>
           <p:nvPr>
-            <p:ph type="body" idx="3" sz="quarter"/>
+            <p:ph type="body" sz="quarter" idx="3"/>
           </p:nvPr>
         </p:nvSpPr>
         <p:spPr/>
@@ -977,7 +905,7 @@
             <a:spLocks noGrp="1"/>
           </p:cNvSpPr>
           <p:nvPr>
-            <p:ph type="sldNum" idx="5" sz="quarter"/>
+            <p:ph type="sldNum" sz="quarter" idx="5"/>
           </p:nvPr>
         </p:nvSpPr>
         <p:spPr/>
@@ -991,7 +919,7 @@
 </file>
 
 <file path=ppt/notesSlides/notesSlide10.xml><?xml version="1.0" encoding="utf-8"?>
-<p:notes xmlns:a="http://schemas.openxmlformats.org/drawingml/2006/main" xmlns:p="http://schemas.openxmlformats.org/presentationml/2006/main" xmlns:r="http://schemas.openxmlformats.org/officeDocument/2006/relationships">
+<p:notes xmlns:a="http://schemas.openxmlformats.org/drawingml/2006/main" xmlns:r="http://schemas.openxmlformats.org/officeDocument/2006/relationships" xmlns:p="http://schemas.openxmlformats.org/presentationml/2006/main">
   <p:cSld>
     <p:spTree>
       <p:nvGrpSpPr>
@@ -1011,7 +939,7 @@
         <p:nvSpPr>
           <p:cNvPr id="2" name="Slide Image Placeholder 1"/>
           <p:cNvSpPr>
-            <a:spLocks noGrp="1"/>
+            <a:spLocks noGrp="1" noRot="1" noChangeAspect="1"/>
           </p:cNvSpPr>
           <p:nvPr>
             <p:ph type="sldImg" idx="2"/>
@@ -1026,7 +954,7 @@
             <a:spLocks noGrp="1"/>
           </p:cNvSpPr>
           <p:nvPr>
-            <p:ph type="body" idx="3" sz="quarter"/>
+            <p:ph type="body" sz="quarter" idx="3"/>
           </p:nvPr>
         </p:nvSpPr>
         <p:spPr/>
@@ -1047,7 +975,7 @@
             <a:spLocks noGrp="1"/>
           </p:cNvSpPr>
           <p:nvPr>
-            <p:ph type="sldNum" idx="5" sz="quarter"/>
+            <p:ph type="sldNum" sz="quarter" idx="5"/>
           </p:nvPr>
         </p:nvSpPr>
         <p:spPr/>
@@ -1061,7 +989,7 @@
 </file>
 
 <file path=ppt/notesSlides/notesSlide11.xml><?xml version="1.0" encoding="utf-8"?>
-<p:notes xmlns:a="http://schemas.openxmlformats.org/drawingml/2006/main" xmlns:p="http://schemas.openxmlformats.org/presentationml/2006/main" xmlns:r="http://schemas.openxmlformats.org/officeDocument/2006/relationships">
+<p:notes xmlns:a="http://schemas.openxmlformats.org/drawingml/2006/main" xmlns:r="http://schemas.openxmlformats.org/officeDocument/2006/relationships" xmlns:p="http://schemas.openxmlformats.org/presentationml/2006/main">
   <p:cSld>
     <p:spTree>
       <p:nvGrpSpPr>
@@ -1081,7 +1009,7 @@
         <p:nvSpPr>
           <p:cNvPr id="2" name="Slide Image Placeholder 1"/>
           <p:cNvSpPr>
-            <a:spLocks noGrp="1"/>
+            <a:spLocks noGrp="1" noRot="1" noChangeAspect="1"/>
           </p:cNvSpPr>
           <p:nvPr>
             <p:ph type="sldImg" idx="2"/>
@@ -1096,7 +1024,7 @@
             <a:spLocks noGrp="1"/>
           </p:cNvSpPr>
           <p:nvPr>
-            <p:ph type="body" idx="3" sz="quarter"/>
+            <p:ph type="body" sz="quarter" idx="3"/>
           </p:nvPr>
         </p:nvSpPr>
         <p:spPr/>
@@ -1117,7 +1045,7 @@
             <a:spLocks noGrp="1"/>
           </p:cNvSpPr>
           <p:nvPr>
-            <p:ph type="sldNum" idx="5" sz="quarter"/>
+            <p:ph type="sldNum" sz="quarter" idx="5"/>
           </p:nvPr>
         </p:nvSpPr>
         <p:spPr/>
@@ -1131,7 +1059,7 @@
 </file>
 
 <file path=ppt/notesSlides/notesSlide12.xml><?xml version="1.0" encoding="utf-8"?>
-<p:notes xmlns:a="http://schemas.openxmlformats.org/drawingml/2006/main" xmlns:p="http://schemas.openxmlformats.org/presentationml/2006/main" xmlns:r="http://schemas.openxmlformats.org/officeDocument/2006/relationships">
+<p:notes xmlns:a="http://schemas.openxmlformats.org/drawingml/2006/main" xmlns:r="http://schemas.openxmlformats.org/officeDocument/2006/relationships" xmlns:p="http://schemas.openxmlformats.org/presentationml/2006/main">
   <p:cSld>
     <p:spTree>
       <p:nvGrpSpPr>
@@ -1151,7 +1079,7 @@
         <p:nvSpPr>
           <p:cNvPr id="2" name="Slide Image Placeholder 1"/>
           <p:cNvSpPr>
-            <a:spLocks noGrp="1"/>
+            <a:spLocks noGrp="1" noRot="1" noChangeAspect="1"/>
           </p:cNvSpPr>
           <p:nvPr>
             <p:ph type="sldImg" idx="2"/>
@@ -1166,7 +1094,7 @@
             <a:spLocks noGrp="1"/>
           </p:cNvSpPr>
           <p:nvPr>
-            <p:ph type="body" idx="3" sz="quarter"/>
+            <p:ph type="body" sz="quarter" idx="3"/>
           </p:nvPr>
         </p:nvSpPr>
         <p:spPr/>
@@ -1187,7 +1115,7 @@
             <a:spLocks noGrp="1"/>
           </p:cNvSpPr>
           <p:nvPr>
-            <p:ph type="sldNum" idx="5" sz="quarter"/>
+            <p:ph type="sldNum" sz="quarter" idx="5"/>
           </p:nvPr>
         </p:nvSpPr>
         <p:spPr/>
@@ -1201,7 +1129,7 @@
 </file>
 
 <file path=ppt/notesSlides/notesSlide13.xml><?xml version="1.0" encoding="utf-8"?>
-<p:notes xmlns:a="http://schemas.openxmlformats.org/drawingml/2006/main" xmlns:p="http://schemas.openxmlformats.org/presentationml/2006/main" xmlns:r="http://schemas.openxmlformats.org/officeDocument/2006/relationships">
+<p:notes xmlns:a="http://schemas.openxmlformats.org/drawingml/2006/main" xmlns:r="http://schemas.openxmlformats.org/officeDocument/2006/relationships" xmlns:p="http://schemas.openxmlformats.org/presentationml/2006/main">
   <p:cSld>
     <p:spTree>
       <p:nvGrpSpPr>
@@ -1221,7 +1149,7 @@
         <p:nvSpPr>
           <p:cNvPr id="2" name="Slide Image Placeholder 1"/>
           <p:cNvSpPr>
-            <a:spLocks noGrp="1"/>
+            <a:spLocks noGrp="1" noRot="1" noChangeAspect="1"/>
           </p:cNvSpPr>
           <p:nvPr>
             <p:ph type="sldImg" idx="2"/>
@@ -1236,7 +1164,7 @@
             <a:spLocks noGrp="1"/>
           </p:cNvSpPr>
           <p:nvPr>
-            <p:ph type="body" idx="3" sz="quarter"/>
+            <p:ph type="body" sz="quarter" idx="3"/>
           </p:nvPr>
         </p:nvSpPr>
         <p:spPr/>
@@ -1257,7 +1185,7 @@
             <a:spLocks noGrp="1"/>
           </p:cNvSpPr>
           <p:nvPr>
-            <p:ph type="sldNum" idx="5" sz="quarter"/>
+            <p:ph type="sldNum" sz="quarter" idx="5"/>
           </p:nvPr>
         </p:nvSpPr>
         <p:spPr/>
@@ -1271,7 +1199,7 @@
 </file>
 
 <file path=ppt/notesSlides/notesSlide14.xml><?xml version="1.0" encoding="utf-8"?>
-<p:notes xmlns:a="http://schemas.openxmlformats.org/drawingml/2006/main" xmlns:p="http://schemas.openxmlformats.org/presentationml/2006/main" xmlns:r="http://schemas.openxmlformats.org/officeDocument/2006/relationships">
+<p:notes xmlns:a="http://schemas.openxmlformats.org/drawingml/2006/main" xmlns:r="http://schemas.openxmlformats.org/officeDocument/2006/relationships" xmlns:p="http://schemas.openxmlformats.org/presentationml/2006/main">
   <p:cSld>
     <p:spTree>
       <p:nvGrpSpPr>
@@ -1291,7 +1219,7 @@
         <p:nvSpPr>
           <p:cNvPr id="2" name="Slide Image Placeholder 1"/>
           <p:cNvSpPr>
-            <a:spLocks noGrp="1"/>
+            <a:spLocks noGrp="1" noRot="1" noChangeAspect="1"/>
           </p:cNvSpPr>
           <p:nvPr>
             <p:ph type="sldImg" idx="2"/>
@@ -1306,7 +1234,7 @@
             <a:spLocks noGrp="1"/>
           </p:cNvSpPr>
           <p:nvPr>
-            <p:ph type="body" idx="3" sz="quarter"/>
+            <p:ph type="body" sz="quarter" idx="3"/>
           </p:nvPr>
         </p:nvSpPr>
         <p:spPr/>
@@ -1327,7 +1255,7 @@
             <a:spLocks noGrp="1"/>
           </p:cNvSpPr>
           <p:nvPr>
-            <p:ph type="sldNum" idx="5" sz="quarter"/>
+            <p:ph type="sldNum" sz="quarter" idx="5"/>
           </p:nvPr>
         </p:nvSpPr>
         <p:spPr/>
@@ -1341,7 +1269,7 @@
 </file>
 
 <file path=ppt/notesSlides/notesSlide15.xml><?xml version="1.0" encoding="utf-8"?>
-<p:notes xmlns:a="http://schemas.openxmlformats.org/drawingml/2006/main" xmlns:p="http://schemas.openxmlformats.org/presentationml/2006/main" xmlns:r="http://schemas.openxmlformats.org/officeDocument/2006/relationships">
+<p:notes xmlns:a="http://schemas.openxmlformats.org/drawingml/2006/main" xmlns:r="http://schemas.openxmlformats.org/officeDocument/2006/relationships" xmlns:p="http://schemas.openxmlformats.org/presentationml/2006/main">
   <p:cSld>
     <p:spTree>
       <p:nvGrpSpPr>
@@ -1361,7 +1289,7 @@
         <p:nvSpPr>
           <p:cNvPr id="2" name="Slide Image Placeholder 1"/>
           <p:cNvSpPr>
-            <a:spLocks noGrp="1"/>
+            <a:spLocks noGrp="1" noRot="1" noChangeAspect="1"/>
           </p:cNvSpPr>
           <p:nvPr>
             <p:ph type="sldImg" idx="2"/>
@@ -1376,7 +1304,7 @@
             <a:spLocks noGrp="1"/>
           </p:cNvSpPr>
           <p:nvPr>
-            <p:ph type="body" idx="3" sz="quarter"/>
+            <p:ph type="body" sz="quarter" idx="3"/>
           </p:nvPr>
         </p:nvSpPr>
         <p:spPr/>
@@ -1397,7 +1325,7 @@
             <a:spLocks noGrp="1"/>
           </p:cNvSpPr>
           <p:nvPr>
-            <p:ph type="sldNum" idx="5" sz="quarter"/>
+            <p:ph type="sldNum" sz="quarter" idx="5"/>
           </p:nvPr>
         </p:nvSpPr>
         <p:spPr/>
@@ -1411,7 +1339,7 @@
 </file>
 
 <file path=ppt/notesSlides/notesSlide16.xml><?xml version="1.0" encoding="utf-8"?>
-<p:notes xmlns:a="http://schemas.openxmlformats.org/drawingml/2006/main" xmlns:p="http://schemas.openxmlformats.org/presentationml/2006/main" xmlns:r="http://schemas.openxmlformats.org/officeDocument/2006/relationships">
+<p:notes xmlns:a="http://schemas.openxmlformats.org/drawingml/2006/main" xmlns:r="http://schemas.openxmlformats.org/officeDocument/2006/relationships" xmlns:p="http://schemas.openxmlformats.org/presentationml/2006/main">
   <p:cSld>
     <p:spTree>
       <p:nvGrpSpPr>
@@ -1431,7 +1359,7 @@
         <p:nvSpPr>
           <p:cNvPr id="2" name="Slide Image Placeholder 1"/>
           <p:cNvSpPr>
-            <a:spLocks noGrp="1"/>
+            <a:spLocks noGrp="1" noRot="1" noChangeAspect="1"/>
           </p:cNvSpPr>
           <p:nvPr>
             <p:ph type="sldImg" idx="2"/>
@@ -1446,7 +1374,7 @@
             <a:spLocks noGrp="1"/>
           </p:cNvSpPr>
           <p:nvPr>
-            <p:ph type="body" idx="3" sz="quarter"/>
+            <p:ph type="body" sz="quarter" idx="3"/>
           </p:nvPr>
         </p:nvSpPr>
         <p:spPr/>
@@ -1467,7 +1395,7 @@
             <a:spLocks noGrp="1"/>
           </p:cNvSpPr>
           <p:nvPr>
-            <p:ph type="sldNum" idx="5" sz="quarter"/>
+            <p:ph type="sldNum" sz="quarter" idx="5"/>
           </p:nvPr>
         </p:nvSpPr>
         <p:spPr/>
@@ -1481,7 +1409,7 @@
 </file>
 
 <file path=ppt/notesSlides/notesSlide17.xml><?xml version="1.0" encoding="utf-8"?>
-<p:notes xmlns:a="http://schemas.openxmlformats.org/drawingml/2006/main" xmlns:p="http://schemas.openxmlformats.org/presentationml/2006/main" xmlns:r="http://schemas.openxmlformats.org/officeDocument/2006/relationships">
+<p:notes xmlns:a="http://schemas.openxmlformats.org/drawingml/2006/main" xmlns:r="http://schemas.openxmlformats.org/officeDocument/2006/relationships" xmlns:p="http://schemas.openxmlformats.org/presentationml/2006/main">
   <p:cSld>
     <p:spTree>
       <p:nvGrpSpPr>
@@ -1501,7 +1429,7 @@
         <p:nvSpPr>
           <p:cNvPr id="2" name="Slide Image Placeholder 1"/>
           <p:cNvSpPr>
-            <a:spLocks noGrp="1"/>
+            <a:spLocks noGrp="1" noRot="1" noChangeAspect="1"/>
           </p:cNvSpPr>
           <p:nvPr>
             <p:ph type="sldImg" idx="2"/>
@@ -1516,7 +1444,7 @@
             <a:spLocks noGrp="1"/>
           </p:cNvSpPr>
           <p:nvPr>
-            <p:ph type="body" idx="3" sz="quarter"/>
+            <p:ph type="body" sz="quarter" idx="3"/>
           </p:nvPr>
         </p:nvSpPr>
         <p:spPr/>
@@ -1537,7 +1465,7 @@
             <a:spLocks noGrp="1"/>
           </p:cNvSpPr>
           <p:nvPr>
-            <p:ph type="sldNum" idx="5" sz="quarter"/>
+            <p:ph type="sldNum" sz="quarter" idx="5"/>
           </p:nvPr>
         </p:nvSpPr>
         <p:spPr/>
@@ -1551,7 +1479,7 @@
 </file>
 
 <file path=ppt/notesSlides/notesSlide18.xml><?xml version="1.0" encoding="utf-8"?>
-<p:notes xmlns:a="http://schemas.openxmlformats.org/drawingml/2006/main" xmlns:p="http://schemas.openxmlformats.org/presentationml/2006/main" xmlns:r="http://schemas.openxmlformats.org/officeDocument/2006/relationships">
+<p:notes xmlns:a="http://schemas.openxmlformats.org/drawingml/2006/main" xmlns:r="http://schemas.openxmlformats.org/officeDocument/2006/relationships" xmlns:p="http://schemas.openxmlformats.org/presentationml/2006/main">
   <p:cSld>
     <p:spTree>
       <p:nvGrpSpPr>
@@ -1571,7 +1499,7 @@
         <p:nvSpPr>
           <p:cNvPr id="2" name="Slide Image Placeholder 1"/>
           <p:cNvSpPr>
-            <a:spLocks noGrp="1"/>
+            <a:spLocks noGrp="1" noRot="1" noChangeAspect="1"/>
           </p:cNvSpPr>
           <p:nvPr>
             <p:ph type="sldImg" idx="2"/>
@@ -1586,7 +1514,7 @@
             <a:spLocks noGrp="1"/>
           </p:cNvSpPr>
           <p:nvPr>
-            <p:ph type="body" idx="3" sz="quarter"/>
+            <p:ph type="body" sz="quarter" idx="3"/>
           </p:nvPr>
         </p:nvSpPr>
         <p:spPr/>
@@ -1607,7 +1535,7 @@
             <a:spLocks noGrp="1"/>
           </p:cNvSpPr>
           <p:nvPr>
-            <p:ph type="sldNum" idx="5" sz="quarter"/>
+            <p:ph type="sldNum" sz="quarter" idx="5"/>
           </p:nvPr>
         </p:nvSpPr>
         <p:spPr/>
@@ -1621,7 +1549,7 @@
 </file>
 
 <file path=ppt/notesSlides/notesSlide19.xml><?xml version="1.0" encoding="utf-8"?>
-<p:notes xmlns:a="http://schemas.openxmlformats.org/drawingml/2006/main" xmlns:p="http://schemas.openxmlformats.org/presentationml/2006/main" xmlns:r="http://schemas.openxmlformats.org/officeDocument/2006/relationships">
+<p:notes xmlns:a="http://schemas.openxmlformats.org/drawingml/2006/main" xmlns:r="http://schemas.openxmlformats.org/officeDocument/2006/relationships" xmlns:p="http://schemas.openxmlformats.org/presentationml/2006/main">
   <p:cSld>
     <p:spTree>
       <p:nvGrpSpPr>
@@ -1641,7 +1569,7 @@
         <p:nvSpPr>
           <p:cNvPr id="2" name="Slide Image Placeholder 1"/>
           <p:cNvSpPr>
-            <a:spLocks noGrp="1"/>
+            <a:spLocks noGrp="1" noRot="1" noChangeAspect="1"/>
           </p:cNvSpPr>
           <p:nvPr>
             <p:ph type="sldImg" idx="2"/>
@@ -1656,7 +1584,7 @@
             <a:spLocks noGrp="1"/>
           </p:cNvSpPr>
           <p:nvPr>
-            <p:ph type="body" idx="3" sz="quarter"/>
+            <p:ph type="body" sz="quarter" idx="3"/>
           </p:nvPr>
         </p:nvSpPr>
         <p:spPr/>
@@ -1677,7 +1605,7 @@
             <a:spLocks noGrp="1"/>
           </p:cNvSpPr>
           <p:nvPr>
-            <p:ph type="sldNum" idx="5" sz="quarter"/>
+            <p:ph type="sldNum" sz="quarter" idx="5"/>
           </p:nvPr>
         </p:nvSpPr>
         <p:spPr/>
@@ -1691,7 +1619,7 @@
 </file>
 
 <file path=ppt/notesSlides/notesSlide2.xml><?xml version="1.0" encoding="utf-8"?>
-<p:notes xmlns:a="http://schemas.openxmlformats.org/drawingml/2006/main" xmlns:p="http://schemas.openxmlformats.org/presentationml/2006/main" xmlns:r="http://schemas.openxmlformats.org/officeDocument/2006/relationships">
+<p:notes xmlns:a="http://schemas.openxmlformats.org/drawingml/2006/main" xmlns:r="http://schemas.openxmlformats.org/officeDocument/2006/relationships" xmlns:p="http://schemas.openxmlformats.org/presentationml/2006/main">
   <p:cSld>
     <p:spTree>
       <p:nvGrpSpPr>
@@ -1711,7 +1639,7 @@
         <p:nvSpPr>
           <p:cNvPr id="2" name="Slide Image Placeholder 1"/>
           <p:cNvSpPr>
-            <a:spLocks noGrp="1"/>
+            <a:spLocks noGrp="1" noRot="1" noChangeAspect="1"/>
           </p:cNvSpPr>
           <p:nvPr>
             <p:ph type="sldImg" idx="2"/>
@@ -1726,7 +1654,7 @@
             <a:spLocks noGrp="1"/>
           </p:cNvSpPr>
           <p:nvPr>
-            <p:ph type="body" idx="3" sz="quarter"/>
+            <p:ph type="body" sz="quarter" idx="3"/>
           </p:nvPr>
         </p:nvSpPr>
         <p:spPr/>
@@ -1747,7 +1675,7 @@
             <a:spLocks noGrp="1"/>
           </p:cNvSpPr>
           <p:nvPr>
-            <p:ph type="sldNum" idx="5" sz="quarter"/>
+            <p:ph type="sldNum" sz="quarter" idx="5"/>
           </p:nvPr>
         </p:nvSpPr>
         <p:spPr/>
@@ -1761,7 +1689,7 @@
 </file>
 
 <file path=ppt/notesSlides/notesSlide3.xml><?xml version="1.0" encoding="utf-8"?>
-<p:notes xmlns:a="http://schemas.openxmlformats.org/drawingml/2006/main" xmlns:p="http://schemas.openxmlformats.org/presentationml/2006/main" xmlns:r="http://schemas.openxmlformats.org/officeDocument/2006/relationships">
+<p:notes xmlns:a="http://schemas.openxmlformats.org/drawingml/2006/main" xmlns:r="http://schemas.openxmlformats.org/officeDocument/2006/relationships" xmlns:p="http://schemas.openxmlformats.org/presentationml/2006/main">
   <p:cSld>
     <p:spTree>
       <p:nvGrpSpPr>
@@ -1781,7 +1709,7 @@
         <p:nvSpPr>
           <p:cNvPr id="2" name="Slide Image Placeholder 1"/>
           <p:cNvSpPr>
-            <a:spLocks noGrp="1"/>
+            <a:spLocks noGrp="1" noRot="1" noChangeAspect="1"/>
           </p:cNvSpPr>
           <p:nvPr>
             <p:ph type="sldImg" idx="2"/>
@@ -1796,7 +1724,7 @@
             <a:spLocks noGrp="1"/>
           </p:cNvSpPr>
           <p:nvPr>
-            <p:ph type="body" idx="3" sz="quarter"/>
+            <p:ph type="body" sz="quarter" idx="3"/>
           </p:nvPr>
         </p:nvSpPr>
         <p:spPr/>
@@ -1817,7 +1745,7 @@
             <a:spLocks noGrp="1"/>
           </p:cNvSpPr>
           <p:nvPr>
-            <p:ph type="sldNum" idx="5" sz="quarter"/>
+            <p:ph type="sldNum" sz="quarter" idx="5"/>
           </p:nvPr>
         </p:nvSpPr>
         <p:spPr/>
@@ -1831,7 +1759,7 @@
 </file>
 
 <file path=ppt/notesSlides/notesSlide4.xml><?xml version="1.0" encoding="utf-8"?>
-<p:notes xmlns:a="http://schemas.openxmlformats.org/drawingml/2006/main" xmlns:p="http://schemas.openxmlformats.org/presentationml/2006/main" xmlns:r="http://schemas.openxmlformats.org/officeDocument/2006/relationships">
+<p:notes xmlns:a="http://schemas.openxmlformats.org/drawingml/2006/main" xmlns:r="http://schemas.openxmlformats.org/officeDocument/2006/relationships" xmlns:p="http://schemas.openxmlformats.org/presentationml/2006/main">
   <p:cSld>
     <p:spTree>
       <p:nvGrpSpPr>
@@ -1851,7 +1779,7 @@
         <p:nvSpPr>
           <p:cNvPr id="2" name="Slide Image Placeholder 1"/>
           <p:cNvSpPr>
-            <a:spLocks noGrp="1"/>
+            <a:spLocks noGrp="1" noRot="1" noChangeAspect="1"/>
           </p:cNvSpPr>
           <p:nvPr>
             <p:ph type="sldImg" idx="2"/>
@@ -1866,7 +1794,7 @@
             <a:spLocks noGrp="1"/>
           </p:cNvSpPr>
           <p:nvPr>
-            <p:ph type="body" idx="3" sz="quarter"/>
+            <p:ph type="body" sz="quarter" idx="3"/>
           </p:nvPr>
         </p:nvSpPr>
         <p:spPr/>
@@ -1887,7 +1815,7 @@
             <a:spLocks noGrp="1"/>
           </p:cNvSpPr>
           <p:nvPr>
-            <p:ph type="sldNum" idx="5" sz="quarter"/>
+            <p:ph type="sldNum" sz="quarter" idx="5"/>
           </p:nvPr>
         </p:nvSpPr>
         <p:spPr/>
@@ -1901,7 +1829,7 @@
 </file>
 
 <file path=ppt/notesSlides/notesSlide5.xml><?xml version="1.0" encoding="utf-8"?>
-<p:notes xmlns:a="http://schemas.openxmlformats.org/drawingml/2006/main" xmlns:p="http://schemas.openxmlformats.org/presentationml/2006/main" xmlns:r="http://schemas.openxmlformats.org/officeDocument/2006/relationships">
+<p:notes xmlns:a="http://schemas.openxmlformats.org/drawingml/2006/main" xmlns:r="http://schemas.openxmlformats.org/officeDocument/2006/relationships" xmlns:p="http://schemas.openxmlformats.org/presentationml/2006/main">
   <p:cSld>
     <p:spTree>
       <p:nvGrpSpPr>
@@ -1921,7 +1849,7 @@
         <p:nvSpPr>
           <p:cNvPr id="2" name="Slide Image Placeholder 1"/>
           <p:cNvSpPr>
-            <a:spLocks noGrp="1"/>
+            <a:spLocks noGrp="1" noRot="1" noChangeAspect="1"/>
           </p:cNvSpPr>
           <p:nvPr>
             <p:ph type="sldImg" idx="2"/>
@@ -1936,7 +1864,7 @@
             <a:spLocks noGrp="1"/>
           </p:cNvSpPr>
           <p:nvPr>
-            <p:ph type="body" idx="3" sz="quarter"/>
+            <p:ph type="body" sz="quarter" idx="3"/>
           </p:nvPr>
         </p:nvSpPr>
         <p:spPr/>
@@ -1957,7 +1885,7 @@
             <a:spLocks noGrp="1"/>
           </p:cNvSpPr>
           <p:nvPr>
-            <p:ph type="sldNum" idx="5" sz="quarter"/>
+            <p:ph type="sldNum" sz="quarter" idx="5"/>
           </p:nvPr>
         </p:nvSpPr>
         <p:spPr/>
@@ -1971,7 +1899,7 @@
 </file>
 
 <file path=ppt/notesSlides/notesSlide6.xml><?xml version="1.0" encoding="utf-8"?>
-<p:notes xmlns:a="http://schemas.openxmlformats.org/drawingml/2006/main" xmlns:p="http://schemas.openxmlformats.org/presentationml/2006/main" xmlns:r="http://schemas.openxmlformats.org/officeDocument/2006/relationships">
+<p:notes xmlns:a="http://schemas.openxmlformats.org/drawingml/2006/main" xmlns:r="http://schemas.openxmlformats.org/officeDocument/2006/relationships" xmlns:p="http://schemas.openxmlformats.org/presentationml/2006/main">
   <p:cSld>
     <p:spTree>
       <p:nvGrpSpPr>
@@ -1991,7 +1919,7 @@
         <p:nvSpPr>
           <p:cNvPr id="2" name="Slide Image Placeholder 1"/>
           <p:cNvSpPr>
-            <a:spLocks noGrp="1"/>
+            <a:spLocks noGrp="1" noRot="1" noChangeAspect="1"/>
           </p:cNvSpPr>
           <p:nvPr>
             <p:ph type="sldImg" idx="2"/>
@@ -2006,7 +1934,7 @@
             <a:spLocks noGrp="1"/>
           </p:cNvSpPr>
           <p:nvPr>
-            <p:ph type="body" idx="3" sz="quarter"/>
+            <p:ph type="body" sz="quarter" idx="3"/>
           </p:nvPr>
         </p:nvSpPr>
         <p:spPr/>
@@ -2027,7 +1955,7 @@
             <a:spLocks noGrp="1"/>
           </p:cNvSpPr>
           <p:nvPr>
-            <p:ph type="sldNum" idx="5" sz="quarter"/>
+            <p:ph type="sldNum" sz="quarter" idx="5"/>
           </p:nvPr>
         </p:nvSpPr>
         <p:spPr/>
@@ -2041,7 +1969,7 @@
 </file>
 
 <file path=ppt/notesSlides/notesSlide7.xml><?xml version="1.0" encoding="utf-8"?>
-<p:notes xmlns:a="http://schemas.openxmlformats.org/drawingml/2006/main" xmlns:p="http://schemas.openxmlformats.org/presentationml/2006/main" xmlns:r="http://schemas.openxmlformats.org/officeDocument/2006/relationships">
+<p:notes xmlns:a="http://schemas.openxmlformats.org/drawingml/2006/main" xmlns:r="http://schemas.openxmlformats.org/officeDocument/2006/relationships" xmlns:p="http://schemas.openxmlformats.org/presentationml/2006/main">
   <p:cSld>
     <p:spTree>
       <p:nvGrpSpPr>
@@ -2061,7 +1989,7 @@
         <p:nvSpPr>
           <p:cNvPr id="2" name="Slide Image Placeholder 1"/>
           <p:cNvSpPr>
-            <a:spLocks noGrp="1"/>
+            <a:spLocks noGrp="1" noRot="1" noChangeAspect="1"/>
           </p:cNvSpPr>
           <p:nvPr>
             <p:ph type="sldImg" idx="2"/>
@@ -2076,7 +2004,7 @@
             <a:spLocks noGrp="1"/>
           </p:cNvSpPr>
           <p:nvPr>
-            <p:ph type="body" idx="3" sz="quarter"/>
+            <p:ph type="body" sz="quarter" idx="3"/>
           </p:nvPr>
         </p:nvSpPr>
         <p:spPr/>
@@ -2097,7 +2025,7 @@
             <a:spLocks noGrp="1"/>
           </p:cNvSpPr>
           <p:nvPr>
-            <p:ph type="sldNum" idx="5" sz="quarter"/>
+            <p:ph type="sldNum" sz="quarter" idx="5"/>
           </p:nvPr>
         </p:nvSpPr>
         <p:spPr/>
@@ -2111,7 +2039,7 @@
 </file>
 
 <file path=ppt/notesSlides/notesSlide8.xml><?xml version="1.0" encoding="utf-8"?>
-<p:notes xmlns:a="http://schemas.openxmlformats.org/drawingml/2006/main" xmlns:p="http://schemas.openxmlformats.org/presentationml/2006/main" xmlns:r="http://schemas.openxmlformats.org/officeDocument/2006/relationships">
+<p:notes xmlns:a="http://schemas.openxmlformats.org/drawingml/2006/main" xmlns:r="http://schemas.openxmlformats.org/officeDocument/2006/relationships" xmlns:p="http://schemas.openxmlformats.org/presentationml/2006/main">
   <p:cSld>
     <p:spTree>
       <p:nvGrpSpPr>
@@ -2131,7 +2059,7 @@
         <p:nvSpPr>
           <p:cNvPr id="2" name="Slide Image Placeholder 1"/>
           <p:cNvSpPr>
-            <a:spLocks noGrp="1"/>
+            <a:spLocks noGrp="1" noRot="1" noChangeAspect="1"/>
           </p:cNvSpPr>
           <p:nvPr>
             <p:ph type="sldImg" idx="2"/>
@@ -2146,7 +2074,7 @@
             <a:spLocks noGrp="1"/>
           </p:cNvSpPr>
           <p:nvPr>
-            <p:ph type="body" idx="3" sz="quarter"/>
+            <p:ph type="body" sz="quarter" idx="3"/>
           </p:nvPr>
         </p:nvSpPr>
         <p:spPr/>
@@ -2167,7 +2095,7 @@
             <a:spLocks noGrp="1"/>
           </p:cNvSpPr>
           <p:nvPr>
-            <p:ph type="sldNum" idx="5" sz="quarter"/>
+            <p:ph type="sldNum" sz="quarter" idx="5"/>
           </p:nvPr>
         </p:nvSpPr>
         <p:spPr/>
@@ -2181,7 +2109,7 @@
 </file>
 
 <file path=ppt/notesSlides/notesSlide9.xml><?xml version="1.0" encoding="utf-8"?>
-<p:notes xmlns:a="http://schemas.openxmlformats.org/drawingml/2006/main" xmlns:p="http://schemas.openxmlformats.org/presentationml/2006/main" xmlns:r="http://schemas.openxmlformats.org/officeDocument/2006/relationships">
+<p:notes xmlns:a="http://schemas.openxmlformats.org/drawingml/2006/main" xmlns:r="http://schemas.openxmlformats.org/officeDocument/2006/relationships" xmlns:p="http://schemas.openxmlformats.org/presentationml/2006/main">
   <p:cSld>
     <p:spTree>
       <p:nvGrpSpPr>
@@ -2201,7 +2129,7 @@
         <p:nvSpPr>
           <p:cNvPr id="2" name="Slide Image Placeholder 1"/>
           <p:cNvSpPr>
-            <a:spLocks noGrp="1"/>
+            <a:spLocks noGrp="1" noRot="1" noChangeAspect="1"/>
           </p:cNvSpPr>
           <p:nvPr>
             <p:ph type="sldImg" idx="2"/>
@@ -2216,7 +2144,7 @@
             <a:spLocks noGrp="1"/>
           </p:cNvSpPr>
           <p:nvPr>
-            <p:ph type="body" idx="3" sz="quarter"/>
+            <p:ph type="body" sz="quarter" idx="3"/>
           </p:nvPr>
         </p:nvSpPr>
         <p:spPr/>
@@ -2237,7 +2165,7 @@
             <a:spLocks noGrp="1"/>
           </p:cNvSpPr>
           <p:nvPr>
-            <p:ph type="sldNum" idx="5" sz="quarter"/>
+            <p:ph type="sldNum" sz="quarter" idx="5"/>
           </p:nvPr>
         </p:nvSpPr>
         <p:spPr/>
@@ -2288,10 +2216,9 @@
           <a:lstStyle/>
           <a:p>
             <a:r>
-              <a:rPr lang="en-US" smtClean="0"/>
+              <a:rPr lang="en-US"/>
               <a:t>Click to edit Master title style</a:t>
             </a:r>
-            <a:endParaRPr lang="en-US"/>
           </a:p>
         </p:txBody>
       </p:sp>
@@ -2407,10 +2334,9 @@
           </a:lstStyle>
           <a:p>
             <a:r>
-              <a:rPr lang="en-US" smtClean="0"/>
+              <a:rPr lang="en-US"/>
               <a:t>Click to edit Master subtitle style</a:t>
             </a:r>
-            <a:endParaRPr lang="en-US"/>
           </a:p>
         </p:txBody>
       </p:sp>
@@ -2431,7 +2357,7 @@
           <a:p>
             <a:fld id="{5BCAD085-E8A6-8845-BD4E-CB4CCA059FC4}" type="datetimeFigureOut">
               <a:rPr lang="en-US" smtClean="0"/>
-              <a:t>1/27/13</a:t>
+              <a:t>10/21/2026</a:t>
             </a:fld>
             <a:endParaRPr lang="en-US"/>
           </a:p>
@@ -2525,10 +2451,9 @@
           <a:lstStyle/>
           <a:p>
             <a:r>
-              <a:rPr lang="en-US" smtClean="0"/>
+              <a:rPr lang="en-US"/>
               <a:t>Click to edit Master title style</a:t>
             </a:r>
-            <a:endParaRPr lang="en-US"/>
           </a:p>
         </p:txBody>
       </p:sp>
@@ -2549,38 +2474,37 @@
           <a:p>
             <a:pPr lvl="0"/>
             <a:r>
-              <a:rPr lang="en-US" smtClean="0"/>
+              <a:rPr lang="en-US"/>
               <a:t>Click to edit Master text styles</a:t>
             </a:r>
           </a:p>
           <a:p>
             <a:pPr lvl="1"/>
             <a:r>
-              <a:rPr lang="en-US" smtClean="0"/>
+              <a:rPr lang="en-US"/>
               <a:t>Second level</a:t>
             </a:r>
           </a:p>
           <a:p>
             <a:pPr lvl="2"/>
             <a:r>
-              <a:rPr lang="en-US" smtClean="0"/>
+              <a:rPr lang="en-US"/>
               <a:t>Third level</a:t>
             </a:r>
           </a:p>
           <a:p>
             <a:pPr lvl="3"/>
             <a:r>
-              <a:rPr lang="en-US" smtClean="0"/>
+              <a:rPr lang="en-US"/>
               <a:t>Fourth level</a:t>
             </a:r>
           </a:p>
           <a:p>
             <a:pPr lvl="4"/>
             <a:r>
-              <a:rPr lang="en-US" smtClean="0"/>
+              <a:rPr lang="en-US"/>
               <a:t>Fifth level</a:t>
             </a:r>
-            <a:endParaRPr lang="en-US"/>
           </a:p>
         </p:txBody>
       </p:sp>
@@ -2601,7 +2525,7 @@
           <a:p>
             <a:fld id="{5BCAD085-E8A6-8845-BD4E-CB4CCA059FC4}" type="datetimeFigureOut">
               <a:rPr lang="en-US" smtClean="0"/>
-              <a:t>1/27/13</a:t>
+              <a:t>10/21/2026</a:t>
             </a:fld>
             <a:endParaRPr lang="en-US"/>
           </a:p>
@@ -2700,10 +2624,9 @@
           <a:lstStyle/>
           <a:p>
             <a:r>
-              <a:rPr lang="en-US" smtClean="0"/>
+              <a:rPr lang="en-US"/>
               <a:t>Click to edit Master title style</a:t>
             </a:r>
-            <a:endParaRPr lang="en-US"/>
           </a:p>
         </p:txBody>
       </p:sp>
@@ -2729,38 +2652,37 @@
           <a:p>
             <a:pPr lvl="0"/>
             <a:r>
-              <a:rPr lang="en-US" smtClean="0"/>
+              <a:rPr lang="en-US"/>
               <a:t>Click to edit Master text styles</a:t>
             </a:r>
           </a:p>
           <a:p>
             <a:pPr lvl="1"/>
             <a:r>
-              <a:rPr lang="en-US" smtClean="0"/>
+              <a:rPr lang="en-US"/>
               <a:t>Second level</a:t>
             </a:r>
           </a:p>
           <a:p>
             <a:pPr lvl="2"/>
             <a:r>
-              <a:rPr lang="en-US" smtClean="0"/>
+              <a:rPr lang="en-US"/>
               <a:t>Third level</a:t>
             </a:r>
           </a:p>
           <a:p>
             <a:pPr lvl="3"/>
             <a:r>
-              <a:rPr lang="en-US" smtClean="0"/>
+              <a:rPr lang="en-US"/>
               <a:t>Fourth level</a:t>
             </a:r>
           </a:p>
           <a:p>
             <a:pPr lvl="4"/>
             <a:r>
-              <a:rPr lang="en-US" smtClean="0"/>
+              <a:rPr lang="en-US"/>
               <a:t>Fifth level</a:t>
             </a:r>
-            <a:endParaRPr lang="en-US"/>
           </a:p>
         </p:txBody>
       </p:sp>
@@ -2781,7 +2703,7 @@
           <a:p>
             <a:fld id="{5BCAD085-E8A6-8845-BD4E-CB4CCA059FC4}" type="datetimeFigureOut">
               <a:rPr lang="en-US" smtClean="0"/>
-              <a:t>1/27/13</a:t>
+              <a:t>10/21/2026</a:t>
             </a:fld>
             <a:endParaRPr lang="en-US"/>
           </a:p>
@@ -2875,10 +2797,9 @@
           <a:lstStyle/>
           <a:p>
             <a:r>
-              <a:rPr lang="en-US" smtClean="0"/>
+              <a:rPr lang="en-US"/>
               <a:t>Click to edit Master title style</a:t>
             </a:r>
-            <a:endParaRPr lang="en-US"/>
           </a:p>
         </p:txBody>
       </p:sp>
@@ -2899,38 +2820,37 @@
           <a:p>
             <a:pPr lvl="0"/>
             <a:r>
-              <a:rPr lang="en-US" smtClean="0"/>
+              <a:rPr lang="en-US"/>
               <a:t>Click to edit Master text styles</a:t>
             </a:r>
           </a:p>
           <a:p>
             <a:pPr lvl="1"/>
             <a:r>
-              <a:rPr lang="en-US" smtClean="0"/>
+              <a:rPr lang="en-US"/>
               <a:t>Second level</a:t>
             </a:r>
           </a:p>
           <a:p>
             <a:pPr lvl="2"/>
             <a:r>
-              <a:rPr lang="en-US" smtClean="0"/>
+              <a:rPr lang="en-US"/>
               <a:t>Third level</a:t>
             </a:r>
           </a:p>
           <a:p>
             <a:pPr lvl="3"/>
             <a:r>
-              <a:rPr lang="en-US" smtClean="0"/>
+              <a:rPr lang="en-US"/>
               <a:t>Fourth level</a:t>
             </a:r>
           </a:p>
           <a:p>
             <a:pPr lvl="4"/>
             <a:r>
-              <a:rPr lang="en-US" smtClean="0"/>
+              <a:rPr lang="en-US"/>
               <a:t>Fifth level</a:t>
             </a:r>
-            <a:endParaRPr lang="en-US"/>
           </a:p>
         </p:txBody>
       </p:sp>
@@ -2951,7 +2871,7 @@
           <a:p>
             <a:fld id="{5BCAD085-E8A6-8845-BD4E-CB4CCA059FC4}" type="datetimeFigureOut">
               <a:rPr lang="en-US" smtClean="0"/>
-              <a:t>1/27/13</a:t>
+              <a:t>10/21/2026</a:t>
             </a:fld>
             <a:endParaRPr lang="en-US"/>
           </a:p>
@@ -3054,10 +2974,9 @@
           </a:lstStyle>
           <a:p>
             <a:r>
-              <a:rPr lang="en-US" smtClean="0"/>
+              <a:rPr lang="en-US"/>
               <a:t>Click to edit Master title style</a:t>
             </a:r>
-            <a:endParaRPr lang="en-US"/>
           </a:p>
         </p:txBody>
       </p:sp>
@@ -3174,7 +3093,7 @@
           <a:p>
             <a:pPr lvl="0"/>
             <a:r>
-              <a:rPr lang="en-US" smtClean="0"/>
+              <a:rPr lang="en-US"/>
               <a:t>Click to edit Master text styles</a:t>
             </a:r>
           </a:p>
@@ -3197,7 +3116,7 @@
           <a:p>
             <a:fld id="{5BCAD085-E8A6-8845-BD4E-CB4CCA059FC4}" type="datetimeFigureOut">
               <a:rPr lang="en-US" smtClean="0"/>
-              <a:t>1/27/13</a:t>
+              <a:t>10/21/2026</a:t>
             </a:fld>
             <a:endParaRPr lang="en-US"/>
           </a:p>
@@ -3291,10 +3210,9 @@
           <a:lstStyle/>
           <a:p>
             <a:r>
-              <a:rPr lang="en-US" smtClean="0"/>
+              <a:rPr lang="en-US"/>
               <a:t>Click to edit Master title style</a:t>
             </a:r>
-            <a:endParaRPr lang="en-US"/>
           </a:p>
         </p:txBody>
       </p:sp>
@@ -3348,38 +3266,37 @@
           <a:p>
             <a:pPr lvl="0"/>
             <a:r>
-              <a:rPr lang="en-US" smtClean="0"/>
+              <a:rPr lang="en-US"/>
               <a:t>Click to edit Master text styles</a:t>
             </a:r>
           </a:p>
           <a:p>
             <a:pPr lvl="1"/>
             <a:r>
-              <a:rPr lang="en-US" smtClean="0"/>
+              <a:rPr lang="en-US"/>
               <a:t>Second level</a:t>
             </a:r>
           </a:p>
           <a:p>
             <a:pPr lvl="2"/>
             <a:r>
-              <a:rPr lang="en-US" smtClean="0"/>
+              <a:rPr lang="en-US"/>
               <a:t>Third level</a:t>
             </a:r>
           </a:p>
           <a:p>
             <a:pPr lvl="3"/>
             <a:r>
-              <a:rPr lang="en-US" smtClean="0"/>
+              <a:rPr lang="en-US"/>
               <a:t>Fourth level</a:t>
             </a:r>
           </a:p>
           <a:p>
             <a:pPr lvl="4"/>
             <a:r>
-              <a:rPr lang="en-US" smtClean="0"/>
+              <a:rPr lang="en-US"/>
               <a:t>Fifth level</a:t>
             </a:r>
-            <a:endParaRPr lang="en-US"/>
           </a:p>
         </p:txBody>
       </p:sp>
@@ -3433,38 +3350,37 @@
           <a:p>
             <a:pPr lvl="0"/>
             <a:r>
-              <a:rPr lang="en-US" smtClean="0"/>
+              <a:rPr lang="en-US"/>
               <a:t>Click to edit Master text styles</a:t>
             </a:r>
           </a:p>
           <a:p>
             <a:pPr lvl="1"/>
             <a:r>
-              <a:rPr lang="en-US" smtClean="0"/>
+              <a:rPr lang="en-US"/>
               <a:t>Second level</a:t>
             </a:r>
           </a:p>
           <a:p>
             <a:pPr lvl="2"/>
             <a:r>
-              <a:rPr lang="en-US" smtClean="0"/>
+              <a:rPr lang="en-US"/>
               <a:t>Third level</a:t>
             </a:r>
           </a:p>
           <a:p>
             <a:pPr lvl="3"/>
             <a:r>
-              <a:rPr lang="en-US" smtClean="0"/>
+              <a:rPr lang="en-US"/>
               <a:t>Fourth level</a:t>
             </a:r>
           </a:p>
           <a:p>
             <a:pPr lvl="4"/>
             <a:r>
-              <a:rPr lang="en-US" smtClean="0"/>
+              <a:rPr lang="en-US"/>
               <a:t>Fifth level</a:t>
             </a:r>
-            <a:endParaRPr lang="en-US"/>
           </a:p>
         </p:txBody>
       </p:sp>
@@ -3485,7 +3401,7 @@
           <a:p>
             <a:fld id="{5BCAD085-E8A6-8845-BD4E-CB4CCA059FC4}" type="datetimeFigureOut">
               <a:rPr lang="en-US" smtClean="0"/>
-              <a:t>1/27/13</a:t>
+              <a:t>10/21/2026</a:t>
             </a:fld>
             <a:endParaRPr lang="en-US"/>
           </a:p>
@@ -3583,10 +3499,9 @@
           </a:lstStyle>
           <a:p>
             <a:r>
-              <a:rPr lang="en-US" smtClean="0"/>
+              <a:rPr lang="en-US"/>
               <a:t>Click to edit Master title style</a:t>
             </a:r>
-            <a:endParaRPr lang="en-US"/>
           </a:p>
         </p:txBody>
       </p:sp>
@@ -3649,7 +3564,7 @@
           <a:p>
             <a:pPr lvl="0"/>
             <a:r>
-              <a:rPr lang="en-US" smtClean="0"/>
+              <a:rPr lang="en-US"/>
               <a:t>Click to edit Master text styles</a:t>
             </a:r>
           </a:p>
@@ -3705,38 +3620,37 @@
           <a:p>
             <a:pPr lvl="0"/>
             <a:r>
-              <a:rPr lang="en-US" smtClean="0"/>
+              <a:rPr lang="en-US"/>
               <a:t>Click to edit Master text styles</a:t>
             </a:r>
           </a:p>
           <a:p>
             <a:pPr lvl="1"/>
             <a:r>
-              <a:rPr lang="en-US" smtClean="0"/>
+              <a:rPr lang="en-US"/>
               <a:t>Second level</a:t>
             </a:r>
           </a:p>
           <a:p>
             <a:pPr lvl="2"/>
             <a:r>
-              <a:rPr lang="en-US" smtClean="0"/>
+              <a:rPr lang="en-US"/>
               <a:t>Third level</a:t>
             </a:r>
           </a:p>
           <a:p>
             <a:pPr lvl="3"/>
             <a:r>
-              <a:rPr lang="en-US" smtClean="0"/>
+              <a:rPr lang="en-US"/>
               <a:t>Fourth level</a:t>
             </a:r>
           </a:p>
           <a:p>
             <a:pPr lvl="4"/>
             <a:r>
-              <a:rPr lang="en-US" smtClean="0"/>
+              <a:rPr lang="en-US"/>
               <a:t>Fifth level</a:t>
             </a:r>
-            <a:endParaRPr lang="en-US"/>
           </a:p>
         </p:txBody>
       </p:sp>
@@ -3799,7 +3713,7 @@
           <a:p>
             <a:pPr lvl="0"/>
             <a:r>
-              <a:rPr lang="en-US" smtClean="0"/>
+              <a:rPr lang="en-US"/>
               <a:t>Click to edit Master text styles</a:t>
             </a:r>
           </a:p>
@@ -3855,38 +3769,37 @@
           <a:p>
             <a:pPr lvl="0"/>
             <a:r>
-              <a:rPr lang="en-US" smtClean="0"/>
+              <a:rPr lang="en-US"/>
               <a:t>Click to edit Master text styles</a:t>
             </a:r>
           </a:p>
           <a:p>
             <a:pPr lvl="1"/>
             <a:r>
-              <a:rPr lang="en-US" smtClean="0"/>
+              <a:rPr lang="en-US"/>
               <a:t>Second level</a:t>
             </a:r>
           </a:p>
           <a:p>
             <a:pPr lvl="2"/>
             <a:r>
-              <a:rPr lang="en-US" smtClean="0"/>
+              <a:rPr lang="en-US"/>
               <a:t>Third level</a:t>
             </a:r>
           </a:p>
           <a:p>
             <a:pPr lvl="3"/>
             <a:r>
-              <a:rPr lang="en-US" smtClean="0"/>
+              <a:rPr lang="en-US"/>
               <a:t>Fourth level</a:t>
             </a:r>
           </a:p>
           <a:p>
             <a:pPr lvl="4"/>
             <a:r>
-              <a:rPr lang="en-US" smtClean="0"/>
+              <a:rPr lang="en-US"/>
               <a:t>Fifth level</a:t>
             </a:r>
-            <a:endParaRPr lang="en-US"/>
           </a:p>
         </p:txBody>
       </p:sp>
@@ -3907,7 +3820,7 @@
           <a:p>
             <a:fld id="{5BCAD085-E8A6-8845-BD4E-CB4CCA059FC4}" type="datetimeFigureOut">
               <a:rPr lang="en-US" smtClean="0"/>
-              <a:t>1/27/13</a:t>
+              <a:t>10/21/2026</a:t>
             </a:fld>
             <a:endParaRPr lang="en-US"/>
           </a:p>
@@ -4001,10 +3914,9 @@
           <a:lstStyle/>
           <a:p>
             <a:r>
-              <a:rPr lang="en-US" smtClean="0"/>
+              <a:rPr lang="en-US"/>
               <a:t>Click to edit Master title style</a:t>
             </a:r>
-            <a:endParaRPr lang="en-US"/>
           </a:p>
         </p:txBody>
       </p:sp>
@@ -4025,7 +3937,7 @@
           <a:p>
             <a:fld id="{5BCAD085-E8A6-8845-BD4E-CB4CCA059FC4}" type="datetimeFigureOut">
               <a:rPr lang="en-US" smtClean="0"/>
-              <a:t>1/27/13</a:t>
+              <a:t>10/21/2026</a:t>
             </a:fld>
             <a:endParaRPr lang="en-US"/>
           </a:p>
@@ -4120,7 +4032,7 @@
           <a:p>
             <a:fld id="{5BCAD085-E8A6-8845-BD4E-CB4CCA059FC4}" type="datetimeFigureOut">
               <a:rPr lang="en-US" smtClean="0"/>
-              <a:t>1/27/13</a:t>
+              <a:t>10/21/2026</a:t>
             </a:fld>
             <a:endParaRPr lang="en-US"/>
           </a:p>
@@ -4223,10 +4135,9 @@
           </a:lstStyle>
           <a:p>
             <a:r>
-              <a:rPr lang="en-US" smtClean="0"/>
+              <a:rPr lang="en-US"/>
               <a:t>Click to edit Master title style</a:t>
             </a:r>
-            <a:endParaRPr lang="en-US"/>
           </a:p>
         </p:txBody>
       </p:sp>
@@ -4280,38 +4191,37 @@
           <a:p>
             <a:pPr lvl="0"/>
             <a:r>
-              <a:rPr lang="en-US" smtClean="0"/>
+              <a:rPr lang="en-US"/>
               <a:t>Click to edit Master text styles</a:t>
             </a:r>
           </a:p>
           <a:p>
             <a:pPr lvl="1"/>
             <a:r>
-              <a:rPr lang="en-US" smtClean="0"/>
+              <a:rPr lang="en-US"/>
               <a:t>Second level</a:t>
             </a:r>
           </a:p>
           <a:p>
             <a:pPr lvl="2"/>
             <a:r>
-              <a:rPr lang="en-US" smtClean="0"/>
+              <a:rPr lang="en-US"/>
               <a:t>Third level</a:t>
             </a:r>
           </a:p>
           <a:p>
             <a:pPr lvl="3"/>
             <a:r>
-              <a:rPr lang="en-US" smtClean="0"/>
+              <a:rPr lang="en-US"/>
               <a:t>Fourth level</a:t>
             </a:r>
           </a:p>
           <a:p>
             <a:pPr lvl="4"/>
             <a:r>
-              <a:rPr lang="en-US" smtClean="0"/>
+              <a:rPr lang="en-US"/>
               <a:t>Fifth level</a:t>
             </a:r>
-            <a:endParaRPr lang="en-US"/>
           </a:p>
         </p:txBody>
       </p:sp>
@@ -4374,7 +4284,7 @@
           <a:p>
             <a:pPr lvl="0"/>
             <a:r>
-              <a:rPr lang="en-US" smtClean="0"/>
+              <a:rPr lang="en-US"/>
               <a:t>Click to edit Master text styles</a:t>
             </a:r>
           </a:p>
@@ -4397,7 +4307,7 @@
           <a:p>
             <a:fld id="{5BCAD085-E8A6-8845-BD4E-CB4CCA059FC4}" type="datetimeFigureOut">
               <a:rPr lang="en-US" smtClean="0"/>
-              <a:t>1/27/13</a:t>
+              <a:t>10/21/2026</a:t>
             </a:fld>
             <a:endParaRPr lang="en-US"/>
           </a:p>
@@ -4500,10 +4410,9 @@
           </a:lstStyle>
           <a:p>
             <a:r>
-              <a:rPr lang="en-US" smtClean="0"/>
+              <a:rPr lang="en-US"/>
               <a:t>Click to edit Master title style</a:t>
             </a:r>
-            <a:endParaRPr lang="en-US"/>
           </a:p>
         </p:txBody>
       </p:sp>
@@ -4627,7 +4536,7 @@
           <a:p>
             <a:pPr lvl="0"/>
             <a:r>
-              <a:rPr lang="en-US" smtClean="0"/>
+              <a:rPr lang="en-US"/>
               <a:t>Click to edit Master text styles</a:t>
             </a:r>
           </a:p>
@@ -4650,7 +4559,7 @@
           <a:p>
             <a:fld id="{5BCAD085-E8A6-8845-BD4E-CB4CCA059FC4}" type="datetimeFigureOut">
               <a:rPr lang="en-US" smtClean="0"/>
-              <a:t>1/27/13</a:t>
+              <a:t>10/21/2026</a:t>
             </a:fld>
             <a:endParaRPr lang="en-US"/>
           </a:p>
@@ -4759,10 +4668,9 @@
           <a:lstStyle/>
           <a:p>
             <a:r>
-              <a:rPr lang="en-US" smtClean="0"/>
+              <a:rPr lang="en-US"/>
               <a:t>Click to edit Master title style</a:t>
             </a:r>
-            <a:endParaRPr lang="en-US"/>
           </a:p>
         </p:txBody>
       </p:sp>
@@ -4793,38 +4701,37 @@
           <a:p>
             <a:pPr lvl="0"/>
             <a:r>
-              <a:rPr lang="en-US" smtClean="0"/>
+              <a:rPr lang="en-US"/>
               <a:t>Click to edit Master text styles</a:t>
             </a:r>
           </a:p>
           <a:p>
             <a:pPr lvl="1"/>
             <a:r>
-              <a:rPr lang="en-US" smtClean="0"/>
+              <a:rPr lang="en-US"/>
               <a:t>Second level</a:t>
             </a:r>
           </a:p>
           <a:p>
             <a:pPr lvl="2"/>
             <a:r>
-              <a:rPr lang="en-US" smtClean="0"/>
+              <a:rPr lang="en-US"/>
               <a:t>Third level</a:t>
             </a:r>
           </a:p>
           <a:p>
             <a:pPr lvl="3"/>
             <a:r>
-              <a:rPr lang="en-US" smtClean="0"/>
+              <a:rPr lang="en-US"/>
               <a:t>Fourth level</a:t>
             </a:r>
           </a:p>
           <a:p>
             <a:pPr lvl="4"/>
             <a:r>
-              <a:rPr lang="en-US" smtClean="0"/>
+              <a:rPr lang="en-US"/>
               <a:t>Fifth level</a:t>
             </a:r>
-            <a:endParaRPr lang="en-US"/>
           </a:p>
         </p:txBody>
       </p:sp>
@@ -4863,7 +4770,7 @@
           <a:p>
             <a:fld id="{5BCAD085-E8A6-8845-BD4E-CB4CCA059FC4}" type="datetimeFigureOut">
               <a:rPr lang="en-US" smtClean="0"/>
-              <a:t>1/27/13</a:t>
+              <a:t>10/21/2026</a:t>
             </a:fld>
             <a:endParaRPr lang="en-US"/>
           </a:p>
@@ -5222,7 +5129,7 @@
 </file>
 
 <file path=ppt/slides/slide1.xml><?xml version="1.0" encoding="utf-8"?>
-<p:sld xmlns:a="http://schemas.openxmlformats.org/drawingml/2006/main" xmlns:p="http://schemas.openxmlformats.org/presentationml/2006/main" xmlns:r="http://schemas.openxmlformats.org/officeDocument/2006/relationships">
+<p:sld xmlns:a="http://schemas.openxmlformats.org/drawingml/2006/main" xmlns:r="http://schemas.openxmlformats.org/officeDocument/2006/relationships" xmlns:p="http://schemas.openxmlformats.org/presentationml/2006/main">
   <p:cSld>
     <p:bg>
       <p:bgPr>
@@ -5238,7 +5145,14 @@
         <p:cNvGrpSpPr/>
         <p:nvPr/>
       </p:nvGrpSpPr>
-      <p:grpSpPr/>
+      <p:grpSpPr>
+        <a:xfrm>
+          <a:off x="0" y="0"/>
+          <a:ext cx="0" cy="0"/>
+          <a:chOff x="0" y="0"/>
+          <a:chExt cx="0" cy="0"/>
+        </a:xfrm>
+      </p:grpSpPr>
       <p:sp>
         <p:nvSpPr>
           <p:cNvPr id="2" name="Rounded Rectangle 1"/>
@@ -5280,7 +5194,9 @@
         <p:txBody>
           <a:bodyPr rtlCol="0" anchor="ctr"/>
           <a:lstStyle/>
-          <a:p/>
+          <a:p>
+            <a:endParaRPr/>
+          </a:p>
         </p:txBody>
       </p:sp>
       <p:pic>
@@ -5292,7 +5208,7 @@
           <p:nvPr/>
         </p:nvPicPr>
         <p:blipFill>
-          <a:blip r:embed="rId2"/>
+          <a:blip r:embed="rId3"/>
           <a:stretch>
             <a:fillRect/>
           </a:stretch>
@@ -5324,7 +5240,7 @@
           <a:noFill/>
         </p:spPr>
         <p:txBody>
-          <a:bodyPr wrap="square" lIns="0" rIns="0" tIns="0" bIns="0" anchor="t">
+          <a:bodyPr wrap="square" lIns="0" tIns="0" rIns="0" bIns="0" anchor="t">
             <a:spAutoFit/>
           </a:bodyPr>
           <a:lstStyle/>
@@ -5359,7 +5275,7 @@
           <a:noFill/>
         </p:spPr>
         <p:txBody>
-          <a:bodyPr wrap="square" lIns="0" rIns="0" tIns="0" bIns="0" anchor="t">
+          <a:bodyPr wrap="square" lIns="0" tIns="0" rIns="0" bIns="0" anchor="t">
             <a:spAutoFit/>
           </a:bodyPr>
           <a:lstStyle/>
@@ -5394,7 +5310,7 @@
           <a:noFill/>
         </p:spPr>
         <p:txBody>
-          <a:bodyPr wrap="square" lIns="0" rIns="0" tIns="0" bIns="0" anchor="t">
+          <a:bodyPr wrap="square" lIns="0" tIns="0" rIns="0" bIns="0" anchor="t">
             <a:spAutoFit/>
           </a:bodyPr>
           <a:lstStyle/>
@@ -5429,7 +5345,7 @@
           <a:noFill/>
         </p:spPr>
         <p:txBody>
-          <a:bodyPr wrap="square" lIns="0" rIns="0" tIns="0" bIns="0" anchor="t">
+          <a:bodyPr wrap="square" lIns="0" tIns="0" rIns="0" bIns="0" anchor="t">
             <a:spAutoFit/>
           </a:bodyPr>
           <a:lstStyle/>
@@ -5464,7 +5380,7 @@
           <a:noFill/>
         </p:spPr>
         <p:txBody>
-          <a:bodyPr wrap="square" lIns="0" rIns="0" tIns="0" bIns="0" anchor="t">
+          <a:bodyPr wrap="square" lIns="0" tIns="0" rIns="0" bIns="0" anchor="t">
             <a:spAutoFit/>
           </a:bodyPr>
           <a:lstStyle/>
@@ -5523,7 +5439,9 @@
         <p:txBody>
           <a:bodyPr rtlCol="0" anchor="ctr"/>
           <a:lstStyle/>
-          <a:p/>
+          <a:p>
+            <a:endParaRPr/>
+          </a:p>
         </p:txBody>
       </p:sp>
       <p:sp>
@@ -5543,7 +5461,7 @@
           <a:noFill/>
         </p:spPr>
         <p:txBody>
-          <a:bodyPr wrap="square" lIns="0" rIns="0" tIns="0" bIns="0" anchor="t">
+          <a:bodyPr wrap="square" lIns="0" tIns="0" rIns="0" bIns="0" anchor="t">
             <a:spAutoFit/>
           </a:bodyPr>
           <a:lstStyle/>
@@ -5578,7 +5496,7 @@
           <a:noFill/>
         </p:spPr>
         <p:txBody>
-          <a:bodyPr wrap="square" lIns="0" rIns="0" tIns="0" bIns="0" anchor="t">
+          <a:bodyPr wrap="square" lIns="0" tIns="0" rIns="0" bIns="0" anchor="t">
             <a:spAutoFit/>
           </a:bodyPr>
           <a:lstStyle/>
@@ -5637,7 +5555,9 @@
         <p:txBody>
           <a:bodyPr rtlCol="0" anchor="ctr"/>
           <a:lstStyle/>
-          <a:p/>
+          <a:p>
+            <a:endParaRPr/>
+          </a:p>
         </p:txBody>
       </p:sp>
       <p:sp>
@@ -5657,7 +5577,7 @@
           <a:noFill/>
         </p:spPr>
         <p:txBody>
-          <a:bodyPr wrap="square" lIns="0" rIns="0" tIns="0" bIns="0" anchor="t">
+          <a:bodyPr wrap="square" lIns="0" tIns="0" rIns="0" bIns="0" anchor="t">
             <a:spAutoFit/>
           </a:bodyPr>
           <a:lstStyle/>
@@ -5692,7 +5612,7 @@
           <a:noFill/>
         </p:spPr>
         <p:txBody>
-          <a:bodyPr wrap="square" lIns="0" rIns="0" tIns="0" bIns="0" anchor="t">
+          <a:bodyPr wrap="square" lIns="0" tIns="0" rIns="0" bIns="0" anchor="t">
             <a:spAutoFit/>
           </a:bodyPr>
           <a:lstStyle/>
@@ -5751,7 +5671,9 @@
         <p:txBody>
           <a:bodyPr rtlCol="0" anchor="ctr"/>
           <a:lstStyle/>
-          <a:p/>
+          <a:p>
+            <a:endParaRPr/>
+          </a:p>
         </p:txBody>
       </p:sp>
       <p:sp>
@@ -5771,7 +5693,7 @@
           <a:noFill/>
         </p:spPr>
         <p:txBody>
-          <a:bodyPr wrap="square" lIns="0" rIns="0" tIns="0" bIns="0" anchor="t">
+          <a:bodyPr wrap="square" lIns="0" tIns="0" rIns="0" bIns="0" anchor="t">
             <a:spAutoFit/>
           </a:bodyPr>
           <a:lstStyle/>
@@ -5806,7 +5728,7 @@
           <a:noFill/>
         </p:spPr>
         <p:txBody>
-          <a:bodyPr wrap="square" lIns="0" rIns="0" tIns="0" bIns="0" anchor="t">
+          <a:bodyPr wrap="square" lIns="0" tIns="0" rIns="0" bIns="0" anchor="t">
             <a:spAutoFit/>
           </a:bodyPr>
           <a:lstStyle/>
@@ -5865,7 +5787,9 @@
         <p:txBody>
           <a:bodyPr rtlCol="0" anchor="ctr"/>
           <a:lstStyle/>
-          <a:p/>
+          <a:p>
+            <a:endParaRPr/>
+          </a:p>
         </p:txBody>
       </p:sp>
       <p:sp>
@@ -5885,7 +5809,7 @@
           <a:noFill/>
         </p:spPr>
         <p:txBody>
-          <a:bodyPr wrap="square" lIns="0" rIns="0" tIns="0" bIns="0" anchor="t">
+          <a:bodyPr wrap="square" lIns="0" tIns="0" rIns="0" bIns="0" anchor="t">
             <a:spAutoFit/>
           </a:bodyPr>
           <a:lstStyle/>
@@ -5920,7 +5844,7 @@
           <a:noFill/>
         </p:spPr>
         <p:txBody>
-          <a:bodyPr wrap="square" lIns="0" rIns="0" tIns="0" bIns="0" anchor="t">
+          <a:bodyPr wrap="square" lIns="0" tIns="0" rIns="0" bIns="0" anchor="t">
             <a:spAutoFit/>
           </a:bodyPr>
           <a:lstStyle/>
@@ -5947,29 +5871,44 @@
         <p:spPr>
           <a:xfrm>
             <a:off x="548640" y="6126480"/>
-            <a:ext cx="7315200" cy="274320"/>
-          </a:xfrm>
-          <a:prstGeom prst="rect">
-            <a:avLst/>
-          </a:prstGeom>
-          <a:noFill/>
-        </p:spPr>
-        <p:txBody>
-          <a:bodyPr wrap="square" lIns="0" rIns="0" tIns="0" bIns="0" anchor="t">
+            <a:ext cx="7315200" cy="200055"/>
+          </a:xfrm>
+          <a:prstGeom prst="rect">
+            <a:avLst/>
+          </a:prstGeom>
+          <a:noFill/>
+        </p:spPr>
+        <p:txBody>
+          <a:bodyPr wrap="square" lIns="0" tIns="0" rIns="0" bIns="0" anchor="t">
             <a:spAutoFit/>
           </a:bodyPr>
           <a:lstStyle/>
           <a:p>
             <a:pPr algn="l"/>
             <a:r>
-              <a:rPr sz="1300" b="0" i="0">
+              <a:rPr sz="1300" b="0" i="0" dirty="0">
                 <a:solidFill>
                   <a:srgbClr val="C9D6E3"/>
                 </a:solidFill>
                 <a:latin typeface="Calibri"/>
               </a:rPr>
-              <a:t>Guide: Prof. ____________________</a:t>
-            </a:r>
+              <a:t>Guide: Prof. </a:t>
+            </a:r>
+            <a:r>
+              <a:rPr lang="en-IN" sz="1300" dirty="0">
+                <a:solidFill>
+                  <a:srgbClr val="C9D6E3"/>
+                </a:solidFill>
+                <a:latin typeface="Calibri"/>
+              </a:rPr>
+              <a:t>Abhay Kolhe</a:t>
+            </a:r>
+            <a:endParaRPr sz="1300" b="0" i="0" dirty="0">
+              <a:solidFill>
+                <a:srgbClr val="C9D6E3"/>
+              </a:solidFill>
+              <a:latin typeface="Calibri"/>
+            </a:endParaRPr>
           </a:p>
         </p:txBody>
       </p:sp>
@@ -5982,7 +5921,7 @@
 </file>
 
 <file path=ppt/slides/slide10.xml><?xml version="1.0" encoding="utf-8"?>
-<p:sld xmlns:a="http://schemas.openxmlformats.org/drawingml/2006/main" xmlns:p="http://schemas.openxmlformats.org/presentationml/2006/main" xmlns:r="http://schemas.openxmlformats.org/officeDocument/2006/relationships">
+<p:sld xmlns:a="http://schemas.openxmlformats.org/drawingml/2006/main" xmlns:r="http://schemas.openxmlformats.org/officeDocument/2006/relationships" xmlns:p="http://schemas.openxmlformats.org/presentationml/2006/main">
   <p:cSld>
     <p:bg>
       <p:bgPr>
@@ -5998,7 +5937,14 @@
         <p:cNvGrpSpPr/>
         <p:nvPr/>
       </p:nvGrpSpPr>
-      <p:grpSpPr/>
+      <p:grpSpPr>
+        <a:xfrm>
+          <a:off x="0" y="0"/>
+          <a:ext cx="0" cy="0"/>
+          <a:chOff x="0" y="0"/>
+          <a:chExt cx="0" cy="0"/>
+        </a:xfrm>
+      </p:grpSpPr>
       <p:sp>
         <p:nvSpPr>
           <p:cNvPr id="2" name="Kicker"/>
@@ -6016,7 +5962,7 @@
           <a:noFill/>
         </p:spPr>
         <p:txBody>
-          <a:bodyPr wrap="square" lIns="0" rIns="0" tIns="0" bIns="0" anchor="t">
+          <a:bodyPr wrap="square" lIns="0" tIns="0" rIns="0" bIns="0" anchor="t">
             <a:spAutoFit/>
           </a:bodyPr>
           <a:lstStyle/>
@@ -6051,7 +5997,7 @@
           <a:noFill/>
         </p:spPr>
         <p:txBody>
-          <a:bodyPr wrap="square" lIns="0" rIns="0" tIns="0" bIns="0" anchor="t">
+          <a:bodyPr wrap="square" lIns="0" tIns="0" rIns="0" bIns="0" anchor="t">
             <a:spAutoFit/>
           </a:bodyPr>
           <a:lstStyle/>
@@ -6078,7 +6024,7 @@
           <p:nvPr/>
         </p:nvPicPr>
         <p:blipFill>
-          <a:blip r:embed="rId2"/>
+          <a:blip r:embed="rId3"/>
           <a:stretch>
             <a:fillRect/>
           </a:stretch>
@@ -6110,7 +6056,7 @@
           <a:noFill/>
         </p:spPr>
         <p:txBody>
-          <a:bodyPr wrap="square" lIns="0" rIns="0" tIns="0" bIns="0" anchor="t">
+          <a:bodyPr wrap="square" lIns="0" tIns="0" rIns="0" bIns="0" anchor="t">
             <a:spAutoFit/>
           </a:bodyPr>
           <a:lstStyle/>
@@ -6145,7 +6091,7 @@
           <a:noFill/>
         </p:spPr>
         <p:txBody>
-          <a:bodyPr wrap="square" lIns="0" rIns="0" tIns="0" bIns="0" anchor="t">
+          <a:bodyPr wrap="square" lIns="0" tIns="0" rIns="0" bIns="0" anchor="t">
             <a:spAutoFit/>
           </a:bodyPr>
           <a:lstStyle/>
@@ -6177,7 +6123,7 @@
         </p:xfrm>
         <a:graphic>
           <a:graphicData uri="http://schemas.openxmlformats.org/drawingml/2006/chart">
-            <c:chart xmlns:c="http://schemas.openxmlformats.org/drawingml/2006/chart" r:id="rId3"/>
+            <c:chart xmlns:c="http://schemas.openxmlformats.org/drawingml/2006/chart" xmlns:r="http://schemas.openxmlformats.org/officeDocument/2006/relationships" r:id="rId4"/>
           </a:graphicData>
         </a:graphic>
       </p:graphicFrame>
@@ -6222,7 +6168,9 @@
         <p:txBody>
           <a:bodyPr rtlCol="0" anchor="ctr"/>
           <a:lstStyle/>
-          <a:p/>
+          <a:p>
+            <a:endParaRPr/>
+          </a:p>
         </p:txBody>
       </p:sp>
       <p:sp>
@@ -6242,7 +6190,7 @@
           <a:noFill/>
         </p:spPr>
         <p:txBody>
-          <a:bodyPr wrap="square" lIns="0" rIns="0" tIns="0" bIns="0" anchor="t">
+          <a:bodyPr wrap="square" lIns="0" tIns="0" rIns="0" bIns="0" anchor="t">
             <a:spAutoFit/>
           </a:bodyPr>
           <a:lstStyle/>
@@ -6277,7 +6225,7 @@
           <a:noFill/>
         </p:spPr>
         <p:txBody>
-          <a:bodyPr wrap="square" lIns="0" rIns="0" tIns="0" bIns="0" anchor="t">
+          <a:bodyPr wrap="square" lIns="0" tIns="0" rIns="0" bIns="0" anchor="t">
             <a:spAutoFit/>
           </a:bodyPr>
           <a:lstStyle/>
@@ -6336,7 +6284,9 @@
         <p:txBody>
           <a:bodyPr rtlCol="0" anchor="ctr"/>
           <a:lstStyle/>
-          <a:p/>
+          <a:p>
+            <a:endParaRPr/>
+          </a:p>
         </p:txBody>
       </p:sp>
       <p:sp>
@@ -6356,7 +6306,7 @@
           <a:noFill/>
         </p:spPr>
         <p:txBody>
-          <a:bodyPr wrap="square" lIns="0" rIns="0" tIns="0" bIns="0" anchor="t">
+          <a:bodyPr wrap="square" lIns="0" tIns="0" rIns="0" bIns="0" anchor="t">
             <a:spAutoFit/>
           </a:bodyPr>
           <a:lstStyle/>
@@ -6391,7 +6341,7 @@
           <a:noFill/>
         </p:spPr>
         <p:txBody>
-          <a:bodyPr wrap="square" lIns="0" rIns="0" tIns="0" bIns="0" anchor="t">
+          <a:bodyPr wrap="square" lIns="0" tIns="0" rIns="0" bIns="0" anchor="t">
             <a:spAutoFit/>
           </a:bodyPr>
           <a:lstStyle/>
@@ -6450,7 +6400,9 @@
         <p:txBody>
           <a:bodyPr rtlCol="0" anchor="ctr"/>
           <a:lstStyle/>
-          <a:p/>
+          <a:p>
+            <a:endParaRPr/>
+          </a:p>
         </p:txBody>
       </p:sp>
       <p:sp>
@@ -6470,7 +6422,7 @@
           <a:noFill/>
         </p:spPr>
         <p:txBody>
-          <a:bodyPr wrap="square" lIns="0" rIns="0" tIns="0" bIns="0" anchor="t">
+          <a:bodyPr wrap="square" lIns="0" tIns="0" rIns="0" bIns="0" anchor="t">
             <a:spAutoFit/>
           </a:bodyPr>
           <a:lstStyle/>
@@ -6505,7 +6457,7 @@
           <a:noFill/>
         </p:spPr>
         <p:txBody>
-          <a:bodyPr wrap="square" lIns="0" rIns="0" tIns="0" bIns="0" anchor="t">
+          <a:bodyPr wrap="square" lIns="0" tIns="0" rIns="0" bIns="0" anchor="t">
             <a:spAutoFit/>
           </a:bodyPr>
           <a:lstStyle/>
@@ -6532,7 +6484,7 @@
 </file>
 
 <file path=ppt/slides/slide11.xml><?xml version="1.0" encoding="utf-8"?>
-<p:sld xmlns:a="http://schemas.openxmlformats.org/drawingml/2006/main" xmlns:p="http://schemas.openxmlformats.org/presentationml/2006/main" xmlns:r="http://schemas.openxmlformats.org/officeDocument/2006/relationships">
+<p:sld xmlns:a="http://schemas.openxmlformats.org/drawingml/2006/main" xmlns:r="http://schemas.openxmlformats.org/officeDocument/2006/relationships" xmlns:p="http://schemas.openxmlformats.org/presentationml/2006/main">
   <p:cSld>
     <p:bg>
       <p:bgPr>
@@ -6548,7 +6500,14 @@
         <p:cNvGrpSpPr/>
         <p:nvPr/>
       </p:nvGrpSpPr>
-      <p:grpSpPr/>
+      <p:grpSpPr>
+        <a:xfrm>
+          <a:off x="0" y="0"/>
+          <a:ext cx="0" cy="0"/>
+          <a:chOff x="0" y="0"/>
+          <a:chExt cx="0" cy="0"/>
+        </a:xfrm>
+      </p:grpSpPr>
       <p:sp>
         <p:nvSpPr>
           <p:cNvPr id="2" name="Kicker"/>
@@ -6566,7 +6525,7 @@
           <a:noFill/>
         </p:spPr>
         <p:txBody>
-          <a:bodyPr wrap="square" lIns="0" rIns="0" tIns="0" bIns="0" anchor="t">
+          <a:bodyPr wrap="square" lIns="0" tIns="0" rIns="0" bIns="0" anchor="t">
             <a:spAutoFit/>
           </a:bodyPr>
           <a:lstStyle/>
@@ -6601,7 +6560,7 @@
           <a:noFill/>
         </p:spPr>
         <p:txBody>
-          <a:bodyPr wrap="square" lIns="0" rIns="0" tIns="0" bIns="0" anchor="t">
+          <a:bodyPr wrap="square" lIns="0" tIns="0" rIns="0" bIns="0" anchor="t">
             <a:spAutoFit/>
           </a:bodyPr>
           <a:lstStyle/>
@@ -6622,100 +6581,6 @@
       <p:pic>
         <p:nvPicPr>
           <p:cNvPr id="4" name="Picture 3" descr="nmims_logo.png"/>
-          <p:cNvPicPr>
-            <a:picLocks noChangeAspect="1"/>
-          </p:cNvPicPr>
-          <p:nvPr/>
-        </p:nvPicPr>
-        <p:blipFill>
-          <a:blip r:embed="rId2"/>
-          <a:stretch>
-            <a:fillRect/>
-          </a:stretch>
-        </p:blipFill>
-        <p:spPr>
-          <a:xfrm>
-            <a:off x="11109960" y="274320"/>
-            <a:ext cx="570527" cy="566928"/>
-          </a:xfrm>
-          <a:prstGeom prst="rect">
-            <a:avLst/>
-          </a:prstGeom>
-        </p:spPr>
-      </p:pic>
-      <p:sp>
-        <p:nvSpPr>
-          <p:cNvPr id="5" name="TextBox 4"/>
-          <p:cNvSpPr txBox="1"/>
-          <p:nvPr/>
-        </p:nvSpPr>
-        <p:spPr>
-          <a:xfrm>
-            <a:off x="548640" y="6446520"/>
-            <a:ext cx="5486400" cy="228600"/>
-          </a:xfrm>
-          <a:prstGeom prst="rect">
-            <a:avLst/>
-          </a:prstGeom>
-          <a:noFill/>
-        </p:spPr>
-        <p:txBody>
-          <a:bodyPr wrap="square" lIns="0" rIns="0" tIns="0" bIns="0" anchor="t">
-            <a:spAutoFit/>
-          </a:bodyPr>
-          <a:lstStyle/>
-          <a:p>
-            <a:pPr algn="l"/>
-            <a:r>
-              <a:rPr sz="900" b="0" i="0">
-                <a:solidFill>
-                  <a:srgbClr val="8A8F98"/>
-                </a:solidFill>
-                <a:latin typeface="Calibri"/>
-              </a:rPr>
-              <a:t>DemandIQ  |  NMIMS MPSTME  |  Machine Learning, Sem V</a:t>
-            </a:r>
-          </a:p>
-        </p:txBody>
-      </p:sp>
-      <p:sp>
-        <p:nvSpPr>
-          <p:cNvPr id="6" name="TextBox 5"/>
-          <p:cNvSpPr txBox="1"/>
-          <p:nvPr/>
-        </p:nvSpPr>
-        <p:spPr>
-          <a:xfrm>
-            <a:off x="11155680" y="6446520"/>
-            <a:ext cx="502920" cy="228600"/>
-          </a:xfrm>
-          <a:prstGeom prst="rect">
-            <a:avLst/>
-          </a:prstGeom>
-          <a:noFill/>
-        </p:spPr>
-        <p:txBody>
-          <a:bodyPr wrap="square" lIns="0" rIns="0" tIns="0" bIns="0" anchor="t">
-            <a:spAutoFit/>
-          </a:bodyPr>
-          <a:lstStyle/>
-          <a:p>
-            <a:pPr algn="r"/>
-            <a:r>
-              <a:rPr sz="900" b="0" i="0">
-                <a:solidFill>
-                  <a:srgbClr val="8A8F98"/>
-                </a:solidFill>
-                <a:latin typeface="Calibri"/>
-              </a:rPr>
-              <a:t>11</a:t>
-            </a:r>
-          </a:p>
-        </p:txBody>
-      </p:sp>
-      <p:pic>
-        <p:nvPicPr>
-          <p:cNvPr id="7" name="Picture 6" descr="fig10_forecast_examples.png"/>
           <p:cNvPicPr>
             <a:picLocks noChangeAspect="1"/>
           </p:cNvPicPr>
@@ -6729,6 +6594,100 @@
         </p:blipFill>
         <p:spPr>
           <a:xfrm>
+            <a:off x="11109960" y="274320"/>
+            <a:ext cx="570527" cy="566928"/>
+          </a:xfrm>
+          <a:prstGeom prst="rect">
+            <a:avLst/>
+          </a:prstGeom>
+        </p:spPr>
+      </p:pic>
+      <p:sp>
+        <p:nvSpPr>
+          <p:cNvPr id="5" name="TextBox 4"/>
+          <p:cNvSpPr txBox="1"/>
+          <p:nvPr/>
+        </p:nvSpPr>
+        <p:spPr>
+          <a:xfrm>
+            <a:off x="548640" y="6446520"/>
+            <a:ext cx="5486400" cy="228600"/>
+          </a:xfrm>
+          <a:prstGeom prst="rect">
+            <a:avLst/>
+          </a:prstGeom>
+          <a:noFill/>
+        </p:spPr>
+        <p:txBody>
+          <a:bodyPr wrap="square" lIns="0" tIns="0" rIns="0" bIns="0" anchor="t">
+            <a:spAutoFit/>
+          </a:bodyPr>
+          <a:lstStyle/>
+          <a:p>
+            <a:pPr algn="l"/>
+            <a:r>
+              <a:rPr sz="900" b="0" i="0">
+                <a:solidFill>
+                  <a:srgbClr val="8A8F98"/>
+                </a:solidFill>
+                <a:latin typeface="Calibri"/>
+              </a:rPr>
+              <a:t>DemandIQ  |  NMIMS MPSTME  |  Machine Learning, Sem V</a:t>
+            </a:r>
+          </a:p>
+        </p:txBody>
+      </p:sp>
+      <p:sp>
+        <p:nvSpPr>
+          <p:cNvPr id="6" name="TextBox 5"/>
+          <p:cNvSpPr txBox="1"/>
+          <p:nvPr/>
+        </p:nvSpPr>
+        <p:spPr>
+          <a:xfrm>
+            <a:off x="11155680" y="6446520"/>
+            <a:ext cx="502920" cy="228600"/>
+          </a:xfrm>
+          <a:prstGeom prst="rect">
+            <a:avLst/>
+          </a:prstGeom>
+          <a:noFill/>
+        </p:spPr>
+        <p:txBody>
+          <a:bodyPr wrap="square" lIns="0" tIns="0" rIns="0" bIns="0" anchor="t">
+            <a:spAutoFit/>
+          </a:bodyPr>
+          <a:lstStyle/>
+          <a:p>
+            <a:pPr algn="r"/>
+            <a:r>
+              <a:rPr sz="900" b="0" i="0">
+                <a:solidFill>
+                  <a:srgbClr val="8A8F98"/>
+                </a:solidFill>
+                <a:latin typeface="Calibri"/>
+              </a:rPr>
+              <a:t>11</a:t>
+            </a:r>
+          </a:p>
+        </p:txBody>
+      </p:sp>
+      <p:pic>
+        <p:nvPicPr>
+          <p:cNvPr id="7" name="Picture 6" descr="fig10_forecast_examples.png"/>
+          <p:cNvPicPr>
+            <a:picLocks noChangeAspect="1"/>
+          </p:cNvPicPr>
+          <p:nvPr/>
+        </p:nvPicPr>
+        <p:blipFill>
+          <a:blip r:embed="rId4"/>
+          <a:stretch>
+            <a:fillRect/>
+          </a:stretch>
+        </p:blipFill>
+        <p:spPr>
+          <a:xfrm>
             <a:off x="1133981" y="1371600"/>
             <a:ext cx="6693156" cy="4937760"/>
           </a:xfrm>
@@ -6778,7 +6737,9 @@
         <p:txBody>
           <a:bodyPr rtlCol="0" anchor="ctr"/>
           <a:lstStyle/>
-          <a:p/>
+          <a:p>
+            <a:endParaRPr/>
+          </a:p>
         </p:txBody>
       </p:sp>
       <p:sp>
@@ -6798,7 +6759,7 @@
           <a:noFill/>
         </p:spPr>
         <p:txBody>
-          <a:bodyPr wrap="square" lIns="0" rIns="0" tIns="0" bIns="0" anchor="t">
+          <a:bodyPr wrap="square" lIns="0" tIns="0" rIns="0" bIns="0" anchor="t">
             <a:spAutoFit/>
           </a:bodyPr>
           <a:lstStyle/>
@@ -6833,7 +6794,7 @@
           <a:noFill/>
         </p:spPr>
         <p:txBody>
-          <a:bodyPr wrap="square" lIns="0" rIns="0" tIns="0" bIns="0" anchor="t">
+          <a:bodyPr wrap="square" lIns="0" tIns="0" rIns="0" bIns="0" anchor="t">
             <a:spAutoFit/>
           </a:bodyPr>
           <a:lstStyle/>
@@ -6892,7 +6853,9 @@
         <p:txBody>
           <a:bodyPr rtlCol="0" anchor="ctr"/>
           <a:lstStyle/>
-          <a:p/>
+          <a:p>
+            <a:endParaRPr/>
+          </a:p>
         </p:txBody>
       </p:sp>
       <p:sp>
@@ -6912,7 +6875,7 @@
           <a:noFill/>
         </p:spPr>
         <p:txBody>
-          <a:bodyPr wrap="square" lIns="0" rIns="0" tIns="0" bIns="0" anchor="t">
+          <a:bodyPr wrap="square" lIns="0" tIns="0" rIns="0" bIns="0" anchor="t">
             <a:spAutoFit/>
           </a:bodyPr>
           <a:lstStyle/>
@@ -6947,7 +6910,7 @@
           <a:noFill/>
         </p:spPr>
         <p:txBody>
-          <a:bodyPr wrap="square" lIns="0" rIns="0" tIns="0" bIns="0" anchor="t">
+          <a:bodyPr wrap="square" lIns="0" tIns="0" rIns="0" bIns="0" anchor="t">
             <a:spAutoFit/>
           </a:bodyPr>
           <a:lstStyle/>
@@ -7006,7 +6969,9 @@
         <p:txBody>
           <a:bodyPr rtlCol="0" anchor="ctr"/>
           <a:lstStyle/>
-          <a:p/>
+          <a:p>
+            <a:endParaRPr/>
+          </a:p>
         </p:txBody>
       </p:sp>
       <p:sp>
@@ -7026,7 +6991,7 @@
           <a:noFill/>
         </p:spPr>
         <p:txBody>
-          <a:bodyPr wrap="square" lIns="0" rIns="0" tIns="0" bIns="0" anchor="t">
+          <a:bodyPr wrap="square" lIns="0" tIns="0" rIns="0" bIns="0" anchor="t">
             <a:spAutoFit/>
           </a:bodyPr>
           <a:lstStyle/>
@@ -7061,7 +7026,7 @@
           <a:noFill/>
         </p:spPr>
         <p:txBody>
-          <a:bodyPr wrap="square" lIns="0" rIns="0" tIns="0" bIns="0" anchor="t">
+          <a:bodyPr wrap="square" lIns="0" tIns="0" rIns="0" bIns="0" anchor="t">
             <a:spAutoFit/>
           </a:bodyPr>
           <a:lstStyle/>
@@ -7088,7 +7053,7 @@
 </file>
 
 <file path=ppt/slides/slide12.xml><?xml version="1.0" encoding="utf-8"?>
-<p:sld xmlns:a="http://schemas.openxmlformats.org/drawingml/2006/main" xmlns:p="http://schemas.openxmlformats.org/presentationml/2006/main" xmlns:r="http://schemas.openxmlformats.org/officeDocument/2006/relationships">
+<p:sld xmlns:a="http://schemas.openxmlformats.org/drawingml/2006/main" xmlns:r="http://schemas.openxmlformats.org/officeDocument/2006/relationships" xmlns:p="http://schemas.openxmlformats.org/presentationml/2006/main">
   <p:cSld>
     <p:bg>
       <p:bgPr>
@@ -7104,7 +7069,14 @@
         <p:cNvGrpSpPr/>
         <p:nvPr/>
       </p:nvGrpSpPr>
-      <p:grpSpPr/>
+      <p:grpSpPr>
+        <a:xfrm>
+          <a:off x="0" y="0"/>
+          <a:ext cx="0" cy="0"/>
+          <a:chOff x="0" y="0"/>
+          <a:chExt cx="0" cy="0"/>
+        </a:xfrm>
+      </p:grpSpPr>
       <p:sp>
         <p:nvSpPr>
           <p:cNvPr id="2" name="Kicker"/>
@@ -7122,7 +7094,7 @@
           <a:noFill/>
         </p:spPr>
         <p:txBody>
-          <a:bodyPr wrap="square" lIns="0" rIns="0" tIns="0" bIns="0" anchor="t">
+          <a:bodyPr wrap="square" lIns="0" tIns="0" rIns="0" bIns="0" anchor="t">
             <a:spAutoFit/>
           </a:bodyPr>
           <a:lstStyle/>
@@ -7157,7 +7129,7 @@
           <a:noFill/>
         </p:spPr>
         <p:txBody>
-          <a:bodyPr wrap="square" lIns="0" rIns="0" tIns="0" bIns="0" anchor="t">
+          <a:bodyPr wrap="square" lIns="0" tIns="0" rIns="0" bIns="0" anchor="t">
             <a:spAutoFit/>
           </a:bodyPr>
           <a:lstStyle/>
@@ -7178,100 +7150,6 @@
       <p:pic>
         <p:nvPicPr>
           <p:cNvPr id="4" name="Picture 3" descr="nmims_logo.png"/>
-          <p:cNvPicPr>
-            <a:picLocks noChangeAspect="1"/>
-          </p:cNvPicPr>
-          <p:nvPr/>
-        </p:nvPicPr>
-        <p:blipFill>
-          <a:blip r:embed="rId2"/>
-          <a:stretch>
-            <a:fillRect/>
-          </a:stretch>
-        </p:blipFill>
-        <p:spPr>
-          <a:xfrm>
-            <a:off x="11109960" y="274320"/>
-            <a:ext cx="570527" cy="566928"/>
-          </a:xfrm>
-          <a:prstGeom prst="rect">
-            <a:avLst/>
-          </a:prstGeom>
-        </p:spPr>
-      </p:pic>
-      <p:sp>
-        <p:nvSpPr>
-          <p:cNvPr id="5" name="TextBox 4"/>
-          <p:cNvSpPr txBox="1"/>
-          <p:nvPr/>
-        </p:nvSpPr>
-        <p:spPr>
-          <a:xfrm>
-            <a:off x="548640" y="6446520"/>
-            <a:ext cx="5486400" cy="228600"/>
-          </a:xfrm>
-          <a:prstGeom prst="rect">
-            <a:avLst/>
-          </a:prstGeom>
-          <a:noFill/>
-        </p:spPr>
-        <p:txBody>
-          <a:bodyPr wrap="square" lIns="0" rIns="0" tIns="0" bIns="0" anchor="t">
-            <a:spAutoFit/>
-          </a:bodyPr>
-          <a:lstStyle/>
-          <a:p>
-            <a:pPr algn="l"/>
-            <a:r>
-              <a:rPr sz="900" b="0" i="0">
-                <a:solidFill>
-                  <a:srgbClr val="8A8F98"/>
-                </a:solidFill>
-                <a:latin typeface="Calibri"/>
-              </a:rPr>
-              <a:t>DemandIQ  |  NMIMS MPSTME  |  Machine Learning, Sem V</a:t>
-            </a:r>
-          </a:p>
-        </p:txBody>
-      </p:sp>
-      <p:sp>
-        <p:nvSpPr>
-          <p:cNvPr id="6" name="TextBox 5"/>
-          <p:cNvSpPr txBox="1"/>
-          <p:nvPr/>
-        </p:nvSpPr>
-        <p:spPr>
-          <a:xfrm>
-            <a:off x="11155680" y="6446520"/>
-            <a:ext cx="502920" cy="228600"/>
-          </a:xfrm>
-          <a:prstGeom prst="rect">
-            <a:avLst/>
-          </a:prstGeom>
-          <a:noFill/>
-        </p:spPr>
-        <p:txBody>
-          <a:bodyPr wrap="square" lIns="0" rIns="0" tIns="0" bIns="0" anchor="t">
-            <a:spAutoFit/>
-          </a:bodyPr>
-          <a:lstStyle/>
-          <a:p>
-            <a:pPr algn="r"/>
-            <a:r>
-              <a:rPr sz="900" b="0" i="0">
-                <a:solidFill>
-                  <a:srgbClr val="8A8F98"/>
-                </a:solidFill>
-                <a:latin typeface="Calibri"/>
-              </a:rPr>
-              <a:t>12</a:t>
-            </a:r>
-          </a:p>
-        </p:txBody>
-      </p:sp>
-      <p:pic>
-        <p:nvPicPr>
-          <p:cNvPr id="7" name="Picture 6" descr="fig12_inventory_replay.png"/>
           <p:cNvPicPr>
             <a:picLocks noChangeAspect="1"/>
           </p:cNvPicPr>
@@ -7285,6 +7163,100 @@
         </p:blipFill>
         <p:spPr>
           <a:xfrm>
+            <a:off x="11109960" y="274320"/>
+            <a:ext cx="570527" cy="566928"/>
+          </a:xfrm>
+          <a:prstGeom prst="rect">
+            <a:avLst/>
+          </a:prstGeom>
+        </p:spPr>
+      </p:pic>
+      <p:sp>
+        <p:nvSpPr>
+          <p:cNvPr id="5" name="TextBox 4"/>
+          <p:cNvSpPr txBox="1"/>
+          <p:nvPr/>
+        </p:nvSpPr>
+        <p:spPr>
+          <a:xfrm>
+            <a:off x="548640" y="6446520"/>
+            <a:ext cx="5486400" cy="228600"/>
+          </a:xfrm>
+          <a:prstGeom prst="rect">
+            <a:avLst/>
+          </a:prstGeom>
+          <a:noFill/>
+        </p:spPr>
+        <p:txBody>
+          <a:bodyPr wrap="square" lIns="0" tIns="0" rIns="0" bIns="0" anchor="t">
+            <a:spAutoFit/>
+          </a:bodyPr>
+          <a:lstStyle/>
+          <a:p>
+            <a:pPr algn="l"/>
+            <a:r>
+              <a:rPr sz="900" b="0" i="0">
+                <a:solidFill>
+                  <a:srgbClr val="8A8F98"/>
+                </a:solidFill>
+                <a:latin typeface="Calibri"/>
+              </a:rPr>
+              <a:t>DemandIQ  |  NMIMS MPSTME  |  Machine Learning, Sem V</a:t>
+            </a:r>
+          </a:p>
+        </p:txBody>
+      </p:sp>
+      <p:sp>
+        <p:nvSpPr>
+          <p:cNvPr id="6" name="TextBox 5"/>
+          <p:cNvSpPr txBox="1"/>
+          <p:nvPr/>
+        </p:nvSpPr>
+        <p:spPr>
+          <a:xfrm>
+            <a:off x="11155680" y="6446520"/>
+            <a:ext cx="502920" cy="228600"/>
+          </a:xfrm>
+          <a:prstGeom prst="rect">
+            <a:avLst/>
+          </a:prstGeom>
+          <a:noFill/>
+        </p:spPr>
+        <p:txBody>
+          <a:bodyPr wrap="square" lIns="0" tIns="0" rIns="0" bIns="0" anchor="t">
+            <a:spAutoFit/>
+          </a:bodyPr>
+          <a:lstStyle/>
+          <a:p>
+            <a:pPr algn="r"/>
+            <a:r>
+              <a:rPr sz="900" b="0" i="0">
+                <a:solidFill>
+                  <a:srgbClr val="8A8F98"/>
+                </a:solidFill>
+                <a:latin typeface="Calibri"/>
+              </a:rPr>
+              <a:t>12</a:t>
+            </a:r>
+          </a:p>
+        </p:txBody>
+      </p:sp>
+      <p:pic>
+        <p:nvPicPr>
+          <p:cNvPr id="7" name="Picture 6" descr="fig12_inventory_replay.png"/>
+          <p:cNvPicPr>
+            <a:picLocks noChangeAspect="1"/>
+          </p:cNvPicPr>
+          <p:nvPr/>
+        </p:nvPicPr>
+        <p:blipFill>
+          <a:blip r:embed="rId4"/>
+          <a:stretch>
+            <a:fillRect/>
+          </a:stretch>
+        </p:blipFill>
+        <p:spPr>
+          <a:xfrm>
             <a:off x="548640" y="1650083"/>
             <a:ext cx="7223760" cy="2643433"/>
           </a:xfrm>
@@ -7330,7 +7302,7 @@
           </a:fontRef>
         </p:style>
         <p:txBody>
-          <a:bodyPr rtlCol="0" anchor="ctr" lIns="0" rIns="0" tIns="0" bIns="0"/>
+          <a:bodyPr lIns="0" tIns="0" rIns="0" bIns="0" rtlCol="0" anchor="ctr"/>
           <a:lstStyle/>
           <a:p>
             <a:pPr algn="ctr"/>
@@ -7363,7 +7335,7 @@
           <a:noFill/>
         </p:spPr>
         <p:txBody>
-          <a:bodyPr wrap="square" lIns="0" rIns="0" tIns="0" bIns="0" anchor="t">
+          <a:bodyPr wrap="square" lIns="0" tIns="0" rIns="0" bIns="0" anchor="t">
             <a:spAutoFit/>
           </a:bodyPr>
           <a:lstStyle/>
@@ -7398,7 +7370,7 @@
           <a:noFill/>
         </p:spPr>
         <p:txBody>
-          <a:bodyPr wrap="square" lIns="0" rIns="0" tIns="0" bIns="0" anchor="t">
+          <a:bodyPr wrap="square" lIns="0" tIns="0" rIns="0" bIns="0" anchor="t">
             <a:spAutoFit/>
           </a:bodyPr>
           <a:lstStyle/>
@@ -7453,7 +7425,7 @@
           </a:fontRef>
         </p:style>
         <p:txBody>
-          <a:bodyPr rtlCol="0" anchor="ctr" lIns="0" rIns="0" tIns="0" bIns="0"/>
+          <a:bodyPr lIns="0" tIns="0" rIns="0" bIns="0" rtlCol="0" anchor="ctr"/>
           <a:lstStyle/>
           <a:p>
             <a:pPr algn="ctr"/>
@@ -7486,7 +7458,7 @@
           <a:noFill/>
         </p:spPr>
         <p:txBody>
-          <a:bodyPr wrap="square" lIns="0" rIns="0" tIns="0" bIns="0" anchor="t">
+          <a:bodyPr wrap="square" lIns="0" tIns="0" rIns="0" bIns="0" anchor="t">
             <a:spAutoFit/>
           </a:bodyPr>
           <a:lstStyle/>
@@ -7521,7 +7493,7 @@
           <a:noFill/>
         </p:spPr>
         <p:txBody>
-          <a:bodyPr wrap="square" lIns="0" rIns="0" tIns="0" bIns="0" anchor="t">
+          <a:bodyPr wrap="square" lIns="0" tIns="0" rIns="0" bIns="0" anchor="t">
             <a:spAutoFit/>
           </a:bodyPr>
           <a:lstStyle/>
@@ -7576,7 +7548,7 @@
           </a:fontRef>
         </p:style>
         <p:txBody>
-          <a:bodyPr rtlCol="0" anchor="ctr" lIns="0" rIns="0" tIns="0" bIns="0"/>
+          <a:bodyPr lIns="0" tIns="0" rIns="0" bIns="0" rtlCol="0" anchor="ctr"/>
           <a:lstStyle/>
           <a:p>
             <a:pPr algn="ctr"/>
@@ -7609,7 +7581,7 @@
           <a:noFill/>
         </p:spPr>
         <p:txBody>
-          <a:bodyPr wrap="square" lIns="0" rIns="0" tIns="0" bIns="0" anchor="t">
+          <a:bodyPr wrap="square" lIns="0" tIns="0" rIns="0" bIns="0" anchor="t">
             <a:spAutoFit/>
           </a:bodyPr>
           <a:lstStyle/>
@@ -7644,7 +7616,7 @@
           <a:noFill/>
         </p:spPr>
         <p:txBody>
-          <a:bodyPr wrap="square" lIns="0" rIns="0" tIns="0" bIns="0" anchor="t">
+          <a:bodyPr wrap="square" lIns="0" tIns="0" rIns="0" bIns="0" anchor="t">
             <a:spAutoFit/>
           </a:bodyPr>
           <a:lstStyle/>
@@ -7703,7 +7675,9 @@
         <p:txBody>
           <a:bodyPr rtlCol="0" anchor="ctr"/>
           <a:lstStyle/>
-          <a:p/>
+          <a:p>
+            <a:endParaRPr/>
+          </a:p>
         </p:txBody>
       </p:sp>
       <p:sp>
@@ -7723,7 +7697,7 @@
           <a:noFill/>
         </p:spPr>
         <p:txBody>
-          <a:bodyPr wrap="square" lIns="0" rIns="0" tIns="0" bIns="0" anchor="ctr">
+          <a:bodyPr wrap="square" lIns="0" tIns="0" rIns="0" bIns="0" anchor="ctr">
             <a:spAutoFit/>
           </a:bodyPr>
           <a:lstStyle/>
@@ -7758,7 +7732,7 @@
           <a:noFill/>
         </p:spPr>
         <p:txBody>
-          <a:bodyPr wrap="square" lIns="0" rIns="0" tIns="0" bIns="0" anchor="ctr">
+          <a:bodyPr wrap="square" lIns="0" tIns="0" rIns="0" bIns="0" anchor="ctr">
             <a:spAutoFit/>
           </a:bodyPr>
           <a:lstStyle/>
@@ -7794,7 +7768,7 @@
 </file>
 
 <file path=ppt/slides/slide13.xml><?xml version="1.0" encoding="utf-8"?>
-<p:sld xmlns:a="http://schemas.openxmlformats.org/drawingml/2006/main" xmlns:p="http://schemas.openxmlformats.org/presentationml/2006/main" xmlns:r="http://schemas.openxmlformats.org/officeDocument/2006/relationships">
+<p:sld xmlns:a="http://schemas.openxmlformats.org/drawingml/2006/main" xmlns:r="http://schemas.openxmlformats.org/officeDocument/2006/relationships" xmlns:p="http://schemas.openxmlformats.org/presentationml/2006/main">
   <p:cSld>
     <p:bg>
       <p:bgPr>
@@ -7810,7 +7784,14 @@
         <p:cNvGrpSpPr/>
         <p:nvPr/>
       </p:nvGrpSpPr>
-      <p:grpSpPr/>
+      <p:grpSpPr>
+        <a:xfrm>
+          <a:off x="0" y="0"/>
+          <a:ext cx="0" cy="0"/>
+          <a:chOff x="0" y="0"/>
+          <a:chExt cx="0" cy="0"/>
+        </a:xfrm>
+      </p:grpSpPr>
       <p:sp>
         <p:nvSpPr>
           <p:cNvPr id="2" name="Kicker"/>
@@ -7828,7 +7809,7 @@
           <a:noFill/>
         </p:spPr>
         <p:txBody>
-          <a:bodyPr wrap="square" lIns="0" rIns="0" tIns="0" bIns="0" anchor="t">
+          <a:bodyPr wrap="square" lIns="0" tIns="0" rIns="0" bIns="0" anchor="t">
             <a:spAutoFit/>
           </a:bodyPr>
           <a:lstStyle/>
@@ -7863,7 +7844,7 @@
           <a:noFill/>
         </p:spPr>
         <p:txBody>
-          <a:bodyPr wrap="square" lIns="0" rIns="0" tIns="0" bIns="0" anchor="t">
+          <a:bodyPr wrap="square" lIns="0" tIns="0" rIns="0" bIns="0" anchor="t">
             <a:spAutoFit/>
           </a:bodyPr>
           <a:lstStyle/>
@@ -7884,100 +7865,6 @@
       <p:pic>
         <p:nvPicPr>
           <p:cNvPr id="4" name="Picture 3" descr="nmims_logo.png"/>
-          <p:cNvPicPr>
-            <a:picLocks noChangeAspect="1"/>
-          </p:cNvPicPr>
-          <p:nvPr/>
-        </p:nvPicPr>
-        <p:blipFill>
-          <a:blip r:embed="rId2"/>
-          <a:stretch>
-            <a:fillRect/>
-          </a:stretch>
-        </p:blipFill>
-        <p:spPr>
-          <a:xfrm>
-            <a:off x="11109960" y="274320"/>
-            <a:ext cx="570527" cy="566928"/>
-          </a:xfrm>
-          <a:prstGeom prst="rect">
-            <a:avLst/>
-          </a:prstGeom>
-        </p:spPr>
-      </p:pic>
-      <p:sp>
-        <p:nvSpPr>
-          <p:cNvPr id="5" name="TextBox 4"/>
-          <p:cNvSpPr txBox="1"/>
-          <p:nvPr/>
-        </p:nvSpPr>
-        <p:spPr>
-          <a:xfrm>
-            <a:off x="548640" y="6446520"/>
-            <a:ext cx="5486400" cy="228600"/>
-          </a:xfrm>
-          <a:prstGeom prst="rect">
-            <a:avLst/>
-          </a:prstGeom>
-          <a:noFill/>
-        </p:spPr>
-        <p:txBody>
-          <a:bodyPr wrap="square" lIns="0" rIns="0" tIns="0" bIns="0" anchor="t">
-            <a:spAutoFit/>
-          </a:bodyPr>
-          <a:lstStyle/>
-          <a:p>
-            <a:pPr algn="l"/>
-            <a:r>
-              <a:rPr sz="900" b="0" i="0">
-                <a:solidFill>
-                  <a:srgbClr val="8A8F98"/>
-                </a:solidFill>
-                <a:latin typeface="Calibri"/>
-              </a:rPr>
-              <a:t>DemandIQ  |  NMIMS MPSTME  |  Machine Learning, Sem V</a:t>
-            </a:r>
-          </a:p>
-        </p:txBody>
-      </p:sp>
-      <p:sp>
-        <p:nvSpPr>
-          <p:cNvPr id="6" name="TextBox 5"/>
-          <p:cNvSpPr txBox="1"/>
-          <p:nvPr/>
-        </p:nvSpPr>
-        <p:spPr>
-          <a:xfrm>
-            <a:off x="11155680" y="6446520"/>
-            <a:ext cx="502920" cy="228600"/>
-          </a:xfrm>
-          <a:prstGeom prst="rect">
-            <a:avLst/>
-          </a:prstGeom>
-          <a:noFill/>
-        </p:spPr>
-        <p:txBody>
-          <a:bodyPr wrap="square" lIns="0" rIns="0" tIns="0" bIns="0" anchor="t">
-            <a:spAutoFit/>
-          </a:bodyPr>
-          <a:lstStyle/>
-          <a:p>
-            <a:pPr algn="r"/>
-            <a:r>
-              <a:rPr sz="900" b="0" i="0">
-                <a:solidFill>
-                  <a:srgbClr val="8A8F98"/>
-                </a:solidFill>
-                <a:latin typeface="Calibri"/>
-              </a:rPr>
-              <a:t>13</a:t>
-            </a:r>
-          </a:p>
-        </p:txBody>
-      </p:sp>
-      <p:pic>
-        <p:nvPicPr>
-          <p:cNvPr id="7" name="Picture 6" descr="fig13_roc_pr_curves.png"/>
           <p:cNvPicPr>
             <a:picLocks noChangeAspect="1"/>
           </p:cNvPicPr>
@@ -7991,6 +7878,100 @@
         </p:blipFill>
         <p:spPr>
           <a:xfrm>
+            <a:off x="11109960" y="274320"/>
+            <a:ext cx="570527" cy="566928"/>
+          </a:xfrm>
+          <a:prstGeom prst="rect">
+            <a:avLst/>
+          </a:prstGeom>
+        </p:spPr>
+      </p:pic>
+      <p:sp>
+        <p:nvSpPr>
+          <p:cNvPr id="5" name="TextBox 4"/>
+          <p:cNvSpPr txBox="1"/>
+          <p:nvPr/>
+        </p:nvSpPr>
+        <p:spPr>
+          <a:xfrm>
+            <a:off x="548640" y="6446520"/>
+            <a:ext cx="5486400" cy="228600"/>
+          </a:xfrm>
+          <a:prstGeom prst="rect">
+            <a:avLst/>
+          </a:prstGeom>
+          <a:noFill/>
+        </p:spPr>
+        <p:txBody>
+          <a:bodyPr wrap="square" lIns="0" tIns="0" rIns="0" bIns="0" anchor="t">
+            <a:spAutoFit/>
+          </a:bodyPr>
+          <a:lstStyle/>
+          <a:p>
+            <a:pPr algn="l"/>
+            <a:r>
+              <a:rPr sz="900" b="0" i="0">
+                <a:solidFill>
+                  <a:srgbClr val="8A8F98"/>
+                </a:solidFill>
+                <a:latin typeface="Calibri"/>
+              </a:rPr>
+              <a:t>DemandIQ  |  NMIMS MPSTME  |  Machine Learning, Sem V</a:t>
+            </a:r>
+          </a:p>
+        </p:txBody>
+      </p:sp>
+      <p:sp>
+        <p:nvSpPr>
+          <p:cNvPr id="6" name="TextBox 5"/>
+          <p:cNvSpPr txBox="1"/>
+          <p:nvPr/>
+        </p:nvSpPr>
+        <p:spPr>
+          <a:xfrm>
+            <a:off x="11155680" y="6446520"/>
+            <a:ext cx="502920" cy="228600"/>
+          </a:xfrm>
+          <a:prstGeom prst="rect">
+            <a:avLst/>
+          </a:prstGeom>
+          <a:noFill/>
+        </p:spPr>
+        <p:txBody>
+          <a:bodyPr wrap="square" lIns="0" tIns="0" rIns="0" bIns="0" anchor="t">
+            <a:spAutoFit/>
+          </a:bodyPr>
+          <a:lstStyle/>
+          <a:p>
+            <a:pPr algn="r"/>
+            <a:r>
+              <a:rPr sz="900" b="0" i="0">
+                <a:solidFill>
+                  <a:srgbClr val="8A8F98"/>
+                </a:solidFill>
+                <a:latin typeface="Calibri"/>
+              </a:rPr>
+              <a:t>13</a:t>
+            </a:r>
+          </a:p>
+        </p:txBody>
+      </p:sp>
+      <p:pic>
+        <p:nvPicPr>
+          <p:cNvPr id="7" name="Picture 6" descr="fig13_roc_pr_curves.png"/>
+          <p:cNvPicPr>
+            <a:picLocks noChangeAspect="1"/>
+          </p:cNvPicPr>
+          <p:nvPr/>
+        </p:nvPicPr>
+        <p:blipFill>
+          <a:blip r:embed="rId4"/>
+          <a:stretch>
+            <a:fillRect/>
+          </a:stretch>
+        </p:blipFill>
+        <p:spPr>
+          <a:xfrm>
             <a:off x="548640" y="1594826"/>
             <a:ext cx="6949440" cy="2616787"/>
           </a:xfrm>
@@ -8008,7 +7989,7 @@
           <p:nvPr/>
         </p:nvPicPr>
         <p:blipFill>
-          <a:blip r:embed="rId4"/>
+          <a:blip r:embed="rId5"/>
           <a:stretch>
             <a:fillRect/>
           </a:stretch>
@@ -8064,7 +8045,9 @@
         <p:txBody>
           <a:bodyPr rtlCol="0" anchor="ctr"/>
           <a:lstStyle/>
-          <a:p/>
+          <a:p>
+            <a:endParaRPr/>
+          </a:p>
         </p:txBody>
       </p:sp>
       <p:sp>
@@ -8084,7 +8067,7 @@
           <a:noFill/>
         </p:spPr>
         <p:txBody>
-          <a:bodyPr wrap="square" lIns="0" rIns="0" tIns="0" bIns="0" anchor="t">
+          <a:bodyPr wrap="square" lIns="0" tIns="0" rIns="0" bIns="0" anchor="t">
             <a:spAutoFit/>
           </a:bodyPr>
           <a:lstStyle/>
@@ -8119,7 +8102,7 @@
           <a:noFill/>
         </p:spPr>
         <p:txBody>
-          <a:bodyPr wrap="square" lIns="0" rIns="0" tIns="0" bIns="0" anchor="t">
+          <a:bodyPr wrap="square" lIns="0" tIns="0" rIns="0" bIns="0" anchor="t">
             <a:spAutoFit/>
           </a:bodyPr>
           <a:lstStyle/>
@@ -8178,7 +8161,9 @@
         <p:txBody>
           <a:bodyPr rtlCol="0" anchor="ctr"/>
           <a:lstStyle/>
-          <a:p/>
+          <a:p>
+            <a:endParaRPr/>
+          </a:p>
         </p:txBody>
       </p:sp>
       <p:sp>
@@ -8198,7 +8183,7 @@
           <a:noFill/>
         </p:spPr>
         <p:txBody>
-          <a:bodyPr wrap="square" lIns="0" rIns="0" tIns="0" bIns="0" anchor="t">
+          <a:bodyPr wrap="square" lIns="0" tIns="0" rIns="0" bIns="0" anchor="t">
             <a:spAutoFit/>
           </a:bodyPr>
           <a:lstStyle/>
@@ -8233,7 +8218,7 @@
           <a:noFill/>
         </p:spPr>
         <p:txBody>
-          <a:bodyPr wrap="square" lIns="0" rIns="0" tIns="0" bIns="0" anchor="t">
+          <a:bodyPr wrap="square" lIns="0" tIns="0" rIns="0" bIns="0" anchor="t">
             <a:spAutoFit/>
           </a:bodyPr>
           <a:lstStyle/>
@@ -8292,7 +8277,9 @@
         <p:txBody>
           <a:bodyPr rtlCol="0" anchor="ctr"/>
           <a:lstStyle/>
-          <a:p/>
+          <a:p>
+            <a:endParaRPr/>
+          </a:p>
         </p:txBody>
       </p:sp>
       <p:sp>
@@ -8312,7 +8299,7 @@
           <a:noFill/>
         </p:spPr>
         <p:txBody>
-          <a:bodyPr wrap="square" lIns="0" rIns="0" tIns="0" bIns="0" anchor="t">
+          <a:bodyPr wrap="square" lIns="0" tIns="0" rIns="0" bIns="0" anchor="t">
             <a:spAutoFit/>
           </a:bodyPr>
           <a:lstStyle/>
@@ -8347,7 +8334,7 @@
           <a:noFill/>
         </p:spPr>
         <p:txBody>
-          <a:bodyPr wrap="square" lIns="0" rIns="0" tIns="0" bIns="0" anchor="t">
+          <a:bodyPr wrap="square" lIns="0" tIns="0" rIns="0" bIns="0" anchor="t">
             <a:spAutoFit/>
           </a:bodyPr>
           <a:lstStyle/>
@@ -8382,7 +8369,7 @@
           <a:noFill/>
         </p:spPr>
         <p:txBody>
-          <a:bodyPr wrap="square" lIns="0" rIns="0" tIns="0" bIns="0" anchor="t">
+          <a:bodyPr wrap="square" lIns="0" tIns="0" rIns="0" bIns="0" anchor="t">
             <a:spAutoFit/>
           </a:bodyPr>
           <a:lstStyle/>
@@ -8436,7 +8423,7 @@
 </file>
 
 <file path=ppt/slides/slide14.xml><?xml version="1.0" encoding="utf-8"?>
-<p:sld xmlns:a="http://schemas.openxmlformats.org/drawingml/2006/main" xmlns:p="http://schemas.openxmlformats.org/presentationml/2006/main" xmlns:r="http://schemas.openxmlformats.org/officeDocument/2006/relationships">
+<p:sld xmlns:a="http://schemas.openxmlformats.org/drawingml/2006/main" xmlns:r="http://schemas.openxmlformats.org/officeDocument/2006/relationships" xmlns:p="http://schemas.openxmlformats.org/presentationml/2006/main">
   <p:cSld>
     <p:bg>
       <p:bgPr>
@@ -8452,7 +8439,14 @@
         <p:cNvGrpSpPr/>
         <p:nvPr/>
       </p:nvGrpSpPr>
-      <p:grpSpPr/>
+      <p:grpSpPr>
+        <a:xfrm>
+          <a:off x="0" y="0"/>
+          <a:ext cx="0" cy="0"/>
+          <a:chOff x="0" y="0"/>
+          <a:chExt cx="0" cy="0"/>
+        </a:xfrm>
+      </p:grpSpPr>
       <p:sp>
         <p:nvSpPr>
           <p:cNvPr id="2" name="Kicker"/>
@@ -8470,7 +8464,7 @@
           <a:noFill/>
         </p:spPr>
         <p:txBody>
-          <a:bodyPr wrap="square" lIns="0" rIns="0" tIns="0" bIns="0" anchor="t">
+          <a:bodyPr wrap="square" lIns="0" tIns="0" rIns="0" bIns="0" anchor="t">
             <a:spAutoFit/>
           </a:bodyPr>
           <a:lstStyle/>
@@ -8505,7 +8499,7 @@
           <a:noFill/>
         </p:spPr>
         <p:txBody>
-          <a:bodyPr wrap="square" lIns="0" rIns="0" tIns="0" bIns="0" anchor="t">
+          <a:bodyPr wrap="square" lIns="0" tIns="0" rIns="0" bIns="0" anchor="t">
             <a:spAutoFit/>
           </a:bodyPr>
           <a:lstStyle/>
@@ -8532,7 +8526,7 @@
           <p:nvPr/>
         </p:nvPicPr>
         <p:blipFill>
-          <a:blip r:embed="rId2"/>
+          <a:blip r:embed="rId3"/>
           <a:stretch>
             <a:fillRect/>
           </a:stretch>
@@ -8564,7 +8558,7 @@
           <a:noFill/>
         </p:spPr>
         <p:txBody>
-          <a:bodyPr wrap="square" lIns="0" rIns="0" tIns="0" bIns="0" anchor="t">
+          <a:bodyPr wrap="square" lIns="0" tIns="0" rIns="0" bIns="0" anchor="t">
             <a:spAutoFit/>
           </a:bodyPr>
           <a:lstStyle/>
@@ -8599,7 +8593,7 @@
           <a:noFill/>
         </p:spPr>
         <p:txBody>
-          <a:bodyPr wrap="square" lIns="0" rIns="0" tIns="0" bIns="0" anchor="t">
+          <a:bodyPr wrap="square" lIns="0" tIns="0" rIns="0" bIns="0" anchor="t">
             <a:spAutoFit/>
           </a:bodyPr>
           <a:lstStyle/>
@@ -8631,7 +8625,7 @@
         </p:xfrm>
         <a:graphic>
           <a:graphicData uri="http://schemas.openxmlformats.org/drawingml/2006/chart">
-            <c:chart xmlns:c="http://schemas.openxmlformats.org/drawingml/2006/chart" r:id="rId3"/>
+            <c:chart xmlns:c="http://schemas.openxmlformats.org/drawingml/2006/chart" xmlns:r="http://schemas.openxmlformats.org/officeDocument/2006/relationships" r:id="rId4"/>
           </a:graphicData>
         </a:graphic>
       </p:graphicFrame>
@@ -8644,7 +8638,7 @@
           <p:nvPr/>
         </p:nvPicPr>
         <p:blipFill>
-          <a:blip r:embed="rId4"/>
+          <a:blip r:embed="rId5"/>
           <a:stretch>
             <a:fillRect/>
           </a:stretch>
@@ -8678,10 +8672,34 @@
                 <a:tableStyleId>{5C22544A-7EE6-4342-B048-85BDC9FD1C3A}</a:tableStyleId>
               </a:tblPr>
               <a:tblGrid>
-                <a:gridCol w="1337310"/>
-                <a:gridCol w="1337310"/>
-                <a:gridCol w="1337310"/>
-                <a:gridCol w="1337310"/>
+                <a:gridCol w="1337310">
+                  <a:extLst>
+                    <a:ext uri="{9D8B030D-6E8A-4147-A177-3AD203B41FA5}">
+                      <a16:colId xmlns:a16="http://schemas.microsoft.com/office/drawing/2014/main" val="20000"/>
+                    </a:ext>
+                  </a:extLst>
+                </a:gridCol>
+                <a:gridCol w="1337310">
+                  <a:extLst>
+                    <a:ext uri="{9D8B030D-6E8A-4147-A177-3AD203B41FA5}">
+                      <a16:colId xmlns:a16="http://schemas.microsoft.com/office/drawing/2014/main" val="20001"/>
+                    </a:ext>
+                  </a:extLst>
+                </a:gridCol>
+                <a:gridCol w="1337310">
+                  <a:extLst>
+                    <a:ext uri="{9D8B030D-6E8A-4147-A177-3AD203B41FA5}">
+                      <a16:colId xmlns:a16="http://schemas.microsoft.com/office/drawing/2014/main" val="20002"/>
+                    </a:ext>
+                  </a:extLst>
+                </a:gridCol>
+                <a:gridCol w="1337310">
+                  <a:extLst>
+                    <a:ext uri="{9D8B030D-6E8A-4147-A177-3AD203B41FA5}">
+                      <a16:colId xmlns:a16="http://schemas.microsoft.com/office/drawing/2014/main" val="20003"/>
+                    </a:ext>
+                  </a:extLst>
+                </a:gridCol>
               </a:tblGrid>
               <a:tr h="365760">
                 <a:tc>
@@ -8776,6 +8794,11 @@
                     </a:solidFill>
                   </a:tcPr>
                 </a:tc>
+                <a:extLst>
+                  <a:ext uri="{0D108BD9-81ED-4DB2-BD59-A6C34878D82A}">
+                    <a16:rowId xmlns:a16="http://schemas.microsoft.com/office/drawing/2014/main" val="10000"/>
+                  </a:ext>
+                </a:extLst>
               </a:tr>
               <a:tr h="365760">
                 <a:tc>
@@ -8870,6 +8893,11 @@
                     </a:solidFill>
                   </a:tcPr>
                 </a:tc>
+                <a:extLst>
+                  <a:ext uri="{0D108BD9-81ED-4DB2-BD59-A6C34878D82A}">
+                    <a16:rowId xmlns:a16="http://schemas.microsoft.com/office/drawing/2014/main" val="10001"/>
+                  </a:ext>
+                </a:extLst>
               </a:tr>
               <a:tr h="365760">
                 <a:tc>
@@ -8964,6 +8992,11 @@
                     </a:solidFill>
                   </a:tcPr>
                 </a:tc>
+                <a:extLst>
+                  <a:ext uri="{0D108BD9-81ED-4DB2-BD59-A6C34878D82A}">
+                    <a16:rowId xmlns:a16="http://schemas.microsoft.com/office/drawing/2014/main" val="10002"/>
+                  </a:ext>
+                </a:extLst>
               </a:tr>
               <a:tr h="365760">
                 <a:tc>
@@ -9058,6 +9091,11 @@
                     </a:solidFill>
                   </a:tcPr>
                 </a:tc>
+                <a:extLst>
+                  <a:ext uri="{0D108BD9-81ED-4DB2-BD59-A6C34878D82A}">
+                    <a16:rowId xmlns:a16="http://schemas.microsoft.com/office/drawing/2014/main" val="10003"/>
+                  </a:ext>
+                </a:extLst>
               </a:tr>
             </a:tbl>
           </a:graphicData>
@@ -9104,7 +9142,9 @@
         <p:txBody>
           <a:bodyPr rtlCol="0" anchor="ctr"/>
           <a:lstStyle/>
-          <a:p/>
+          <a:p>
+            <a:endParaRPr/>
+          </a:p>
         </p:txBody>
       </p:sp>
       <p:sp>
@@ -9124,7 +9164,7 @@
           <a:noFill/>
         </p:spPr>
         <p:txBody>
-          <a:bodyPr wrap="square" lIns="0" rIns="0" tIns="0" bIns="0" anchor="ctr">
+          <a:bodyPr wrap="square" lIns="0" tIns="0" rIns="0" bIns="0" anchor="ctr">
             <a:spAutoFit/>
           </a:bodyPr>
           <a:lstStyle/>
@@ -9151,7 +9191,7 @@
 </file>
 
 <file path=ppt/slides/slide15.xml><?xml version="1.0" encoding="utf-8"?>
-<p:sld xmlns:a="http://schemas.openxmlformats.org/drawingml/2006/main" xmlns:p="http://schemas.openxmlformats.org/presentationml/2006/main" xmlns:r="http://schemas.openxmlformats.org/officeDocument/2006/relationships">
+<p:sld xmlns:a="http://schemas.openxmlformats.org/drawingml/2006/main" xmlns:r="http://schemas.openxmlformats.org/officeDocument/2006/relationships" xmlns:p="http://schemas.openxmlformats.org/presentationml/2006/main">
   <p:cSld>
     <p:bg>
       <p:bgPr>
@@ -9167,7 +9207,14 @@
         <p:cNvGrpSpPr/>
         <p:nvPr/>
       </p:nvGrpSpPr>
-      <p:grpSpPr/>
+      <p:grpSpPr>
+        <a:xfrm>
+          <a:off x="0" y="0"/>
+          <a:ext cx="0" cy="0"/>
+          <a:chOff x="0" y="0"/>
+          <a:chExt cx="0" cy="0"/>
+        </a:xfrm>
+      </p:grpSpPr>
       <p:sp>
         <p:nvSpPr>
           <p:cNvPr id="2" name="Kicker"/>
@@ -9185,7 +9232,7 @@
           <a:noFill/>
         </p:spPr>
         <p:txBody>
-          <a:bodyPr wrap="square" lIns="0" rIns="0" tIns="0" bIns="0" anchor="t">
+          <a:bodyPr wrap="square" lIns="0" tIns="0" rIns="0" bIns="0" anchor="t">
             <a:spAutoFit/>
           </a:bodyPr>
           <a:lstStyle/>
@@ -9220,7 +9267,7 @@
           <a:noFill/>
         </p:spPr>
         <p:txBody>
-          <a:bodyPr wrap="square" lIns="0" rIns="0" tIns="0" bIns="0" anchor="t">
+          <a:bodyPr wrap="square" lIns="0" tIns="0" rIns="0" bIns="0" anchor="t">
             <a:spAutoFit/>
           </a:bodyPr>
           <a:lstStyle/>
@@ -9241,100 +9288,6 @@
       <p:pic>
         <p:nvPicPr>
           <p:cNvPr id="4" name="Picture 3" descr="nmims_logo.png"/>
-          <p:cNvPicPr>
-            <a:picLocks noChangeAspect="1"/>
-          </p:cNvPicPr>
-          <p:nvPr/>
-        </p:nvPicPr>
-        <p:blipFill>
-          <a:blip r:embed="rId2"/>
-          <a:stretch>
-            <a:fillRect/>
-          </a:stretch>
-        </p:blipFill>
-        <p:spPr>
-          <a:xfrm>
-            <a:off x="11109960" y="274320"/>
-            <a:ext cx="570527" cy="566928"/>
-          </a:xfrm>
-          <a:prstGeom prst="rect">
-            <a:avLst/>
-          </a:prstGeom>
-        </p:spPr>
-      </p:pic>
-      <p:sp>
-        <p:nvSpPr>
-          <p:cNvPr id="5" name="TextBox 4"/>
-          <p:cNvSpPr txBox="1"/>
-          <p:nvPr/>
-        </p:nvSpPr>
-        <p:spPr>
-          <a:xfrm>
-            <a:off x="548640" y="6446520"/>
-            <a:ext cx="5486400" cy="228600"/>
-          </a:xfrm>
-          <a:prstGeom prst="rect">
-            <a:avLst/>
-          </a:prstGeom>
-          <a:noFill/>
-        </p:spPr>
-        <p:txBody>
-          <a:bodyPr wrap="square" lIns="0" rIns="0" tIns="0" bIns="0" anchor="t">
-            <a:spAutoFit/>
-          </a:bodyPr>
-          <a:lstStyle/>
-          <a:p>
-            <a:pPr algn="l"/>
-            <a:r>
-              <a:rPr sz="900" b="0" i="0">
-                <a:solidFill>
-                  <a:srgbClr val="8A8F98"/>
-                </a:solidFill>
-                <a:latin typeface="Calibri"/>
-              </a:rPr>
-              <a:t>DemandIQ  |  NMIMS MPSTME  |  Machine Learning, Sem V</a:t>
-            </a:r>
-          </a:p>
-        </p:txBody>
-      </p:sp>
-      <p:sp>
-        <p:nvSpPr>
-          <p:cNvPr id="6" name="TextBox 5"/>
-          <p:cNvSpPr txBox="1"/>
-          <p:nvPr/>
-        </p:nvSpPr>
-        <p:spPr>
-          <a:xfrm>
-            <a:off x="11155680" y="6446520"/>
-            <a:ext cx="502920" cy="228600"/>
-          </a:xfrm>
-          <a:prstGeom prst="rect">
-            <a:avLst/>
-          </a:prstGeom>
-          <a:noFill/>
-        </p:spPr>
-        <p:txBody>
-          <a:bodyPr wrap="square" lIns="0" rIns="0" tIns="0" bIns="0" anchor="t">
-            <a:spAutoFit/>
-          </a:bodyPr>
-          <a:lstStyle/>
-          <a:p>
-            <a:pPr algn="r"/>
-            <a:r>
-              <a:rPr sz="900" b="0" i="0">
-                <a:solidFill>
-                  <a:srgbClr val="8A8F98"/>
-                </a:solidFill>
-                <a:latin typeface="Calibri"/>
-              </a:rPr>
-              <a:t>15</a:t>
-            </a:r>
-          </a:p>
-        </p:txBody>
-      </p:sp>
-      <p:pic>
-        <p:nvPicPr>
-          <p:cNvPr id="7" name="Picture 6" descr="fig24_tradeoff_frontier.png"/>
           <p:cNvPicPr>
             <a:picLocks noChangeAspect="1"/>
           </p:cNvPicPr>
@@ -9348,6 +9301,100 @@
         </p:blipFill>
         <p:spPr>
           <a:xfrm>
+            <a:off x="11109960" y="274320"/>
+            <a:ext cx="570527" cy="566928"/>
+          </a:xfrm>
+          <a:prstGeom prst="rect">
+            <a:avLst/>
+          </a:prstGeom>
+        </p:spPr>
+      </p:pic>
+      <p:sp>
+        <p:nvSpPr>
+          <p:cNvPr id="5" name="TextBox 4"/>
+          <p:cNvSpPr txBox="1"/>
+          <p:nvPr/>
+        </p:nvSpPr>
+        <p:spPr>
+          <a:xfrm>
+            <a:off x="548640" y="6446520"/>
+            <a:ext cx="5486400" cy="228600"/>
+          </a:xfrm>
+          <a:prstGeom prst="rect">
+            <a:avLst/>
+          </a:prstGeom>
+          <a:noFill/>
+        </p:spPr>
+        <p:txBody>
+          <a:bodyPr wrap="square" lIns="0" tIns="0" rIns="0" bIns="0" anchor="t">
+            <a:spAutoFit/>
+          </a:bodyPr>
+          <a:lstStyle/>
+          <a:p>
+            <a:pPr algn="l"/>
+            <a:r>
+              <a:rPr sz="900" b="0" i="0">
+                <a:solidFill>
+                  <a:srgbClr val="8A8F98"/>
+                </a:solidFill>
+                <a:latin typeface="Calibri"/>
+              </a:rPr>
+              <a:t>DemandIQ  |  NMIMS MPSTME  |  Machine Learning, Sem V</a:t>
+            </a:r>
+          </a:p>
+        </p:txBody>
+      </p:sp>
+      <p:sp>
+        <p:nvSpPr>
+          <p:cNvPr id="6" name="TextBox 5"/>
+          <p:cNvSpPr txBox="1"/>
+          <p:nvPr/>
+        </p:nvSpPr>
+        <p:spPr>
+          <a:xfrm>
+            <a:off x="11155680" y="6446520"/>
+            <a:ext cx="502920" cy="228600"/>
+          </a:xfrm>
+          <a:prstGeom prst="rect">
+            <a:avLst/>
+          </a:prstGeom>
+          <a:noFill/>
+        </p:spPr>
+        <p:txBody>
+          <a:bodyPr wrap="square" lIns="0" tIns="0" rIns="0" bIns="0" anchor="t">
+            <a:spAutoFit/>
+          </a:bodyPr>
+          <a:lstStyle/>
+          <a:p>
+            <a:pPr algn="r"/>
+            <a:r>
+              <a:rPr sz="900" b="0" i="0">
+                <a:solidFill>
+                  <a:srgbClr val="8A8F98"/>
+                </a:solidFill>
+                <a:latin typeface="Calibri"/>
+              </a:rPr>
+              <a:t>15</a:t>
+            </a:r>
+          </a:p>
+        </p:txBody>
+      </p:sp>
+      <p:pic>
+        <p:nvPicPr>
+          <p:cNvPr id="7" name="Picture 6" descr="fig24_tradeoff_frontier.png"/>
+          <p:cNvPicPr>
+            <a:picLocks noChangeAspect="1"/>
+          </p:cNvPicPr>
+          <p:nvPr/>
+        </p:nvPicPr>
+        <p:blipFill>
+          <a:blip r:embed="rId4"/>
+          <a:stretch>
+            <a:fillRect/>
+          </a:stretch>
+        </p:blipFill>
+        <p:spPr>
+          <a:xfrm>
             <a:off x="548640" y="1877217"/>
             <a:ext cx="6675120" cy="3835084"/>
           </a:xfrm>
@@ -9397,7 +9444,9 @@
         <p:txBody>
           <a:bodyPr rtlCol="0" anchor="ctr"/>
           <a:lstStyle/>
-          <a:p/>
+          <a:p>
+            <a:endParaRPr/>
+          </a:p>
         </p:txBody>
       </p:sp>
       <p:sp>
@@ -9417,7 +9466,7 @@
           <a:noFill/>
         </p:spPr>
         <p:txBody>
-          <a:bodyPr wrap="square" lIns="0" rIns="0" tIns="0" bIns="0" anchor="t">
+          <a:bodyPr wrap="square" lIns="0" tIns="0" rIns="0" bIns="0" anchor="t">
             <a:spAutoFit/>
           </a:bodyPr>
           <a:lstStyle/>
@@ -9452,7 +9501,7 @@
           <a:noFill/>
         </p:spPr>
         <p:txBody>
-          <a:bodyPr wrap="square" lIns="0" rIns="0" tIns="0" bIns="0" anchor="t">
+          <a:bodyPr wrap="square" lIns="0" tIns="0" rIns="0" bIns="0" anchor="t">
             <a:spAutoFit/>
           </a:bodyPr>
           <a:lstStyle/>
@@ -9511,7 +9560,9 @@
         <p:txBody>
           <a:bodyPr rtlCol="0" anchor="ctr"/>
           <a:lstStyle/>
-          <a:p/>
+          <a:p>
+            <a:endParaRPr/>
+          </a:p>
         </p:txBody>
       </p:sp>
       <p:sp>
@@ -9531,7 +9582,7 @@
           <a:noFill/>
         </p:spPr>
         <p:txBody>
-          <a:bodyPr wrap="square" lIns="0" rIns="0" tIns="0" bIns="0" anchor="t">
+          <a:bodyPr wrap="square" lIns="0" tIns="0" rIns="0" bIns="0" anchor="t">
             <a:spAutoFit/>
           </a:bodyPr>
           <a:lstStyle/>
@@ -9566,7 +9617,7 @@
           <a:noFill/>
         </p:spPr>
         <p:txBody>
-          <a:bodyPr wrap="square" lIns="0" rIns="0" tIns="0" bIns="0" anchor="t">
+          <a:bodyPr wrap="square" lIns="0" tIns="0" rIns="0" bIns="0" anchor="t">
             <a:spAutoFit/>
           </a:bodyPr>
           <a:lstStyle/>
@@ -9625,7 +9676,9 @@
         <p:txBody>
           <a:bodyPr rtlCol="0" anchor="ctr"/>
           <a:lstStyle/>
-          <a:p/>
+          <a:p>
+            <a:endParaRPr/>
+          </a:p>
         </p:txBody>
       </p:sp>
       <p:sp>
@@ -9645,7 +9698,7 @@
           <a:noFill/>
         </p:spPr>
         <p:txBody>
-          <a:bodyPr wrap="square" lIns="0" rIns="0" tIns="0" bIns="0" anchor="t">
+          <a:bodyPr wrap="square" lIns="0" tIns="0" rIns="0" bIns="0" anchor="t">
             <a:spAutoFit/>
           </a:bodyPr>
           <a:lstStyle/>
@@ -9680,7 +9733,7 @@
           <a:noFill/>
         </p:spPr>
         <p:txBody>
-          <a:bodyPr wrap="square" lIns="0" rIns="0" tIns="0" bIns="0" anchor="t">
+          <a:bodyPr wrap="square" lIns="0" tIns="0" rIns="0" bIns="0" anchor="t">
             <a:spAutoFit/>
           </a:bodyPr>
           <a:lstStyle/>
@@ -9707,7 +9760,7 @@
 </file>
 
 <file path=ppt/slides/slide16.xml><?xml version="1.0" encoding="utf-8"?>
-<p:sld xmlns:a="http://schemas.openxmlformats.org/drawingml/2006/main" xmlns:p="http://schemas.openxmlformats.org/presentationml/2006/main" xmlns:r="http://schemas.openxmlformats.org/officeDocument/2006/relationships">
+<p:sld xmlns:a="http://schemas.openxmlformats.org/drawingml/2006/main" xmlns:r="http://schemas.openxmlformats.org/officeDocument/2006/relationships" xmlns:p="http://schemas.openxmlformats.org/presentationml/2006/main">
   <p:cSld>
     <p:bg>
       <p:bgPr>
@@ -9723,7 +9776,14 @@
         <p:cNvGrpSpPr/>
         <p:nvPr/>
       </p:nvGrpSpPr>
-      <p:grpSpPr/>
+      <p:grpSpPr>
+        <a:xfrm>
+          <a:off x="0" y="0"/>
+          <a:ext cx="0" cy="0"/>
+          <a:chOff x="0" y="0"/>
+          <a:chExt cx="0" cy="0"/>
+        </a:xfrm>
+      </p:grpSpPr>
       <p:sp>
         <p:nvSpPr>
           <p:cNvPr id="2" name="Kicker"/>
@@ -9741,7 +9801,7 @@
           <a:noFill/>
         </p:spPr>
         <p:txBody>
-          <a:bodyPr wrap="square" lIns="0" rIns="0" tIns="0" bIns="0" anchor="t">
+          <a:bodyPr wrap="square" lIns="0" tIns="0" rIns="0" bIns="0" anchor="t">
             <a:spAutoFit/>
           </a:bodyPr>
           <a:lstStyle/>
@@ -9776,7 +9836,7 @@
           <a:noFill/>
         </p:spPr>
         <p:txBody>
-          <a:bodyPr wrap="square" lIns="0" rIns="0" tIns="0" bIns="0" anchor="t">
+          <a:bodyPr wrap="square" lIns="0" tIns="0" rIns="0" bIns="0" anchor="t">
             <a:spAutoFit/>
           </a:bodyPr>
           <a:lstStyle/>
@@ -9797,100 +9857,6 @@
       <p:pic>
         <p:nvPicPr>
           <p:cNvPr id="4" name="Picture 3" descr="nmims_logo.png"/>
-          <p:cNvPicPr>
-            <a:picLocks noChangeAspect="1"/>
-          </p:cNvPicPr>
-          <p:nvPr/>
-        </p:nvPicPr>
-        <p:blipFill>
-          <a:blip r:embed="rId2"/>
-          <a:stretch>
-            <a:fillRect/>
-          </a:stretch>
-        </p:blipFill>
-        <p:spPr>
-          <a:xfrm>
-            <a:off x="11109960" y="274320"/>
-            <a:ext cx="570527" cy="566928"/>
-          </a:xfrm>
-          <a:prstGeom prst="rect">
-            <a:avLst/>
-          </a:prstGeom>
-        </p:spPr>
-      </p:pic>
-      <p:sp>
-        <p:nvSpPr>
-          <p:cNvPr id="5" name="TextBox 4"/>
-          <p:cNvSpPr txBox="1"/>
-          <p:nvPr/>
-        </p:nvSpPr>
-        <p:spPr>
-          <a:xfrm>
-            <a:off x="548640" y="6446520"/>
-            <a:ext cx="5486400" cy="228600"/>
-          </a:xfrm>
-          <a:prstGeom prst="rect">
-            <a:avLst/>
-          </a:prstGeom>
-          <a:noFill/>
-        </p:spPr>
-        <p:txBody>
-          <a:bodyPr wrap="square" lIns="0" rIns="0" tIns="0" bIns="0" anchor="t">
-            <a:spAutoFit/>
-          </a:bodyPr>
-          <a:lstStyle/>
-          <a:p>
-            <a:pPr algn="l"/>
-            <a:r>
-              <a:rPr sz="900" b="0" i="0">
-                <a:solidFill>
-                  <a:srgbClr val="8A8F98"/>
-                </a:solidFill>
-                <a:latin typeface="Calibri"/>
-              </a:rPr>
-              <a:t>DemandIQ  |  NMIMS MPSTME  |  Machine Learning, Sem V</a:t>
-            </a:r>
-          </a:p>
-        </p:txBody>
-      </p:sp>
-      <p:sp>
-        <p:nvSpPr>
-          <p:cNvPr id="6" name="TextBox 5"/>
-          <p:cNvSpPr txBox="1"/>
-          <p:nvPr/>
-        </p:nvSpPr>
-        <p:spPr>
-          <a:xfrm>
-            <a:off x="11155680" y="6446520"/>
-            <a:ext cx="502920" cy="228600"/>
-          </a:xfrm>
-          <a:prstGeom prst="rect">
-            <a:avLst/>
-          </a:prstGeom>
-          <a:noFill/>
-        </p:spPr>
-        <p:txBody>
-          <a:bodyPr wrap="square" lIns="0" rIns="0" tIns="0" bIns="0" anchor="t">
-            <a:spAutoFit/>
-          </a:bodyPr>
-          <a:lstStyle/>
-          <a:p>
-            <a:pPr algn="r"/>
-            <a:r>
-              <a:rPr sz="900" b="0" i="0">
-                <a:solidFill>
-                  <a:srgbClr val="8A8F98"/>
-                </a:solidFill>
-                <a:latin typeface="Calibri"/>
-              </a:rPr>
-              <a:t>16</a:t>
-            </a:r>
-          </a:p>
-        </p:txBody>
-      </p:sp>
-      <p:pic>
-        <p:nvPicPr>
-          <p:cNvPr id="7" name="Picture 6" descr="fig19_shap_demand_global.png"/>
           <p:cNvPicPr>
             <a:picLocks noChangeAspect="1"/>
           </p:cNvPicPr>
@@ -9904,6 +9870,100 @@
         </p:blipFill>
         <p:spPr>
           <a:xfrm>
+            <a:off x="11109960" y="274320"/>
+            <a:ext cx="570527" cy="566928"/>
+          </a:xfrm>
+          <a:prstGeom prst="rect">
+            <a:avLst/>
+          </a:prstGeom>
+        </p:spPr>
+      </p:pic>
+      <p:sp>
+        <p:nvSpPr>
+          <p:cNvPr id="5" name="TextBox 4"/>
+          <p:cNvSpPr txBox="1"/>
+          <p:nvPr/>
+        </p:nvSpPr>
+        <p:spPr>
+          <a:xfrm>
+            <a:off x="548640" y="6446520"/>
+            <a:ext cx="5486400" cy="228600"/>
+          </a:xfrm>
+          <a:prstGeom prst="rect">
+            <a:avLst/>
+          </a:prstGeom>
+          <a:noFill/>
+        </p:spPr>
+        <p:txBody>
+          <a:bodyPr wrap="square" lIns="0" tIns="0" rIns="0" bIns="0" anchor="t">
+            <a:spAutoFit/>
+          </a:bodyPr>
+          <a:lstStyle/>
+          <a:p>
+            <a:pPr algn="l"/>
+            <a:r>
+              <a:rPr sz="900" b="0" i="0">
+                <a:solidFill>
+                  <a:srgbClr val="8A8F98"/>
+                </a:solidFill>
+                <a:latin typeface="Calibri"/>
+              </a:rPr>
+              <a:t>DemandIQ  |  NMIMS MPSTME  |  Machine Learning, Sem V</a:t>
+            </a:r>
+          </a:p>
+        </p:txBody>
+      </p:sp>
+      <p:sp>
+        <p:nvSpPr>
+          <p:cNvPr id="6" name="TextBox 5"/>
+          <p:cNvSpPr txBox="1"/>
+          <p:nvPr/>
+        </p:nvSpPr>
+        <p:spPr>
+          <a:xfrm>
+            <a:off x="11155680" y="6446520"/>
+            <a:ext cx="502920" cy="228600"/>
+          </a:xfrm>
+          <a:prstGeom prst="rect">
+            <a:avLst/>
+          </a:prstGeom>
+          <a:noFill/>
+        </p:spPr>
+        <p:txBody>
+          <a:bodyPr wrap="square" lIns="0" tIns="0" rIns="0" bIns="0" anchor="t">
+            <a:spAutoFit/>
+          </a:bodyPr>
+          <a:lstStyle/>
+          <a:p>
+            <a:pPr algn="r"/>
+            <a:r>
+              <a:rPr sz="900" b="0" i="0">
+                <a:solidFill>
+                  <a:srgbClr val="8A8F98"/>
+                </a:solidFill>
+                <a:latin typeface="Calibri"/>
+              </a:rPr>
+              <a:t>16</a:t>
+            </a:r>
+          </a:p>
+        </p:txBody>
+      </p:sp>
+      <p:pic>
+        <p:nvPicPr>
+          <p:cNvPr id="7" name="Picture 6" descr="fig19_shap_demand_global.png"/>
+          <p:cNvPicPr>
+            <a:picLocks noChangeAspect="1"/>
+          </p:cNvPicPr>
+          <p:nvPr/>
+        </p:nvPicPr>
+        <p:blipFill>
+          <a:blip r:embed="rId4"/>
+          <a:stretch>
+            <a:fillRect/>
+          </a:stretch>
+        </p:blipFill>
+        <p:spPr>
+          <a:xfrm>
             <a:off x="548640" y="1895095"/>
             <a:ext cx="4572000" cy="2610608"/>
           </a:xfrm>
@@ -9921,7 +9981,7 @@
           <p:nvPr/>
         </p:nvPicPr>
         <p:blipFill>
-          <a:blip r:embed="rId4"/>
+          <a:blip r:embed="rId5"/>
           <a:stretch>
             <a:fillRect/>
           </a:stretch>
@@ -9953,7 +10013,7 @@
           <a:noFill/>
         </p:spPr>
         <p:txBody>
-          <a:bodyPr wrap="square" lIns="0" rIns="0" tIns="0" bIns="0" anchor="t">
+          <a:bodyPr wrap="square" lIns="0" tIns="0" rIns="0" bIns="0" anchor="t">
             <a:spAutoFit/>
           </a:bodyPr>
           <a:lstStyle/>
@@ -9988,7 +10048,7 @@
           <a:noFill/>
         </p:spPr>
         <p:txBody>
-          <a:bodyPr wrap="square" lIns="0" rIns="0" tIns="0" bIns="0" anchor="t">
+          <a:bodyPr wrap="square" lIns="0" tIns="0" rIns="0" bIns="0" anchor="t">
             <a:spAutoFit/>
           </a:bodyPr>
           <a:lstStyle/>
@@ -10047,7 +10107,9 @@
         <p:txBody>
           <a:bodyPr rtlCol="0" anchor="ctr"/>
           <a:lstStyle/>
-          <a:p/>
+          <a:p>
+            <a:endParaRPr/>
+          </a:p>
         </p:txBody>
       </p:sp>
       <p:sp>
@@ -10067,7 +10129,7 @@
           <a:noFill/>
         </p:spPr>
         <p:txBody>
-          <a:bodyPr wrap="square" lIns="0" rIns="0" tIns="0" bIns="0" anchor="ctr">
+          <a:bodyPr wrap="square" lIns="0" tIns="0" rIns="0" bIns="0" anchor="ctr">
             <a:spAutoFit/>
           </a:bodyPr>
           <a:lstStyle/>
@@ -10103,7 +10165,7 @@
 </file>
 
 <file path=ppt/slides/slide17.xml><?xml version="1.0" encoding="utf-8"?>
-<p:sld xmlns:a="http://schemas.openxmlformats.org/drawingml/2006/main" xmlns:p="http://schemas.openxmlformats.org/presentationml/2006/main" xmlns:r="http://schemas.openxmlformats.org/officeDocument/2006/relationships">
+<p:sld xmlns:a="http://schemas.openxmlformats.org/drawingml/2006/main" xmlns:r="http://schemas.openxmlformats.org/officeDocument/2006/relationships" xmlns:p="http://schemas.openxmlformats.org/presentationml/2006/main">
   <p:cSld>
     <p:bg>
       <p:bgPr>
@@ -10119,7 +10181,14 @@
         <p:cNvGrpSpPr/>
         <p:nvPr/>
       </p:nvGrpSpPr>
-      <p:grpSpPr/>
+      <p:grpSpPr>
+        <a:xfrm>
+          <a:off x="0" y="0"/>
+          <a:ext cx="0" cy="0"/>
+          <a:chOff x="0" y="0"/>
+          <a:chExt cx="0" cy="0"/>
+        </a:xfrm>
+      </p:grpSpPr>
       <p:sp>
         <p:nvSpPr>
           <p:cNvPr id="2" name="Kicker"/>
@@ -10137,7 +10206,7 @@
           <a:noFill/>
         </p:spPr>
         <p:txBody>
-          <a:bodyPr wrap="square" lIns="0" rIns="0" tIns="0" bIns="0" anchor="t">
+          <a:bodyPr wrap="square" lIns="0" tIns="0" rIns="0" bIns="0" anchor="t">
             <a:spAutoFit/>
           </a:bodyPr>
           <a:lstStyle/>
@@ -10172,7 +10241,7 @@
           <a:noFill/>
         </p:spPr>
         <p:txBody>
-          <a:bodyPr wrap="square" lIns="0" rIns="0" tIns="0" bIns="0" anchor="t">
+          <a:bodyPr wrap="square" lIns="0" tIns="0" rIns="0" bIns="0" anchor="t">
             <a:spAutoFit/>
           </a:bodyPr>
           <a:lstStyle/>
@@ -10199,7 +10268,7 @@
           <p:nvPr/>
         </p:nvPicPr>
         <p:blipFill>
-          <a:blip r:embed="rId2"/>
+          <a:blip r:embed="rId3"/>
           <a:stretch>
             <a:fillRect/>
           </a:stretch>
@@ -10231,7 +10300,7 @@
           <a:noFill/>
         </p:spPr>
         <p:txBody>
-          <a:bodyPr wrap="square" lIns="0" rIns="0" tIns="0" bIns="0" anchor="t">
+          <a:bodyPr wrap="square" lIns="0" tIns="0" rIns="0" bIns="0" anchor="t">
             <a:spAutoFit/>
           </a:bodyPr>
           <a:lstStyle/>
@@ -10266,7 +10335,7 @@
           <a:noFill/>
         </p:spPr>
         <p:txBody>
-          <a:bodyPr wrap="square" lIns="0" rIns="0" tIns="0" bIns="0" anchor="t">
+          <a:bodyPr wrap="square" lIns="0" tIns="0" rIns="0" bIns="0" anchor="t">
             <a:spAutoFit/>
           </a:bodyPr>
           <a:lstStyle/>
@@ -10325,7 +10394,9 @@
         <p:txBody>
           <a:bodyPr rtlCol="0" anchor="ctr"/>
           <a:lstStyle/>
-          <a:p/>
+          <a:p>
+            <a:endParaRPr/>
+          </a:p>
         </p:txBody>
       </p:sp>
       <p:pic>
@@ -10337,7 +10408,7 @@
           <p:nvPr/>
         </p:nvPicPr>
         <p:blipFill>
-          <a:blip r:embed="rId3"/>
+          <a:blip r:embed="rId4"/>
           <a:stretch>
             <a:fillRect/>
           </a:stretch>
@@ -10393,7 +10464,9 @@
         <p:txBody>
           <a:bodyPr rtlCol="0" anchor="ctr"/>
           <a:lstStyle/>
-          <a:p/>
+          <a:p>
+            <a:endParaRPr/>
+          </a:p>
         </p:txBody>
       </p:sp>
       <p:pic>
@@ -10405,7 +10478,7 @@
           <p:nvPr/>
         </p:nvPicPr>
         <p:blipFill>
-          <a:blip r:embed="rId4"/>
+          <a:blip r:embed="rId5"/>
           <a:stretch>
             <a:fillRect/>
           </a:stretch>
@@ -10437,7 +10510,7 @@
           <a:noFill/>
         </p:spPr>
         <p:txBody>
-          <a:bodyPr wrap="square" lIns="0" rIns="0" tIns="0" bIns="0" anchor="t">
+          <a:bodyPr wrap="square" lIns="0" tIns="0" rIns="0" bIns="0" anchor="t">
             <a:spAutoFit/>
           </a:bodyPr>
           <a:lstStyle/>
@@ -10464,7 +10537,7 @@
 </file>
 
 <file path=ppt/slides/slide18.xml><?xml version="1.0" encoding="utf-8"?>
-<p:sld xmlns:a="http://schemas.openxmlformats.org/drawingml/2006/main" xmlns:p="http://schemas.openxmlformats.org/presentationml/2006/main" xmlns:r="http://schemas.openxmlformats.org/officeDocument/2006/relationships">
+<p:sld xmlns:a="http://schemas.openxmlformats.org/drawingml/2006/main" xmlns:r="http://schemas.openxmlformats.org/officeDocument/2006/relationships" xmlns:p="http://schemas.openxmlformats.org/presentationml/2006/main">
   <p:cSld>
     <p:bg>
       <p:bgPr>
@@ -10480,7 +10553,14 @@
         <p:cNvGrpSpPr/>
         <p:nvPr/>
       </p:nvGrpSpPr>
-      <p:grpSpPr/>
+      <p:grpSpPr>
+        <a:xfrm>
+          <a:off x="0" y="0"/>
+          <a:ext cx="0" cy="0"/>
+          <a:chOff x="0" y="0"/>
+          <a:chExt cx="0" cy="0"/>
+        </a:xfrm>
+      </p:grpSpPr>
       <p:sp>
         <p:nvSpPr>
           <p:cNvPr id="2" name="Kicker"/>
@@ -10498,7 +10578,7 @@
           <a:noFill/>
         </p:spPr>
         <p:txBody>
-          <a:bodyPr wrap="square" lIns="0" rIns="0" tIns="0" bIns="0" anchor="t">
+          <a:bodyPr wrap="square" lIns="0" tIns="0" rIns="0" bIns="0" anchor="t">
             <a:spAutoFit/>
           </a:bodyPr>
           <a:lstStyle/>
@@ -10533,7 +10613,7 @@
           <a:noFill/>
         </p:spPr>
         <p:txBody>
-          <a:bodyPr wrap="square" lIns="0" rIns="0" tIns="0" bIns="0" anchor="t">
+          <a:bodyPr wrap="square" lIns="0" tIns="0" rIns="0" bIns="0" anchor="t">
             <a:spAutoFit/>
           </a:bodyPr>
           <a:lstStyle/>
@@ -10560,7 +10640,7 @@
           <p:nvPr/>
         </p:nvPicPr>
         <p:blipFill>
-          <a:blip r:embed="rId2"/>
+          <a:blip r:embed="rId3"/>
           <a:stretch>
             <a:fillRect/>
           </a:stretch>
@@ -10592,7 +10672,7 @@
           <a:noFill/>
         </p:spPr>
         <p:txBody>
-          <a:bodyPr wrap="square" lIns="0" rIns="0" tIns="0" bIns="0" anchor="t">
+          <a:bodyPr wrap="square" lIns="0" tIns="0" rIns="0" bIns="0" anchor="t">
             <a:spAutoFit/>
           </a:bodyPr>
           <a:lstStyle/>
@@ -10627,7 +10707,7 @@
           <a:noFill/>
         </p:spPr>
         <p:txBody>
-          <a:bodyPr wrap="square" lIns="0" rIns="0" tIns="0" bIns="0" anchor="t">
+          <a:bodyPr wrap="square" lIns="0" tIns="0" rIns="0" bIns="0" anchor="t">
             <a:spAutoFit/>
           </a:bodyPr>
           <a:lstStyle/>
@@ -10686,7 +10766,9 @@
         <p:txBody>
           <a:bodyPr rtlCol="0" anchor="ctr"/>
           <a:lstStyle/>
-          <a:p/>
+          <a:p>
+            <a:endParaRPr/>
+          </a:p>
         </p:txBody>
       </p:sp>
       <p:sp>
@@ -10706,7 +10788,7 @@
           <a:noFill/>
         </p:spPr>
         <p:txBody>
-          <a:bodyPr wrap="square" lIns="0" rIns="0" tIns="0" bIns="0" anchor="t">
+          <a:bodyPr wrap="square" lIns="0" tIns="0" rIns="0" bIns="0" anchor="t">
             <a:spAutoFit/>
           </a:bodyPr>
           <a:lstStyle/>
@@ -10761,7 +10843,7 @@
           </a:fontRef>
         </p:style>
         <p:txBody>
-          <a:bodyPr rtlCol="0" anchor="ctr" lIns="0" rIns="0" tIns="0" bIns="0"/>
+          <a:bodyPr lIns="0" tIns="0" rIns="0" bIns="0" rtlCol="0" anchor="ctr"/>
           <a:lstStyle/>
           <a:p>
             <a:pPr algn="ctr"/>
@@ -10794,7 +10876,7 @@
           <a:noFill/>
         </p:spPr>
         <p:txBody>
-          <a:bodyPr wrap="square" lIns="0" rIns="0" tIns="0" bIns="0" anchor="t">
+          <a:bodyPr wrap="square" lIns="0" tIns="0" rIns="0" bIns="0" anchor="t">
             <a:spAutoFit/>
           </a:bodyPr>
           <a:lstStyle/>
@@ -10849,7 +10931,7 @@
           </a:fontRef>
         </p:style>
         <p:txBody>
-          <a:bodyPr rtlCol="0" anchor="ctr" lIns="0" rIns="0" tIns="0" bIns="0"/>
+          <a:bodyPr lIns="0" tIns="0" rIns="0" bIns="0" rtlCol="0" anchor="ctr"/>
           <a:lstStyle/>
           <a:p>
             <a:pPr algn="ctr"/>
@@ -10882,7 +10964,7 @@
           <a:noFill/>
         </p:spPr>
         <p:txBody>
-          <a:bodyPr wrap="square" lIns="0" rIns="0" tIns="0" bIns="0" anchor="t">
+          <a:bodyPr wrap="square" lIns="0" tIns="0" rIns="0" bIns="0" anchor="t">
             <a:spAutoFit/>
           </a:bodyPr>
           <a:lstStyle/>
@@ -10937,7 +11019,7 @@
           </a:fontRef>
         </p:style>
         <p:txBody>
-          <a:bodyPr rtlCol="0" anchor="ctr" lIns="0" rIns="0" tIns="0" bIns="0"/>
+          <a:bodyPr lIns="0" tIns="0" rIns="0" bIns="0" rtlCol="0" anchor="ctr"/>
           <a:lstStyle/>
           <a:p>
             <a:pPr algn="ctr"/>
@@ -10970,7 +11052,7 @@
           <a:noFill/>
         </p:spPr>
         <p:txBody>
-          <a:bodyPr wrap="square" lIns="0" rIns="0" tIns="0" bIns="0" anchor="t">
+          <a:bodyPr wrap="square" lIns="0" tIns="0" rIns="0" bIns="0" anchor="t">
             <a:spAutoFit/>
           </a:bodyPr>
           <a:lstStyle/>
@@ -11025,7 +11107,7 @@
           </a:fontRef>
         </p:style>
         <p:txBody>
-          <a:bodyPr rtlCol="0" anchor="ctr" lIns="0" rIns="0" tIns="0" bIns="0"/>
+          <a:bodyPr lIns="0" tIns="0" rIns="0" bIns="0" rtlCol="0" anchor="ctr"/>
           <a:lstStyle/>
           <a:p>
             <a:pPr algn="ctr"/>
@@ -11058,7 +11140,7 @@
           <a:noFill/>
         </p:spPr>
         <p:txBody>
-          <a:bodyPr wrap="square" lIns="0" rIns="0" tIns="0" bIns="0" anchor="t">
+          <a:bodyPr wrap="square" lIns="0" tIns="0" rIns="0" bIns="0" anchor="t">
             <a:spAutoFit/>
           </a:bodyPr>
           <a:lstStyle/>
@@ -11117,7 +11199,9 @@
         <p:txBody>
           <a:bodyPr rtlCol="0" anchor="ctr"/>
           <a:lstStyle/>
-          <a:p/>
+          <a:p>
+            <a:endParaRPr/>
+          </a:p>
         </p:txBody>
       </p:sp>
       <p:sp>
@@ -11137,7 +11221,7 @@
           <a:noFill/>
         </p:spPr>
         <p:txBody>
-          <a:bodyPr wrap="square" lIns="0" rIns="0" tIns="0" bIns="0" anchor="t">
+          <a:bodyPr wrap="square" lIns="0" tIns="0" rIns="0" bIns="0" anchor="t">
             <a:spAutoFit/>
           </a:bodyPr>
           <a:lstStyle/>
@@ -11192,7 +11276,7 @@
           </a:fontRef>
         </p:style>
         <p:txBody>
-          <a:bodyPr rtlCol="0" anchor="ctr" lIns="0" rIns="0" tIns="0" bIns="0"/>
+          <a:bodyPr lIns="0" tIns="0" rIns="0" bIns="0" rtlCol="0" anchor="ctr"/>
           <a:lstStyle/>
           <a:p>
             <a:pPr algn="ctr"/>
@@ -11225,7 +11309,7 @@
           <a:noFill/>
         </p:spPr>
         <p:txBody>
-          <a:bodyPr wrap="square" lIns="0" rIns="0" tIns="0" bIns="0" anchor="t">
+          <a:bodyPr wrap="square" lIns="0" tIns="0" rIns="0" bIns="0" anchor="t">
             <a:spAutoFit/>
           </a:bodyPr>
           <a:lstStyle/>
@@ -11280,7 +11364,7 @@
           </a:fontRef>
         </p:style>
         <p:txBody>
-          <a:bodyPr rtlCol="0" anchor="ctr" lIns="0" rIns="0" tIns="0" bIns="0"/>
+          <a:bodyPr lIns="0" tIns="0" rIns="0" bIns="0" rtlCol="0" anchor="ctr"/>
           <a:lstStyle/>
           <a:p>
             <a:pPr algn="ctr"/>
@@ -11313,7 +11397,7 @@
           <a:noFill/>
         </p:spPr>
         <p:txBody>
-          <a:bodyPr wrap="square" lIns="0" rIns="0" tIns="0" bIns="0" anchor="t">
+          <a:bodyPr wrap="square" lIns="0" tIns="0" rIns="0" bIns="0" anchor="t">
             <a:spAutoFit/>
           </a:bodyPr>
           <a:lstStyle/>
@@ -11368,7 +11452,7 @@
           </a:fontRef>
         </p:style>
         <p:txBody>
-          <a:bodyPr rtlCol="0" anchor="ctr" lIns="0" rIns="0" tIns="0" bIns="0"/>
+          <a:bodyPr lIns="0" tIns="0" rIns="0" bIns="0" rtlCol="0" anchor="ctr"/>
           <a:lstStyle/>
           <a:p>
             <a:pPr algn="ctr"/>
@@ -11401,7 +11485,7 @@
           <a:noFill/>
         </p:spPr>
         <p:txBody>
-          <a:bodyPr wrap="square" lIns="0" rIns="0" tIns="0" bIns="0" anchor="t">
+          <a:bodyPr wrap="square" lIns="0" tIns="0" rIns="0" bIns="0" anchor="t">
             <a:spAutoFit/>
           </a:bodyPr>
           <a:lstStyle/>
@@ -11456,7 +11540,7 @@
           </a:fontRef>
         </p:style>
         <p:txBody>
-          <a:bodyPr rtlCol="0" anchor="ctr" lIns="0" rIns="0" tIns="0" bIns="0"/>
+          <a:bodyPr lIns="0" tIns="0" rIns="0" bIns="0" rtlCol="0" anchor="ctr"/>
           <a:lstStyle/>
           <a:p>
             <a:pPr algn="ctr"/>
@@ -11489,7 +11573,7 @@
           <a:noFill/>
         </p:spPr>
         <p:txBody>
-          <a:bodyPr wrap="square" lIns="0" rIns="0" tIns="0" bIns="0" anchor="t">
+          <a:bodyPr wrap="square" lIns="0" tIns="0" rIns="0" bIns="0" anchor="t">
             <a:spAutoFit/>
           </a:bodyPr>
           <a:lstStyle/>
@@ -11516,7 +11600,7 @@
 </file>
 
 <file path=ppt/slides/slide19.xml><?xml version="1.0" encoding="utf-8"?>
-<p:sld xmlns:a="http://schemas.openxmlformats.org/drawingml/2006/main" xmlns:p="http://schemas.openxmlformats.org/presentationml/2006/main" xmlns:r="http://schemas.openxmlformats.org/officeDocument/2006/relationships">
+<p:sld xmlns:a="http://schemas.openxmlformats.org/drawingml/2006/main" xmlns:r="http://schemas.openxmlformats.org/officeDocument/2006/relationships" xmlns:p="http://schemas.openxmlformats.org/presentationml/2006/main">
   <p:cSld>
     <p:bg>
       <p:bgPr>
@@ -11532,7 +11616,14 @@
         <p:cNvGrpSpPr/>
         <p:nvPr/>
       </p:nvGrpSpPr>
-      <p:grpSpPr/>
+      <p:grpSpPr>
+        <a:xfrm>
+          <a:off x="0" y="0"/>
+          <a:ext cx="0" cy="0"/>
+          <a:chOff x="0" y="0"/>
+          <a:chExt cx="0" cy="0"/>
+        </a:xfrm>
+      </p:grpSpPr>
       <p:sp>
         <p:nvSpPr>
           <p:cNvPr id="2" name="TextBox 1"/>
@@ -11550,7 +11641,7 @@
           <a:noFill/>
         </p:spPr>
         <p:txBody>
-          <a:bodyPr wrap="square" lIns="0" rIns="0" tIns="0" bIns="0" anchor="t">
+          <a:bodyPr wrap="square" lIns="0" tIns="0" rIns="0" bIns="0" anchor="t">
             <a:spAutoFit/>
           </a:bodyPr>
           <a:lstStyle/>
@@ -11585,7 +11676,7 @@
           <a:noFill/>
         </p:spPr>
         <p:txBody>
-          <a:bodyPr wrap="square" lIns="0" rIns="0" tIns="0" bIns="0" anchor="t">
+          <a:bodyPr wrap="square" lIns="0" tIns="0" rIns="0" bIns="0" anchor="t">
             <a:spAutoFit/>
           </a:bodyPr>
           <a:lstStyle/>
@@ -11644,7 +11735,9 @@
         <p:txBody>
           <a:bodyPr rtlCol="0" anchor="ctr"/>
           <a:lstStyle/>
-          <a:p/>
+          <a:p>
+            <a:endParaRPr/>
+          </a:p>
         </p:txBody>
       </p:sp>
       <p:sp>
@@ -11664,7 +11757,7 @@
           <a:noFill/>
         </p:spPr>
         <p:txBody>
-          <a:bodyPr wrap="square" lIns="0" rIns="0" tIns="0" bIns="0" anchor="t">
+          <a:bodyPr wrap="square" lIns="0" tIns="0" rIns="0" bIns="0" anchor="t">
             <a:spAutoFit/>
           </a:bodyPr>
           <a:lstStyle/>
@@ -11699,7 +11792,7 @@
           <a:noFill/>
         </p:spPr>
         <p:txBody>
-          <a:bodyPr wrap="square" lIns="0" rIns="0" tIns="0" bIns="0" anchor="t">
+          <a:bodyPr wrap="square" lIns="0" tIns="0" rIns="0" bIns="0" anchor="t">
             <a:spAutoFit/>
           </a:bodyPr>
           <a:lstStyle/>
@@ -11758,7 +11851,9 @@
         <p:txBody>
           <a:bodyPr rtlCol="0" anchor="ctr"/>
           <a:lstStyle/>
-          <a:p/>
+          <a:p>
+            <a:endParaRPr/>
+          </a:p>
         </p:txBody>
       </p:sp>
       <p:sp>
@@ -11778,7 +11873,7 @@
           <a:noFill/>
         </p:spPr>
         <p:txBody>
-          <a:bodyPr wrap="square" lIns="0" rIns="0" tIns="0" bIns="0" anchor="t">
+          <a:bodyPr wrap="square" lIns="0" tIns="0" rIns="0" bIns="0" anchor="t">
             <a:spAutoFit/>
           </a:bodyPr>
           <a:lstStyle/>
@@ -11813,7 +11908,7 @@
           <a:noFill/>
         </p:spPr>
         <p:txBody>
-          <a:bodyPr wrap="square" lIns="0" rIns="0" tIns="0" bIns="0" anchor="t">
+          <a:bodyPr wrap="square" lIns="0" tIns="0" rIns="0" bIns="0" anchor="t">
             <a:spAutoFit/>
           </a:bodyPr>
           <a:lstStyle/>
@@ -11872,7 +11967,9 @@
         <p:txBody>
           <a:bodyPr rtlCol="0" anchor="ctr"/>
           <a:lstStyle/>
-          <a:p/>
+          <a:p>
+            <a:endParaRPr/>
+          </a:p>
         </p:txBody>
       </p:sp>
       <p:sp>
@@ -11892,7 +11989,7 @@
           <a:noFill/>
         </p:spPr>
         <p:txBody>
-          <a:bodyPr wrap="square" lIns="0" rIns="0" tIns="0" bIns="0" anchor="t">
+          <a:bodyPr wrap="square" lIns="0" tIns="0" rIns="0" bIns="0" anchor="t">
             <a:spAutoFit/>
           </a:bodyPr>
           <a:lstStyle/>
@@ -11927,7 +12024,7 @@
           <a:noFill/>
         </p:spPr>
         <p:txBody>
-          <a:bodyPr wrap="square" lIns="0" rIns="0" tIns="0" bIns="0" anchor="t">
+          <a:bodyPr wrap="square" lIns="0" tIns="0" rIns="0" bIns="0" anchor="t">
             <a:spAutoFit/>
           </a:bodyPr>
           <a:lstStyle/>
@@ -11986,7 +12083,9 @@
         <p:txBody>
           <a:bodyPr rtlCol="0" anchor="ctr"/>
           <a:lstStyle/>
-          <a:p/>
+          <a:p>
+            <a:endParaRPr/>
+          </a:p>
         </p:txBody>
       </p:sp>
       <p:sp>
@@ -12006,7 +12105,7 @@
           <a:noFill/>
         </p:spPr>
         <p:txBody>
-          <a:bodyPr wrap="square" lIns="0" rIns="0" tIns="0" bIns="0" anchor="t">
+          <a:bodyPr wrap="square" lIns="0" tIns="0" rIns="0" bIns="0" anchor="t">
             <a:spAutoFit/>
           </a:bodyPr>
           <a:lstStyle/>
@@ -12041,7 +12140,7 @@
           <a:noFill/>
         </p:spPr>
         <p:txBody>
-          <a:bodyPr wrap="square" lIns="0" rIns="0" tIns="0" bIns="0" anchor="t">
+          <a:bodyPr wrap="square" lIns="0" tIns="0" rIns="0" bIns="0" anchor="t">
             <a:spAutoFit/>
           </a:bodyPr>
           <a:lstStyle/>
@@ -12076,7 +12175,7 @@
           <a:noFill/>
         </p:spPr>
         <p:txBody>
-          <a:bodyPr wrap="square" lIns="0" rIns="0" tIns="0" bIns="0" anchor="t">
+          <a:bodyPr wrap="square" lIns="0" tIns="0" rIns="0" bIns="0" anchor="t">
             <a:spAutoFit/>
           </a:bodyPr>
           <a:lstStyle/>
@@ -12111,7 +12210,7 @@
           <a:noFill/>
         </p:spPr>
         <p:txBody>
-          <a:bodyPr wrap="square" lIns="0" rIns="0" tIns="0" bIns="0" anchor="t">
+          <a:bodyPr wrap="square" lIns="0" tIns="0" rIns="0" bIns="0" anchor="t">
             <a:spAutoFit/>
           </a:bodyPr>
           <a:lstStyle/>
@@ -12146,7 +12245,7 @@
           <a:noFill/>
         </p:spPr>
         <p:txBody>
-          <a:bodyPr wrap="square" lIns="0" rIns="0" tIns="0" bIns="0" anchor="t">
+          <a:bodyPr wrap="square" lIns="0" tIns="0" rIns="0" bIns="0" anchor="t">
             <a:spAutoFit/>
           </a:bodyPr>
           <a:lstStyle/>
@@ -12173,7 +12272,7 @@
 </file>
 
 <file path=ppt/slides/slide2.xml><?xml version="1.0" encoding="utf-8"?>
-<p:sld xmlns:a="http://schemas.openxmlformats.org/drawingml/2006/main" xmlns:p="http://schemas.openxmlformats.org/presentationml/2006/main" xmlns:r="http://schemas.openxmlformats.org/officeDocument/2006/relationships">
+<p:sld xmlns:a="http://schemas.openxmlformats.org/drawingml/2006/main" xmlns:r="http://schemas.openxmlformats.org/officeDocument/2006/relationships" xmlns:p="http://schemas.openxmlformats.org/presentationml/2006/main">
   <p:cSld>
     <p:bg>
       <p:bgPr>
@@ -12189,7 +12288,14 @@
         <p:cNvGrpSpPr/>
         <p:nvPr/>
       </p:nvGrpSpPr>
-      <p:grpSpPr/>
+      <p:grpSpPr>
+        <a:xfrm>
+          <a:off x="0" y="0"/>
+          <a:ext cx="0" cy="0"/>
+          <a:chOff x="0" y="0"/>
+          <a:chExt cx="0" cy="0"/>
+        </a:xfrm>
+      </p:grpSpPr>
       <p:sp>
         <p:nvSpPr>
           <p:cNvPr id="2" name="Kicker"/>
@@ -12207,7 +12313,7 @@
           <a:noFill/>
         </p:spPr>
         <p:txBody>
-          <a:bodyPr wrap="square" lIns="0" rIns="0" tIns="0" bIns="0" anchor="t">
+          <a:bodyPr wrap="square" lIns="0" tIns="0" rIns="0" bIns="0" anchor="t">
             <a:spAutoFit/>
           </a:bodyPr>
           <a:lstStyle/>
@@ -12242,7 +12348,7 @@
           <a:noFill/>
         </p:spPr>
         <p:txBody>
-          <a:bodyPr wrap="square" lIns="0" rIns="0" tIns="0" bIns="0" anchor="t">
+          <a:bodyPr wrap="square" lIns="0" tIns="0" rIns="0" bIns="0" anchor="t">
             <a:spAutoFit/>
           </a:bodyPr>
           <a:lstStyle/>
@@ -12269,7 +12375,7 @@
           <p:nvPr/>
         </p:nvPicPr>
         <p:blipFill>
-          <a:blip r:embed="rId2"/>
+          <a:blip r:embed="rId3"/>
           <a:stretch>
             <a:fillRect/>
           </a:stretch>
@@ -12301,7 +12407,7 @@
           <a:noFill/>
         </p:spPr>
         <p:txBody>
-          <a:bodyPr wrap="square" lIns="0" rIns="0" tIns="0" bIns="0" anchor="t">
+          <a:bodyPr wrap="square" lIns="0" tIns="0" rIns="0" bIns="0" anchor="t">
             <a:spAutoFit/>
           </a:bodyPr>
           <a:lstStyle/>
@@ -12336,7 +12442,7 @@
           <a:noFill/>
         </p:spPr>
         <p:txBody>
-          <a:bodyPr wrap="square" lIns="0" rIns="0" tIns="0" bIns="0" anchor="t">
+          <a:bodyPr wrap="square" lIns="0" tIns="0" rIns="0" bIns="0" anchor="t">
             <a:spAutoFit/>
           </a:bodyPr>
           <a:lstStyle/>
@@ -12395,7 +12501,9 @@
         <p:txBody>
           <a:bodyPr rtlCol="0" anchor="ctr"/>
           <a:lstStyle/>
-          <a:p/>
+          <a:p>
+            <a:endParaRPr/>
+          </a:p>
         </p:txBody>
       </p:sp>
       <p:sp>
@@ -12435,7 +12543,7 @@
           </a:fontRef>
         </p:style>
         <p:txBody>
-          <a:bodyPr rtlCol="0" anchor="ctr" lIns="0" rIns="0" tIns="0" bIns="0"/>
+          <a:bodyPr lIns="0" tIns="0" rIns="0" bIns="0" rtlCol="0" anchor="ctr"/>
           <a:lstStyle/>
           <a:p>
             <a:pPr algn="ctr"/>
@@ -12468,7 +12576,7 @@
           <a:noFill/>
         </p:spPr>
         <p:txBody>
-          <a:bodyPr wrap="square" lIns="0" rIns="0" tIns="0" bIns="0" anchor="t">
+          <a:bodyPr wrap="square" lIns="0" tIns="0" rIns="0" bIns="0" anchor="t">
             <a:spAutoFit/>
           </a:bodyPr>
           <a:lstStyle/>
@@ -12503,7 +12611,7 @@
           <a:noFill/>
         </p:spPr>
         <p:txBody>
-          <a:bodyPr wrap="square" lIns="0" rIns="0" tIns="0" bIns="0" anchor="t">
+          <a:bodyPr wrap="square" lIns="0" tIns="0" rIns="0" bIns="0" anchor="t">
             <a:spAutoFit/>
           </a:bodyPr>
           <a:lstStyle/>
@@ -12598,7 +12706,9 @@
         <p:txBody>
           <a:bodyPr rtlCol="0" anchor="ctr"/>
           <a:lstStyle/>
-          <a:p/>
+          <a:p>
+            <a:endParaRPr/>
+          </a:p>
         </p:txBody>
       </p:sp>
       <p:sp>
@@ -12638,7 +12748,7 @@
           </a:fontRef>
         </p:style>
         <p:txBody>
-          <a:bodyPr rtlCol="0" anchor="ctr" lIns="0" rIns="0" tIns="0" bIns="0"/>
+          <a:bodyPr lIns="0" tIns="0" rIns="0" bIns="0" rtlCol="0" anchor="ctr"/>
           <a:lstStyle/>
           <a:p>
             <a:pPr algn="ctr"/>
@@ -12671,7 +12781,7 @@
           <a:noFill/>
         </p:spPr>
         <p:txBody>
-          <a:bodyPr wrap="square" lIns="0" rIns="0" tIns="0" bIns="0" anchor="t">
+          <a:bodyPr wrap="square" lIns="0" tIns="0" rIns="0" bIns="0" anchor="t">
             <a:spAutoFit/>
           </a:bodyPr>
           <a:lstStyle/>
@@ -12706,7 +12816,7 @@
           <a:noFill/>
         </p:spPr>
         <p:txBody>
-          <a:bodyPr wrap="square" lIns="0" rIns="0" tIns="0" bIns="0" anchor="t">
+          <a:bodyPr wrap="square" lIns="0" tIns="0" rIns="0" bIns="0" anchor="t">
             <a:spAutoFit/>
           </a:bodyPr>
           <a:lstStyle/>
@@ -12801,7 +12911,9 @@
         <p:txBody>
           <a:bodyPr rtlCol="0" anchor="ctr"/>
           <a:lstStyle/>
-          <a:p/>
+          <a:p>
+            <a:endParaRPr/>
+          </a:p>
         </p:txBody>
       </p:sp>
       <p:sp>
@@ -12821,7 +12933,7 @@
           <a:noFill/>
         </p:spPr>
         <p:txBody>
-          <a:bodyPr wrap="square" lIns="0" rIns="0" tIns="0" bIns="0" anchor="t">
+          <a:bodyPr wrap="square" lIns="0" tIns="0" rIns="0" bIns="0" anchor="t">
             <a:spAutoFit/>
           </a:bodyPr>
           <a:lstStyle/>
@@ -12856,7 +12968,7 @@
           <a:noFill/>
         </p:spPr>
         <p:txBody>
-          <a:bodyPr wrap="square" lIns="0" rIns="0" tIns="0" bIns="0" anchor="t">
+          <a:bodyPr wrap="square" lIns="0" tIns="0" rIns="0" bIns="0" anchor="t">
             <a:spAutoFit/>
           </a:bodyPr>
           <a:lstStyle/>
@@ -12891,7 +13003,7 @@
           <a:noFill/>
         </p:spPr>
         <p:txBody>
-          <a:bodyPr wrap="square" lIns="0" rIns="0" tIns="0" bIns="0" anchor="t">
+          <a:bodyPr wrap="square" lIns="0" tIns="0" rIns="0" bIns="0" anchor="t">
             <a:spAutoFit/>
           </a:bodyPr>
           <a:lstStyle/>
@@ -12952,7 +13064,9 @@
         <p:txBody>
           <a:bodyPr rtlCol="0" anchor="ctr"/>
           <a:lstStyle/>
-          <a:p/>
+          <a:p>
+            <a:endParaRPr/>
+          </a:p>
         </p:txBody>
       </p:sp>
       <p:sp>
@@ -12972,7 +13086,7 @@
           <a:noFill/>
         </p:spPr>
         <p:txBody>
-          <a:bodyPr wrap="square" lIns="0" rIns="0" tIns="0" bIns="0" anchor="ctr">
+          <a:bodyPr wrap="square" lIns="0" tIns="0" rIns="0" bIns="0" anchor="ctr">
             <a:spAutoFit/>
           </a:bodyPr>
           <a:lstStyle/>
@@ -13008,7 +13122,7 @@
 </file>
 
 <file path=ppt/slides/slide3.xml><?xml version="1.0" encoding="utf-8"?>
-<p:sld xmlns:a="http://schemas.openxmlformats.org/drawingml/2006/main" xmlns:p="http://schemas.openxmlformats.org/presentationml/2006/main" xmlns:r="http://schemas.openxmlformats.org/officeDocument/2006/relationships">
+<p:sld xmlns:a="http://schemas.openxmlformats.org/drawingml/2006/main" xmlns:r="http://schemas.openxmlformats.org/officeDocument/2006/relationships" xmlns:p="http://schemas.openxmlformats.org/presentationml/2006/main">
   <p:cSld>
     <p:bg>
       <p:bgPr>
@@ -13024,7 +13138,14 @@
         <p:cNvGrpSpPr/>
         <p:nvPr/>
       </p:nvGrpSpPr>
-      <p:grpSpPr/>
+      <p:grpSpPr>
+        <a:xfrm>
+          <a:off x="0" y="0"/>
+          <a:ext cx="0" cy="0"/>
+          <a:chOff x="0" y="0"/>
+          <a:chExt cx="0" cy="0"/>
+        </a:xfrm>
+      </p:grpSpPr>
       <p:sp>
         <p:nvSpPr>
           <p:cNvPr id="2" name="Kicker"/>
@@ -13042,7 +13163,7 @@
           <a:noFill/>
         </p:spPr>
         <p:txBody>
-          <a:bodyPr wrap="square" lIns="0" rIns="0" tIns="0" bIns="0" anchor="t">
+          <a:bodyPr wrap="square" lIns="0" tIns="0" rIns="0" bIns="0" anchor="t">
             <a:spAutoFit/>
           </a:bodyPr>
           <a:lstStyle/>
@@ -13077,7 +13198,7 @@
           <a:noFill/>
         </p:spPr>
         <p:txBody>
-          <a:bodyPr wrap="square" lIns="0" rIns="0" tIns="0" bIns="0" anchor="t">
+          <a:bodyPr wrap="square" lIns="0" tIns="0" rIns="0" bIns="0" anchor="t">
             <a:spAutoFit/>
           </a:bodyPr>
           <a:lstStyle/>
@@ -13104,7 +13225,7 @@
           <p:nvPr/>
         </p:nvPicPr>
         <p:blipFill>
-          <a:blip r:embed="rId2"/>
+          <a:blip r:embed="rId3"/>
           <a:stretch>
             <a:fillRect/>
           </a:stretch>
@@ -13136,7 +13257,7 @@
           <a:noFill/>
         </p:spPr>
         <p:txBody>
-          <a:bodyPr wrap="square" lIns="0" rIns="0" tIns="0" bIns="0" anchor="t">
+          <a:bodyPr wrap="square" lIns="0" tIns="0" rIns="0" bIns="0" anchor="t">
             <a:spAutoFit/>
           </a:bodyPr>
           <a:lstStyle/>
@@ -13171,7 +13292,7 @@
           <a:noFill/>
         </p:spPr>
         <p:txBody>
-          <a:bodyPr wrap="square" lIns="0" rIns="0" tIns="0" bIns="0" anchor="t">
+          <a:bodyPr wrap="square" lIns="0" tIns="0" rIns="0" bIns="0" anchor="t">
             <a:spAutoFit/>
           </a:bodyPr>
           <a:lstStyle/>
@@ -13230,7 +13351,9 @@
         <p:txBody>
           <a:bodyPr rtlCol="0" anchor="ctr"/>
           <a:lstStyle/>
-          <a:p/>
+          <a:p>
+            <a:endParaRPr/>
+          </a:p>
         </p:txBody>
       </p:sp>
       <p:sp>
@@ -13270,7 +13393,7 @@
           </a:fontRef>
         </p:style>
         <p:txBody>
-          <a:bodyPr rtlCol="0" anchor="ctr" lIns="0" rIns="0" tIns="0" bIns="0"/>
+          <a:bodyPr lIns="0" tIns="0" rIns="0" bIns="0" rtlCol="0" anchor="ctr"/>
           <a:lstStyle/>
           <a:p>
             <a:pPr algn="ctr"/>
@@ -13303,7 +13426,7 @@
           <a:noFill/>
         </p:spPr>
         <p:txBody>
-          <a:bodyPr wrap="square" lIns="0" rIns="0" tIns="0" bIns="0" anchor="t">
+          <a:bodyPr wrap="square" lIns="0" tIns="0" rIns="0" bIns="0" anchor="t">
             <a:spAutoFit/>
           </a:bodyPr>
           <a:lstStyle/>
@@ -13338,7 +13461,7 @@
           <a:noFill/>
         </p:spPr>
         <p:txBody>
-          <a:bodyPr wrap="square" lIns="0" rIns="0" tIns="0" bIns="0" anchor="t">
+          <a:bodyPr wrap="square" lIns="0" tIns="0" rIns="0" bIns="0" anchor="t">
             <a:spAutoFit/>
           </a:bodyPr>
           <a:lstStyle/>
@@ -13397,7 +13520,9 @@
         <p:txBody>
           <a:bodyPr rtlCol="0" anchor="ctr"/>
           <a:lstStyle/>
-          <a:p/>
+          <a:p>
+            <a:endParaRPr/>
+          </a:p>
         </p:txBody>
       </p:sp>
       <p:sp>
@@ -13417,7 +13542,7 @@
           <a:noFill/>
         </p:spPr>
         <p:txBody>
-          <a:bodyPr wrap="square" lIns="0" rIns="0" tIns="0" bIns="0" anchor="ctr">
+          <a:bodyPr wrap="square" lIns="0" tIns="0" rIns="0" bIns="0" anchor="ctr">
             <a:spAutoFit/>
           </a:bodyPr>
           <a:lstStyle/>
@@ -13476,7 +13601,9 @@
         <p:txBody>
           <a:bodyPr rtlCol="0" anchor="ctr"/>
           <a:lstStyle/>
-          <a:p/>
+          <a:p>
+            <a:endParaRPr/>
+          </a:p>
         </p:txBody>
       </p:sp>
       <p:sp>
@@ -13516,7 +13643,7 @@
           </a:fontRef>
         </p:style>
         <p:txBody>
-          <a:bodyPr rtlCol="0" anchor="ctr" lIns="0" rIns="0" tIns="0" bIns="0"/>
+          <a:bodyPr lIns="0" tIns="0" rIns="0" bIns="0" rtlCol="0" anchor="ctr"/>
           <a:lstStyle/>
           <a:p>
             <a:pPr algn="ctr"/>
@@ -13549,7 +13676,7 @@
           <a:noFill/>
         </p:spPr>
         <p:txBody>
-          <a:bodyPr wrap="square" lIns="0" rIns="0" tIns="0" bIns="0" anchor="t">
+          <a:bodyPr wrap="square" lIns="0" tIns="0" rIns="0" bIns="0" anchor="t">
             <a:spAutoFit/>
           </a:bodyPr>
           <a:lstStyle/>
@@ -13584,7 +13711,7 @@
           <a:noFill/>
         </p:spPr>
         <p:txBody>
-          <a:bodyPr wrap="square" lIns="0" rIns="0" tIns="0" bIns="0" anchor="t">
+          <a:bodyPr wrap="square" lIns="0" tIns="0" rIns="0" bIns="0" anchor="t">
             <a:spAutoFit/>
           </a:bodyPr>
           <a:lstStyle/>
@@ -13643,7 +13770,9 @@
         <p:txBody>
           <a:bodyPr rtlCol="0" anchor="ctr"/>
           <a:lstStyle/>
-          <a:p/>
+          <a:p>
+            <a:endParaRPr/>
+          </a:p>
         </p:txBody>
       </p:sp>
       <p:sp>
@@ -13663,7 +13792,7 @@
           <a:noFill/>
         </p:spPr>
         <p:txBody>
-          <a:bodyPr wrap="square" lIns="0" rIns="0" tIns="0" bIns="0" anchor="ctr">
+          <a:bodyPr wrap="square" lIns="0" tIns="0" rIns="0" bIns="0" anchor="ctr">
             <a:spAutoFit/>
           </a:bodyPr>
           <a:lstStyle/>
@@ -13722,7 +13851,9 @@
         <p:txBody>
           <a:bodyPr rtlCol="0" anchor="ctr"/>
           <a:lstStyle/>
-          <a:p/>
+          <a:p>
+            <a:endParaRPr/>
+          </a:p>
         </p:txBody>
       </p:sp>
       <p:sp>
@@ -13762,7 +13893,7 @@
           </a:fontRef>
         </p:style>
         <p:txBody>
-          <a:bodyPr rtlCol="0" anchor="ctr" lIns="0" rIns="0" tIns="0" bIns="0"/>
+          <a:bodyPr lIns="0" tIns="0" rIns="0" bIns="0" rtlCol="0" anchor="ctr"/>
           <a:lstStyle/>
           <a:p>
             <a:pPr algn="ctr"/>
@@ -13795,7 +13926,7 @@
           <a:noFill/>
         </p:spPr>
         <p:txBody>
-          <a:bodyPr wrap="square" lIns="0" rIns="0" tIns="0" bIns="0" anchor="t">
+          <a:bodyPr wrap="square" lIns="0" tIns="0" rIns="0" bIns="0" anchor="t">
             <a:spAutoFit/>
           </a:bodyPr>
           <a:lstStyle/>
@@ -13830,7 +13961,7 @@
           <a:noFill/>
         </p:spPr>
         <p:txBody>
-          <a:bodyPr wrap="square" lIns="0" rIns="0" tIns="0" bIns="0" anchor="t">
+          <a:bodyPr wrap="square" lIns="0" tIns="0" rIns="0" bIns="0" anchor="t">
             <a:spAutoFit/>
           </a:bodyPr>
           <a:lstStyle/>
@@ -13889,7 +14020,9 @@
         <p:txBody>
           <a:bodyPr rtlCol="0" anchor="ctr"/>
           <a:lstStyle/>
-          <a:p/>
+          <a:p>
+            <a:endParaRPr/>
+          </a:p>
         </p:txBody>
       </p:sp>
       <p:sp>
@@ -13909,7 +14042,7 @@
           <a:noFill/>
         </p:spPr>
         <p:txBody>
-          <a:bodyPr wrap="square" lIns="0" rIns="0" tIns="0" bIns="0" anchor="ctr">
+          <a:bodyPr wrap="square" lIns="0" tIns="0" rIns="0" bIns="0" anchor="ctr">
             <a:spAutoFit/>
           </a:bodyPr>
           <a:lstStyle/>
@@ -13968,7 +14101,9 @@
         <p:txBody>
           <a:bodyPr rtlCol="0" anchor="ctr"/>
           <a:lstStyle/>
-          <a:p/>
+          <a:p>
+            <a:endParaRPr/>
+          </a:p>
         </p:txBody>
       </p:sp>
       <p:sp>
@@ -14008,7 +14143,7 @@
           </a:fontRef>
         </p:style>
         <p:txBody>
-          <a:bodyPr rtlCol="0" anchor="ctr" lIns="0" rIns="0" tIns="0" bIns="0"/>
+          <a:bodyPr lIns="0" tIns="0" rIns="0" bIns="0" rtlCol="0" anchor="ctr"/>
           <a:lstStyle/>
           <a:p>
             <a:pPr algn="ctr"/>
@@ -14041,7 +14176,7 @@
           <a:noFill/>
         </p:spPr>
         <p:txBody>
-          <a:bodyPr wrap="square" lIns="0" rIns="0" tIns="0" bIns="0" anchor="t">
+          <a:bodyPr wrap="square" lIns="0" tIns="0" rIns="0" bIns="0" anchor="t">
             <a:spAutoFit/>
           </a:bodyPr>
           <a:lstStyle/>
@@ -14076,7 +14211,7 @@
           <a:noFill/>
         </p:spPr>
         <p:txBody>
-          <a:bodyPr wrap="square" lIns="0" rIns="0" tIns="0" bIns="0" anchor="t">
+          <a:bodyPr wrap="square" lIns="0" tIns="0" rIns="0" bIns="0" anchor="t">
             <a:spAutoFit/>
           </a:bodyPr>
           <a:lstStyle/>
@@ -14135,7 +14270,9 @@
         <p:txBody>
           <a:bodyPr rtlCol="0" anchor="ctr"/>
           <a:lstStyle/>
-          <a:p/>
+          <a:p>
+            <a:endParaRPr/>
+          </a:p>
         </p:txBody>
       </p:sp>
       <p:sp>
@@ -14155,7 +14292,7 @@
           <a:noFill/>
         </p:spPr>
         <p:txBody>
-          <a:bodyPr wrap="square" lIns="0" rIns="0" tIns="0" bIns="0" anchor="ctr">
+          <a:bodyPr wrap="square" lIns="0" tIns="0" rIns="0" bIns="0" anchor="ctr">
             <a:spAutoFit/>
           </a:bodyPr>
           <a:lstStyle/>
@@ -14190,7 +14327,7 @@
           <a:noFill/>
         </p:spPr>
         <p:txBody>
-          <a:bodyPr wrap="square" lIns="0" rIns="0" tIns="0" bIns="0" anchor="t">
+          <a:bodyPr wrap="square" lIns="0" tIns="0" rIns="0" bIns="0" anchor="t">
             <a:spAutoFit/>
           </a:bodyPr>
           <a:lstStyle/>
@@ -14217,7 +14354,7 @@
 </file>
 
 <file path=ppt/slides/slide4.xml><?xml version="1.0" encoding="utf-8"?>
-<p:sld xmlns:a="http://schemas.openxmlformats.org/drawingml/2006/main" xmlns:p="http://schemas.openxmlformats.org/presentationml/2006/main" xmlns:r="http://schemas.openxmlformats.org/officeDocument/2006/relationships">
+<p:sld xmlns:a="http://schemas.openxmlformats.org/drawingml/2006/main" xmlns:r="http://schemas.openxmlformats.org/officeDocument/2006/relationships" xmlns:p="http://schemas.openxmlformats.org/presentationml/2006/main">
   <p:cSld>
     <p:bg>
       <p:bgPr>
@@ -14233,7 +14370,14 @@
         <p:cNvGrpSpPr/>
         <p:nvPr/>
       </p:nvGrpSpPr>
-      <p:grpSpPr/>
+      <p:grpSpPr>
+        <a:xfrm>
+          <a:off x="0" y="0"/>
+          <a:ext cx="0" cy="0"/>
+          <a:chOff x="0" y="0"/>
+          <a:chExt cx="0" cy="0"/>
+        </a:xfrm>
+      </p:grpSpPr>
       <p:sp>
         <p:nvSpPr>
           <p:cNvPr id="2" name="Kicker"/>
@@ -14251,7 +14395,7 @@
           <a:noFill/>
         </p:spPr>
         <p:txBody>
-          <a:bodyPr wrap="square" lIns="0" rIns="0" tIns="0" bIns="0" anchor="t">
+          <a:bodyPr wrap="square" lIns="0" tIns="0" rIns="0" bIns="0" anchor="t">
             <a:spAutoFit/>
           </a:bodyPr>
           <a:lstStyle/>
@@ -14286,7 +14430,7 @@
           <a:noFill/>
         </p:spPr>
         <p:txBody>
-          <a:bodyPr wrap="square" lIns="0" rIns="0" tIns="0" bIns="0" anchor="t">
+          <a:bodyPr wrap="square" lIns="0" tIns="0" rIns="0" bIns="0" anchor="t">
             <a:spAutoFit/>
           </a:bodyPr>
           <a:lstStyle/>
@@ -14313,7 +14457,7 @@
           <p:nvPr/>
         </p:nvPicPr>
         <p:blipFill>
-          <a:blip r:embed="rId2"/>
+          <a:blip r:embed="rId3"/>
           <a:stretch>
             <a:fillRect/>
           </a:stretch>
@@ -14345,7 +14489,7 @@
           <a:noFill/>
         </p:spPr>
         <p:txBody>
-          <a:bodyPr wrap="square" lIns="0" rIns="0" tIns="0" bIns="0" anchor="t">
+          <a:bodyPr wrap="square" lIns="0" tIns="0" rIns="0" bIns="0" anchor="t">
             <a:spAutoFit/>
           </a:bodyPr>
           <a:lstStyle/>
@@ -14380,7 +14524,7 @@
           <a:noFill/>
         </p:spPr>
         <p:txBody>
-          <a:bodyPr wrap="square" lIns="0" rIns="0" tIns="0" bIns="0" anchor="t">
+          <a:bodyPr wrap="square" lIns="0" tIns="0" rIns="0" bIns="0" anchor="t">
             <a:spAutoFit/>
           </a:bodyPr>
           <a:lstStyle/>
@@ -14439,7 +14583,9 @@
         <p:txBody>
           <a:bodyPr rtlCol="0" anchor="ctr"/>
           <a:lstStyle/>
-          <a:p/>
+          <a:p>
+            <a:endParaRPr/>
+          </a:p>
         </p:txBody>
       </p:sp>
       <p:sp>
@@ -14459,7 +14605,7 @@
           <a:noFill/>
         </p:spPr>
         <p:txBody>
-          <a:bodyPr wrap="square" lIns="0" rIns="0" tIns="0" bIns="0" anchor="t">
+          <a:bodyPr wrap="square" lIns="0" tIns="0" rIns="0" bIns="0" anchor="t">
             <a:spAutoFit/>
           </a:bodyPr>
           <a:lstStyle/>
@@ -14494,7 +14640,7 @@
           <a:noFill/>
         </p:spPr>
         <p:txBody>
-          <a:bodyPr wrap="square" lIns="0" rIns="0" tIns="0" bIns="0" anchor="t">
+          <a:bodyPr wrap="square" lIns="0" tIns="0" rIns="0" bIns="0" anchor="t">
             <a:spAutoFit/>
           </a:bodyPr>
           <a:lstStyle/>
@@ -14555,7 +14701,9 @@
         <p:txBody>
           <a:bodyPr rtlCol="0" anchor="ctr"/>
           <a:lstStyle/>
-          <a:p/>
+          <a:p>
+            <a:endParaRPr/>
+          </a:p>
         </p:txBody>
       </p:sp>
       <p:sp>
@@ -14575,7 +14723,7 @@
           <a:noFill/>
         </p:spPr>
         <p:txBody>
-          <a:bodyPr wrap="square" lIns="0" rIns="0" tIns="0" bIns="0" anchor="t">
+          <a:bodyPr wrap="square" lIns="0" tIns="0" rIns="0" bIns="0" anchor="t">
             <a:spAutoFit/>
           </a:bodyPr>
           <a:lstStyle/>
@@ -14610,7 +14758,7 @@
           <a:noFill/>
         </p:spPr>
         <p:txBody>
-          <a:bodyPr wrap="square" lIns="0" rIns="0" tIns="0" bIns="0" anchor="t">
+          <a:bodyPr wrap="square" lIns="0" tIns="0" rIns="0" bIns="0" anchor="t">
             <a:spAutoFit/>
           </a:bodyPr>
           <a:lstStyle/>
@@ -14667,7 +14815,7 @@
           </a:fontRef>
         </p:style>
         <p:txBody>
-          <a:bodyPr rtlCol="0" anchor="ctr" lIns="0" rIns="0" tIns="0" bIns="0"/>
+          <a:bodyPr lIns="0" tIns="0" rIns="0" bIns="0" rtlCol="0" anchor="ctr"/>
           <a:lstStyle/>
           <a:p>
             <a:pPr algn="ctr"/>
@@ -14700,7 +14848,7 @@
           <a:noFill/>
         </p:spPr>
         <p:txBody>
-          <a:bodyPr wrap="square" lIns="0" rIns="0" tIns="0" bIns="0" anchor="t">
+          <a:bodyPr wrap="square" lIns="0" tIns="0" rIns="0" bIns="0" anchor="t">
             <a:spAutoFit/>
           </a:bodyPr>
           <a:lstStyle/>
@@ -14735,7 +14883,7 @@
           <a:noFill/>
         </p:spPr>
         <p:txBody>
-          <a:bodyPr wrap="square" lIns="0" rIns="0" tIns="0" bIns="0" anchor="t">
+          <a:bodyPr wrap="square" lIns="0" tIns="0" rIns="0" bIns="0" anchor="t">
             <a:spAutoFit/>
           </a:bodyPr>
           <a:lstStyle/>
@@ -14799,7 +14947,7 @@
           </a:fontRef>
         </p:style>
         <p:txBody>
-          <a:bodyPr rtlCol="0" anchor="ctr" lIns="0" rIns="0" tIns="0" bIns="0"/>
+          <a:bodyPr lIns="0" tIns="0" rIns="0" bIns="0" rtlCol="0" anchor="ctr"/>
           <a:lstStyle/>
           <a:p>
             <a:pPr algn="ctr"/>
@@ -14832,7 +14980,7 @@
           <a:noFill/>
         </p:spPr>
         <p:txBody>
-          <a:bodyPr wrap="square" lIns="0" rIns="0" tIns="0" bIns="0" anchor="t">
+          <a:bodyPr wrap="square" lIns="0" tIns="0" rIns="0" bIns="0" anchor="t">
             <a:spAutoFit/>
           </a:bodyPr>
           <a:lstStyle/>
@@ -14867,7 +15015,7 @@
           <a:noFill/>
         </p:spPr>
         <p:txBody>
-          <a:bodyPr wrap="square" lIns="0" rIns="0" tIns="0" bIns="0" anchor="t">
+          <a:bodyPr wrap="square" lIns="0" tIns="0" rIns="0" bIns="0" anchor="t">
             <a:spAutoFit/>
           </a:bodyPr>
           <a:lstStyle/>
@@ -14931,7 +15079,7 @@
           </a:fontRef>
         </p:style>
         <p:txBody>
-          <a:bodyPr rtlCol="0" anchor="ctr" lIns="0" rIns="0" tIns="0" bIns="0"/>
+          <a:bodyPr lIns="0" tIns="0" rIns="0" bIns="0" rtlCol="0" anchor="ctr"/>
           <a:lstStyle/>
           <a:p>
             <a:pPr algn="ctr"/>
@@ -14964,7 +15112,7 @@
           <a:noFill/>
         </p:spPr>
         <p:txBody>
-          <a:bodyPr wrap="square" lIns="0" rIns="0" tIns="0" bIns="0" anchor="t">
+          <a:bodyPr wrap="square" lIns="0" tIns="0" rIns="0" bIns="0" anchor="t">
             <a:spAutoFit/>
           </a:bodyPr>
           <a:lstStyle/>
@@ -14999,7 +15147,7 @@
           <a:noFill/>
         </p:spPr>
         <p:txBody>
-          <a:bodyPr wrap="square" lIns="0" rIns="0" tIns="0" bIns="0" anchor="t">
+          <a:bodyPr wrap="square" lIns="0" tIns="0" rIns="0" bIns="0" anchor="t">
             <a:spAutoFit/>
           </a:bodyPr>
           <a:lstStyle/>
@@ -15063,7 +15211,7 @@
           </a:fontRef>
         </p:style>
         <p:txBody>
-          <a:bodyPr rtlCol="0" anchor="ctr" lIns="0" rIns="0" tIns="0" bIns="0"/>
+          <a:bodyPr lIns="0" tIns="0" rIns="0" bIns="0" rtlCol="0" anchor="ctr"/>
           <a:lstStyle/>
           <a:p>
             <a:pPr algn="ctr"/>
@@ -15096,7 +15244,7 @@
           <a:noFill/>
         </p:spPr>
         <p:txBody>
-          <a:bodyPr wrap="square" lIns="0" rIns="0" tIns="0" bIns="0" anchor="t">
+          <a:bodyPr wrap="square" lIns="0" tIns="0" rIns="0" bIns="0" anchor="t">
             <a:spAutoFit/>
           </a:bodyPr>
           <a:lstStyle/>
@@ -15131,7 +15279,7 @@
           <a:noFill/>
         </p:spPr>
         <p:txBody>
-          <a:bodyPr wrap="square" lIns="0" rIns="0" tIns="0" bIns="0" anchor="t">
+          <a:bodyPr wrap="square" lIns="0" tIns="0" rIns="0" bIns="0" anchor="t">
             <a:spAutoFit/>
           </a:bodyPr>
           <a:lstStyle/>
@@ -15195,7 +15343,7 @@
           </a:fontRef>
         </p:style>
         <p:txBody>
-          <a:bodyPr rtlCol="0" anchor="ctr" lIns="0" rIns="0" tIns="0" bIns="0"/>
+          <a:bodyPr lIns="0" tIns="0" rIns="0" bIns="0" rtlCol="0" anchor="ctr"/>
           <a:lstStyle/>
           <a:p>
             <a:pPr algn="ctr"/>
@@ -15228,7 +15376,7 @@
           <a:noFill/>
         </p:spPr>
         <p:txBody>
-          <a:bodyPr wrap="square" lIns="0" rIns="0" tIns="0" bIns="0" anchor="t">
+          <a:bodyPr wrap="square" lIns="0" tIns="0" rIns="0" bIns="0" anchor="t">
             <a:spAutoFit/>
           </a:bodyPr>
           <a:lstStyle/>
@@ -15263,7 +15411,7 @@
           <a:noFill/>
         </p:spPr>
         <p:txBody>
-          <a:bodyPr wrap="square" lIns="0" rIns="0" tIns="0" bIns="0" anchor="t">
+          <a:bodyPr wrap="square" lIns="0" tIns="0" rIns="0" bIns="0" anchor="t">
             <a:spAutoFit/>
           </a:bodyPr>
           <a:lstStyle/>
@@ -15299,7 +15447,7 @@
 </file>
 
 <file path=ppt/slides/slide5.xml><?xml version="1.0" encoding="utf-8"?>
-<p:sld xmlns:a="http://schemas.openxmlformats.org/drawingml/2006/main" xmlns:p="http://schemas.openxmlformats.org/presentationml/2006/main" xmlns:r="http://schemas.openxmlformats.org/officeDocument/2006/relationships">
+<p:sld xmlns:a="http://schemas.openxmlformats.org/drawingml/2006/main" xmlns:r="http://schemas.openxmlformats.org/officeDocument/2006/relationships" xmlns:p="http://schemas.openxmlformats.org/presentationml/2006/main">
   <p:cSld>
     <p:bg>
       <p:bgPr>
@@ -15315,7 +15463,14 @@
         <p:cNvGrpSpPr/>
         <p:nvPr/>
       </p:nvGrpSpPr>
-      <p:grpSpPr/>
+      <p:grpSpPr>
+        <a:xfrm>
+          <a:off x="0" y="0"/>
+          <a:ext cx="0" cy="0"/>
+          <a:chOff x="0" y="0"/>
+          <a:chExt cx="0" cy="0"/>
+        </a:xfrm>
+      </p:grpSpPr>
       <p:sp>
         <p:nvSpPr>
           <p:cNvPr id="2" name="Kicker"/>
@@ -15333,7 +15488,7 @@
           <a:noFill/>
         </p:spPr>
         <p:txBody>
-          <a:bodyPr wrap="square" lIns="0" rIns="0" tIns="0" bIns="0" anchor="t">
+          <a:bodyPr wrap="square" lIns="0" tIns="0" rIns="0" bIns="0" anchor="t">
             <a:spAutoFit/>
           </a:bodyPr>
           <a:lstStyle/>
@@ -15368,7 +15523,7 @@
           <a:noFill/>
         </p:spPr>
         <p:txBody>
-          <a:bodyPr wrap="square" lIns="0" rIns="0" tIns="0" bIns="0" anchor="t">
+          <a:bodyPr wrap="square" lIns="0" tIns="0" rIns="0" bIns="0" anchor="t">
             <a:spAutoFit/>
           </a:bodyPr>
           <a:lstStyle/>
@@ -15395,7 +15550,7 @@
           <p:nvPr/>
         </p:nvPicPr>
         <p:blipFill>
-          <a:blip r:embed="rId2"/>
+          <a:blip r:embed="rId3"/>
           <a:stretch>
             <a:fillRect/>
           </a:stretch>
@@ -15427,7 +15582,7 @@
           <a:noFill/>
         </p:spPr>
         <p:txBody>
-          <a:bodyPr wrap="square" lIns="0" rIns="0" tIns="0" bIns="0" anchor="t">
+          <a:bodyPr wrap="square" lIns="0" tIns="0" rIns="0" bIns="0" anchor="t">
             <a:spAutoFit/>
           </a:bodyPr>
           <a:lstStyle/>
@@ -15462,7 +15617,7 @@
           <a:noFill/>
         </p:spPr>
         <p:txBody>
-          <a:bodyPr wrap="square" lIns="0" rIns="0" tIns="0" bIns="0" anchor="t">
+          <a:bodyPr wrap="square" lIns="0" tIns="0" rIns="0" bIns="0" anchor="t">
             <a:spAutoFit/>
           </a:bodyPr>
           <a:lstStyle/>
@@ -15521,7 +15676,9 @@
         <p:txBody>
           <a:bodyPr rtlCol="0" anchor="ctr"/>
           <a:lstStyle/>
-          <a:p/>
+          <a:p>
+            <a:endParaRPr/>
+          </a:p>
         </p:txBody>
       </p:sp>
       <p:sp>
@@ -15561,7 +15718,7 @@
           </a:fontRef>
         </p:style>
         <p:txBody>
-          <a:bodyPr rtlCol="0" anchor="ctr" lIns="0" rIns="0" tIns="0" bIns="0"/>
+          <a:bodyPr lIns="0" tIns="0" rIns="0" bIns="0" rtlCol="0" anchor="ctr"/>
           <a:lstStyle/>
           <a:p>
             <a:pPr algn="ctr"/>
@@ -15594,7 +15751,7 @@
           <a:noFill/>
         </p:spPr>
         <p:txBody>
-          <a:bodyPr wrap="square" lIns="0" rIns="0" tIns="0" bIns="0" anchor="t">
+          <a:bodyPr wrap="square" lIns="0" tIns="0" rIns="0" bIns="0" anchor="t">
             <a:spAutoFit/>
           </a:bodyPr>
           <a:lstStyle/>
@@ -15629,7 +15786,7 @@
           <a:noFill/>
         </p:spPr>
         <p:txBody>
-          <a:bodyPr wrap="square" lIns="0" rIns="0" tIns="0" bIns="0" anchor="t">
+          <a:bodyPr wrap="square" lIns="0" tIns="0" rIns="0" bIns="0" anchor="t">
             <a:spAutoFit/>
           </a:bodyPr>
           <a:lstStyle/>
@@ -15697,7 +15854,9 @@
         <p:txBody>
           <a:bodyPr rtlCol="0" anchor="ctr"/>
           <a:lstStyle/>
-          <a:p/>
+          <a:p>
+            <a:endParaRPr/>
+          </a:p>
         </p:txBody>
       </p:sp>
       <p:sp>
@@ -15737,7 +15896,7 @@
           </a:fontRef>
         </p:style>
         <p:txBody>
-          <a:bodyPr rtlCol="0" anchor="ctr" lIns="0" rIns="0" tIns="0" bIns="0"/>
+          <a:bodyPr lIns="0" tIns="0" rIns="0" bIns="0" rtlCol="0" anchor="ctr"/>
           <a:lstStyle/>
           <a:p>
             <a:pPr algn="ctr"/>
@@ -15770,7 +15929,7 @@
           <a:noFill/>
         </p:spPr>
         <p:txBody>
-          <a:bodyPr wrap="square" lIns="0" rIns="0" tIns="0" bIns="0" anchor="t">
+          <a:bodyPr wrap="square" lIns="0" tIns="0" rIns="0" bIns="0" anchor="t">
             <a:spAutoFit/>
           </a:bodyPr>
           <a:lstStyle/>
@@ -15805,7 +15964,7 @@
           <a:noFill/>
         </p:spPr>
         <p:txBody>
-          <a:bodyPr wrap="square" lIns="0" rIns="0" tIns="0" bIns="0" anchor="t">
+          <a:bodyPr wrap="square" lIns="0" tIns="0" rIns="0" bIns="0" anchor="t">
             <a:spAutoFit/>
           </a:bodyPr>
           <a:lstStyle/>
@@ -15873,7 +16032,9 @@
         <p:txBody>
           <a:bodyPr rtlCol="0" anchor="ctr"/>
           <a:lstStyle/>
-          <a:p/>
+          <a:p>
+            <a:endParaRPr/>
+          </a:p>
         </p:txBody>
       </p:sp>
       <p:sp>
@@ -15913,7 +16074,7 @@
           </a:fontRef>
         </p:style>
         <p:txBody>
-          <a:bodyPr rtlCol="0" anchor="ctr" lIns="0" rIns="0" tIns="0" bIns="0"/>
+          <a:bodyPr lIns="0" tIns="0" rIns="0" bIns="0" rtlCol="0" anchor="ctr"/>
           <a:lstStyle/>
           <a:p>
             <a:pPr algn="ctr"/>
@@ -15946,7 +16107,7 @@
           <a:noFill/>
         </p:spPr>
         <p:txBody>
-          <a:bodyPr wrap="square" lIns="0" rIns="0" tIns="0" bIns="0" anchor="t">
+          <a:bodyPr wrap="square" lIns="0" tIns="0" rIns="0" bIns="0" anchor="t">
             <a:spAutoFit/>
           </a:bodyPr>
           <a:lstStyle/>
@@ -15981,7 +16142,7 @@
           <a:noFill/>
         </p:spPr>
         <p:txBody>
-          <a:bodyPr wrap="square" lIns="0" rIns="0" tIns="0" bIns="0" anchor="t">
+          <a:bodyPr wrap="square" lIns="0" tIns="0" rIns="0" bIns="0" anchor="t">
             <a:spAutoFit/>
           </a:bodyPr>
           <a:lstStyle/>
@@ -16049,7 +16210,9 @@
         <p:txBody>
           <a:bodyPr rtlCol="0" anchor="ctr"/>
           <a:lstStyle/>
-          <a:p/>
+          <a:p>
+            <a:endParaRPr/>
+          </a:p>
         </p:txBody>
       </p:sp>
       <p:sp>
@@ -16089,7 +16252,7 @@
           </a:fontRef>
         </p:style>
         <p:txBody>
-          <a:bodyPr rtlCol="0" anchor="ctr" lIns="0" rIns="0" tIns="0" bIns="0"/>
+          <a:bodyPr lIns="0" tIns="0" rIns="0" bIns="0" rtlCol="0" anchor="ctr"/>
           <a:lstStyle/>
           <a:p>
             <a:pPr algn="ctr"/>
@@ -16122,7 +16285,7 @@
           <a:noFill/>
         </p:spPr>
         <p:txBody>
-          <a:bodyPr wrap="square" lIns="0" rIns="0" tIns="0" bIns="0" anchor="t">
+          <a:bodyPr wrap="square" lIns="0" tIns="0" rIns="0" bIns="0" anchor="t">
             <a:spAutoFit/>
           </a:bodyPr>
           <a:lstStyle/>
@@ -16157,7 +16320,7 @@
           <a:noFill/>
         </p:spPr>
         <p:txBody>
-          <a:bodyPr wrap="square" lIns="0" rIns="0" tIns="0" bIns="0" anchor="t">
+          <a:bodyPr wrap="square" lIns="0" tIns="0" rIns="0" bIns="0" anchor="t">
             <a:spAutoFit/>
           </a:bodyPr>
           <a:lstStyle/>
@@ -16225,7 +16388,9 @@
         <p:txBody>
           <a:bodyPr rtlCol="0" anchor="ctr"/>
           <a:lstStyle/>
-          <a:p/>
+          <a:p>
+            <a:endParaRPr/>
+          </a:p>
         </p:txBody>
       </p:sp>
       <p:sp>
@@ -16265,7 +16430,7 @@
           </a:fontRef>
         </p:style>
         <p:txBody>
-          <a:bodyPr rtlCol="0" anchor="ctr" lIns="0" rIns="0" tIns="0" bIns="0"/>
+          <a:bodyPr lIns="0" tIns="0" rIns="0" bIns="0" rtlCol="0" anchor="ctr"/>
           <a:lstStyle/>
           <a:p>
             <a:pPr algn="ctr"/>
@@ -16298,7 +16463,7 @@
           <a:noFill/>
         </p:spPr>
         <p:txBody>
-          <a:bodyPr wrap="square" lIns="0" rIns="0" tIns="0" bIns="0" anchor="t">
+          <a:bodyPr wrap="square" lIns="0" tIns="0" rIns="0" bIns="0" anchor="t">
             <a:spAutoFit/>
           </a:bodyPr>
           <a:lstStyle/>
@@ -16333,7 +16498,7 @@
           <a:noFill/>
         </p:spPr>
         <p:txBody>
-          <a:bodyPr wrap="square" lIns="0" rIns="0" tIns="0" bIns="0" anchor="t">
+          <a:bodyPr wrap="square" lIns="0" tIns="0" rIns="0" bIns="0" anchor="t">
             <a:spAutoFit/>
           </a:bodyPr>
           <a:lstStyle/>
@@ -16401,7 +16566,9 @@
         <p:txBody>
           <a:bodyPr rtlCol="0" anchor="ctr"/>
           <a:lstStyle/>
-          <a:p/>
+          <a:p>
+            <a:endParaRPr/>
+          </a:p>
         </p:txBody>
       </p:sp>
       <p:sp>
@@ -16441,7 +16608,7 @@
           </a:fontRef>
         </p:style>
         <p:txBody>
-          <a:bodyPr rtlCol="0" anchor="ctr" lIns="0" rIns="0" tIns="0" bIns="0"/>
+          <a:bodyPr lIns="0" tIns="0" rIns="0" bIns="0" rtlCol="0" anchor="ctr"/>
           <a:lstStyle/>
           <a:p>
             <a:pPr algn="ctr"/>
@@ -16474,7 +16641,7 @@
           <a:noFill/>
         </p:spPr>
         <p:txBody>
-          <a:bodyPr wrap="square" lIns="0" rIns="0" tIns="0" bIns="0" anchor="t">
+          <a:bodyPr wrap="square" lIns="0" tIns="0" rIns="0" bIns="0" anchor="t">
             <a:spAutoFit/>
           </a:bodyPr>
           <a:lstStyle/>
@@ -16509,7 +16676,7 @@
           <a:noFill/>
         </p:spPr>
         <p:txBody>
-          <a:bodyPr wrap="square" lIns="0" rIns="0" tIns="0" bIns="0" anchor="t">
+          <a:bodyPr wrap="square" lIns="0" tIns="0" rIns="0" bIns="0" anchor="t">
             <a:spAutoFit/>
           </a:bodyPr>
           <a:lstStyle/>
@@ -16545,7 +16712,7 @@
 </file>
 
 <file path=ppt/slides/slide6.xml><?xml version="1.0" encoding="utf-8"?>
-<p:sld xmlns:a="http://schemas.openxmlformats.org/drawingml/2006/main" xmlns:p="http://schemas.openxmlformats.org/presentationml/2006/main" xmlns:r="http://schemas.openxmlformats.org/officeDocument/2006/relationships">
+<p:sld xmlns:a="http://schemas.openxmlformats.org/drawingml/2006/main" xmlns:r="http://schemas.openxmlformats.org/officeDocument/2006/relationships" xmlns:p="http://schemas.openxmlformats.org/presentationml/2006/main">
   <p:cSld>
     <p:bg>
       <p:bgPr>
@@ -16561,7 +16728,14 @@
         <p:cNvGrpSpPr/>
         <p:nvPr/>
       </p:nvGrpSpPr>
-      <p:grpSpPr/>
+      <p:grpSpPr>
+        <a:xfrm>
+          <a:off x="0" y="0"/>
+          <a:ext cx="0" cy="0"/>
+          <a:chOff x="0" y="0"/>
+          <a:chExt cx="0" cy="0"/>
+        </a:xfrm>
+      </p:grpSpPr>
       <p:sp>
         <p:nvSpPr>
           <p:cNvPr id="2" name="Kicker"/>
@@ -16579,7 +16753,7 @@
           <a:noFill/>
         </p:spPr>
         <p:txBody>
-          <a:bodyPr wrap="square" lIns="0" rIns="0" tIns="0" bIns="0" anchor="t">
+          <a:bodyPr wrap="square" lIns="0" tIns="0" rIns="0" bIns="0" anchor="t">
             <a:spAutoFit/>
           </a:bodyPr>
           <a:lstStyle/>
@@ -16614,7 +16788,7 @@
           <a:noFill/>
         </p:spPr>
         <p:txBody>
-          <a:bodyPr wrap="square" lIns="0" rIns="0" tIns="0" bIns="0" anchor="t">
+          <a:bodyPr wrap="square" lIns="0" tIns="0" rIns="0" bIns="0" anchor="t">
             <a:spAutoFit/>
           </a:bodyPr>
           <a:lstStyle/>
@@ -16641,7 +16815,7 @@
           <p:nvPr/>
         </p:nvPicPr>
         <p:blipFill>
-          <a:blip r:embed="rId2"/>
+          <a:blip r:embed="rId3"/>
           <a:stretch>
             <a:fillRect/>
           </a:stretch>
@@ -16673,7 +16847,7 @@
           <a:noFill/>
         </p:spPr>
         <p:txBody>
-          <a:bodyPr wrap="square" lIns="0" rIns="0" tIns="0" bIns="0" anchor="t">
+          <a:bodyPr wrap="square" lIns="0" tIns="0" rIns="0" bIns="0" anchor="t">
             <a:spAutoFit/>
           </a:bodyPr>
           <a:lstStyle/>
@@ -16708,7 +16882,7 @@
           <a:noFill/>
         </p:spPr>
         <p:txBody>
-          <a:bodyPr wrap="square" lIns="0" rIns="0" tIns="0" bIns="0" anchor="t">
+          <a:bodyPr wrap="square" lIns="0" tIns="0" rIns="0" bIns="0" anchor="t">
             <a:spAutoFit/>
           </a:bodyPr>
           <a:lstStyle/>
@@ -16767,7 +16941,9 @@
         <p:txBody>
           <a:bodyPr rtlCol="0" anchor="ctr"/>
           <a:lstStyle/>
-          <a:p/>
+          <a:p>
+            <a:endParaRPr/>
+          </a:p>
         </p:txBody>
       </p:sp>
       <p:sp>
@@ -16787,7 +16963,7 @@
           <a:noFill/>
         </p:spPr>
         <p:txBody>
-          <a:bodyPr wrap="square" lIns="0" rIns="0" tIns="0" bIns="0" anchor="t">
+          <a:bodyPr wrap="square" lIns="0" tIns="0" rIns="0" bIns="0" anchor="t">
             <a:spAutoFit/>
           </a:bodyPr>
           <a:lstStyle/>
@@ -16822,7 +16998,7 @@
           <a:noFill/>
         </p:spPr>
         <p:txBody>
-          <a:bodyPr wrap="square" lIns="0" rIns="0" tIns="0" bIns="0" anchor="t">
+          <a:bodyPr wrap="square" lIns="0" tIns="0" rIns="0" bIns="0" anchor="t">
             <a:spAutoFit/>
           </a:bodyPr>
           <a:lstStyle/>
@@ -16881,7 +17057,9 @@
         <p:txBody>
           <a:bodyPr rtlCol="0" anchor="ctr"/>
           <a:lstStyle/>
-          <a:p/>
+          <a:p>
+            <a:endParaRPr/>
+          </a:p>
         </p:txBody>
       </p:sp>
       <p:sp>
@@ -16901,7 +17079,7 @@
           <a:noFill/>
         </p:spPr>
         <p:txBody>
-          <a:bodyPr wrap="square" lIns="0" rIns="0" tIns="0" bIns="0" anchor="t">
+          <a:bodyPr wrap="square" lIns="0" tIns="0" rIns="0" bIns="0" anchor="t">
             <a:spAutoFit/>
           </a:bodyPr>
           <a:lstStyle/>
@@ -16936,7 +17114,7 @@
           <a:noFill/>
         </p:spPr>
         <p:txBody>
-          <a:bodyPr wrap="square" lIns="0" rIns="0" tIns="0" bIns="0" anchor="t">
+          <a:bodyPr wrap="square" lIns="0" tIns="0" rIns="0" bIns="0" anchor="t">
             <a:spAutoFit/>
           </a:bodyPr>
           <a:lstStyle/>
@@ -16995,7 +17173,9 @@
         <p:txBody>
           <a:bodyPr rtlCol="0" anchor="ctr"/>
           <a:lstStyle/>
-          <a:p/>
+          <a:p>
+            <a:endParaRPr/>
+          </a:p>
         </p:txBody>
       </p:sp>
       <p:sp>
@@ -17015,7 +17195,7 @@
           <a:noFill/>
         </p:spPr>
         <p:txBody>
-          <a:bodyPr wrap="square" lIns="0" rIns="0" tIns="0" bIns="0" anchor="t">
+          <a:bodyPr wrap="square" lIns="0" tIns="0" rIns="0" bIns="0" anchor="t">
             <a:spAutoFit/>
           </a:bodyPr>
           <a:lstStyle/>
@@ -17050,7 +17230,7 @@
           <a:noFill/>
         </p:spPr>
         <p:txBody>
-          <a:bodyPr wrap="square" lIns="0" rIns="0" tIns="0" bIns="0" anchor="t">
+          <a:bodyPr wrap="square" lIns="0" tIns="0" rIns="0" bIns="0" anchor="t">
             <a:spAutoFit/>
           </a:bodyPr>
           <a:lstStyle/>
@@ -17109,7 +17289,9 @@
         <p:txBody>
           <a:bodyPr rtlCol="0" anchor="ctr"/>
           <a:lstStyle/>
-          <a:p/>
+          <a:p>
+            <a:endParaRPr/>
+          </a:p>
         </p:txBody>
       </p:sp>
       <p:sp>
@@ -17129,7 +17311,7 @@
           <a:noFill/>
         </p:spPr>
         <p:txBody>
-          <a:bodyPr wrap="square" lIns="0" rIns="0" tIns="0" bIns="0" anchor="t">
+          <a:bodyPr wrap="square" lIns="0" tIns="0" rIns="0" bIns="0" anchor="t">
             <a:spAutoFit/>
           </a:bodyPr>
           <a:lstStyle/>
@@ -17164,7 +17346,7 @@
           <a:noFill/>
         </p:spPr>
         <p:txBody>
-          <a:bodyPr wrap="square" lIns="0" rIns="0" tIns="0" bIns="0" anchor="t">
+          <a:bodyPr wrap="square" lIns="0" tIns="0" rIns="0" bIns="0" anchor="t">
             <a:spAutoFit/>
           </a:bodyPr>
           <a:lstStyle/>
@@ -17199,7 +17381,7 @@
           <a:noFill/>
         </p:spPr>
         <p:txBody>
-          <a:bodyPr wrap="square" lIns="0" rIns="0" tIns="0" bIns="0" anchor="t">
+          <a:bodyPr wrap="square" lIns="0" tIns="0" rIns="0" bIns="0" anchor="t">
             <a:spAutoFit/>
           </a:bodyPr>
           <a:lstStyle/>
@@ -17258,7 +17440,9 @@
         <p:txBody>
           <a:bodyPr rtlCol="0" anchor="ctr"/>
           <a:lstStyle/>
-          <a:p/>
+          <a:p>
+            <a:endParaRPr/>
+          </a:p>
         </p:txBody>
       </p:sp>
       <p:sp>
@@ -17278,7 +17462,7 @@
           <a:noFill/>
         </p:spPr>
         <p:txBody>
-          <a:bodyPr wrap="square" lIns="0" rIns="0" tIns="0" bIns="0" anchor="t">
+          <a:bodyPr wrap="square" lIns="0" tIns="0" rIns="0" bIns="0" anchor="t">
             <a:spAutoFit/>
           </a:bodyPr>
           <a:lstStyle/>
@@ -17313,7 +17497,7 @@
           <a:noFill/>
         </p:spPr>
         <p:txBody>
-          <a:bodyPr wrap="square" lIns="0" rIns="0" tIns="0" bIns="0" anchor="t">
+          <a:bodyPr wrap="square" lIns="0" tIns="0" rIns="0" bIns="0" anchor="t">
             <a:spAutoFit/>
           </a:bodyPr>
           <a:lstStyle/>
@@ -17372,7 +17556,9 @@
         <p:txBody>
           <a:bodyPr rtlCol="0" anchor="ctr"/>
           <a:lstStyle/>
-          <a:p/>
+          <a:p>
+            <a:endParaRPr/>
+          </a:p>
         </p:txBody>
       </p:sp>
       <p:sp>
@@ -17392,7 +17578,7 @@
           <a:noFill/>
         </p:spPr>
         <p:txBody>
-          <a:bodyPr wrap="square" lIns="0" rIns="0" tIns="0" bIns="0" anchor="t">
+          <a:bodyPr wrap="square" lIns="0" tIns="0" rIns="0" bIns="0" anchor="t">
             <a:spAutoFit/>
           </a:bodyPr>
           <a:lstStyle/>
@@ -17427,7 +17613,7 @@
           <a:noFill/>
         </p:spPr>
         <p:txBody>
-          <a:bodyPr wrap="square" lIns="0" rIns="0" tIns="0" bIns="0" anchor="t">
+          <a:bodyPr wrap="square" lIns="0" tIns="0" rIns="0" bIns="0" anchor="t">
             <a:spAutoFit/>
           </a:bodyPr>
           <a:lstStyle/>
@@ -17486,7 +17672,9 @@
         <p:txBody>
           <a:bodyPr rtlCol="0" anchor="ctr"/>
           <a:lstStyle/>
-          <a:p/>
+          <a:p>
+            <a:endParaRPr/>
+          </a:p>
         </p:txBody>
       </p:sp>
       <p:sp>
@@ -17506,7 +17694,7 @@
           <a:noFill/>
         </p:spPr>
         <p:txBody>
-          <a:bodyPr wrap="square" lIns="0" rIns="0" tIns="0" bIns="0" anchor="t">
+          <a:bodyPr wrap="square" lIns="0" tIns="0" rIns="0" bIns="0" anchor="t">
             <a:spAutoFit/>
           </a:bodyPr>
           <a:lstStyle/>
@@ -17541,7 +17729,7 @@
           <a:noFill/>
         </p:spPr>
         <p:txBody>
-          <a:bodyPr wrap="square" lIns="0" rIns="0" tIns="0" bIns="0" anchor="t">
+          <a:bodyPr wrap="square" lIns="0" tIns="0" rIns="0" bIns="0" anchor="t">
             <a:spAutoFit/>
           </a:bodyPr>
           <a:lstStyle/>
@@ -17576,7 +17764,7 @@
           <a:noFill/>
         </p:spPr>
         <p:txBody>
-          <a:bodyPr wrap="square" lIns="0" rIns="0" tIns="0" bIns="0" anchor="t">
+          <a:bodyPr wrap="square" lIns="0" tIns="0" rIns="0" bIns="0" anchor="t">
             <a:spAutoFit/>
           </a:bodyPr>
           <a:lstStyle/>
@@ -17641,7 +17829,7 @@
 </file>
 
 <file path=ppt/slides/slide7.xml><?xml version="1.0" encoding="utf-8"?>
-<p:sld xmlns:a="http://schemas.openxmlformats.org/drawingml/2006/main" xmlns:p="http://schemas.openxmlformats.org/presentationml/2006/main" xmlns:r="http://schemas.openxmlformats.org/officeDocument/2006/relationships">
+<p:sld xmlns:a="http://schemas.openxmlformats.org/drawingml/2006/main" xmlns:r="http://schemas.openxmlformats.org/officeDocument/2006/relationships" xmlns:p="http://schemas.openxmlformats.org/presentationml/2006/main">
   <p:cSld>
     <p:bg>
       <p:bgPr>
@@ -17657,7 +17845,14 @@
         <p:cNvGrpSpPr/>
         <p:nvPr/>
       </p:nvGrpSpPr>
-      <p:grpSpPr/>
+      <p:grpSpPr>
+        <a:xfrm>
+          <a:off x="0" y="0"/>
+          <a:ext cx="0" cy="0"/>
+          <a:chOff x="0" y="0"/>
+          <a:chExt cx="0" cy="0"/>
+        </a:xfrm>
+      </p:grpSpPr>
       <p:sp>
         <p:nvSpPr>
           <p:cNvPr id="2" name="Kicker"/>
@@ -17675,7 +17870,7 @@
           <a:noFill/>
         </p:spPr>
         <p:txBody>
-          <a:bodyPr wrap="square" lIns="0" rIns="0" tIns="0" bIns="0" anchor="t">
+          <a:bodyPr wrap="square" lIns="0" tIns="0" rIns="0" bIns="0" anchor="t">
             <a:spAutoFit/>
           </a:bodyPr>
           <a:lstStyle/>
@@ -17710,7 +17905,7 @@
           <a:noFill/>
         </p:spPr>
         <p:txBody>
-          <a:bodyPr wrap="square" lIns="0" rIns="0" tIns="0" bIns="0" anchor="t">
+          <a:bodyPr wrap="square" lIns="0" tIns="0" rIns="0" bIns="0" anchor="t">
             <a:spAutoFit/>
           </a:bodyPr>
           <a:lstStyle/>
@@ -17731,100 +17926,6 @@
       <p:pic>
         <p:nvPicPr>
           <p:cNvPr id="4" name="Picture 3" descr="nmims_logo.png"/>
-          <p:cNvPicPr>
-            <a:picLocks noChangeAspect="1"/>
-          </p:cNvPicPr>
-          <p:nvPr/>
-        </p:nvPicPr>
-        <p:blipFill>
-          <a:blip r:embed="rId2"/>
-          <a:stretch>
-            <a:fillRect/>
-          </a:stretch>
-        </p:blipFill>
-        <p:spPr>
-          <a:xfrm>
-            <a:off x="11109960" y="274320"/>
-            <a:ext cx="570527" cy="566928"/>
-          </a:xfrm>
-          <a:prstGeom prst="rect">
-            <a:avLst/>
-          </a:prstGeom>
-        </p:spPr>
-      </p:pic>
-      <p:sp>
-        <p:nvSpPr>
-          <p:cNvPr id="5" name="TextBox 4"/>
-          <p:cNvSpPr txBox="1"/>
-          <p:nvPr/>
-        </p:nvSpPr>
-        <p:spPr>
-          <a:xfrm>
-            <a:off x="548640" y="6446520"/>
-            <a:ext cx="5486400" cy="228600"/>
-          </a:xfrm>
-          <a:prstGeom prst="rect">
-            <a:avLst/>
-          </a:prstGeom>
-          <a:noFill/>
-        </p:spPr>
-        <p:txBody>
-          <a:bodyPr wrap="square" lIns="0" rIns="0" tIns="0" bIns="0" anchor="t">
-            <a:spAutoFit/>
-          </a:bodyPr>
-          <a:lstStyle/>
-          <a:p>
-            <a:pPr algn="l"/>
-            <a:r>
-              <a:rPr sz="900" b="0" i="0">
-                <a:solidFill>
-                  <a:srgbClr val="8A8F98"/>
-                </a:solidFill>
-                <a:latin typeface="Calibri"/>
-              </a:rPr>
-              <a:t>DemandIQ  |  NMIMS MPSTME  |  Machine Learning, Sem V</a:t>
-            </a:r>
-          </a:p>
-        </p:txBody>
-      </p:sp>
-      <p:sp>
-        <p:nvSpPr>
-          <p:cNvPr id="6" name="TextBox 5"/>
-          <p:cNvSpPr txBox="1"/>
-          <p:nvPr/>
-        </p:nvSpPr>
-        <p:spPr>
-          <a:xfrm>
-            <a:off x="11155680" y="6446520"/>
-            <a:ext cx="502920" cy="228600"/>
-          </a:xfrm>
-          <a:prstGeom prst="rect">
-            <a:avLst/>
-          </a:prstGeom>
-          <a:noFill/>
-        </p:spPr>
-        <p:txBody>
-          <a:bodyPr wrap="square" lIns="0" rIns="0" tIns="0" bIns="0" anchor="t">
-            <a:spAutoFit/>
-          </a:bodyPr>
-          <a:lstStyle/>
-          <a:p>
-            <a:pPr algn="r"/>
-            <a:r>
-              <a:rPr sz="900" b="0" i="0">
-                <a:solidFill>
-                  <a:srgbClr val="8A8F98"/>
-                </a:solidFill>
-                <a:latin typeface="Calibri"/>
-              </a:rPr>
-              <a:t>7</a:t>
-            </a:r>
-          </a:p>
-        </p:txBody>
-      </p:sp>
-      <p:pic>
-        <p:nvPicPr>
-          <p:cNvPr id="7" name="Picture 6" descr="fig02_weekday_promo.png"/>
           <p:cNvPicPr>
             <a:picLocks noChangeAspect="1"/>
           </p:cNvPicPr>
@@ -17838,6 +17939,100 @@
         </p:blipFill>
         <p:spPr>
           <a:xfrm>
+            <a:off x="11109960" y="274320"/>
+            <a:ext cx="570527" cy="566928"/>
+          </a:xfrm>
+          <a:prstGeom prst="rect">
+            <a:avLst/>
+          </a:prstGeom>
+        </p:spPr>
+      </p:pic>
+      <p:sp>
+        <p:nvSpPr>
+          <p:cNvPr id="5" name="TextBox 4"/>
+          <p:cNvSpPr txBox="1"/>
+          <p:nvPr/>
+        </p:nvSpPr>
+        <p:spPr>
+          <a:xfrm>
+            <a:off x="548640" y="6446520"/>
+            <a:ext cx="5486400" cy="228600"/>
+          </a:xfrm>
+          <a:prstGeom prst="rect">
+            <a:avLst/>
+          </a:prstGeom>
+          <a:noFill/>
+        </p:spPr>
+        <p:txBody>
+          <a:bodyPr wrap="square" lIns="0" tIns="0" rIns="0" bIns="0" anchor="t">
+            <a:spAutoFit/>
+          </a:bodyPr>
+          <a:lstStyle/>
+          <a:p>
+            <a:pPr algn="l"/>
+            <a:r>
+              <a:rPr sz="900" b="0" i="0">
+                <a:solidFill>
+                  <a:srgbClr val="8A8F98"/>
+                </a:solidFill>
+                <a:latin typeface="Calibri"/>
+              </a:rPr>
+              <a:t>DemandIQ  |  NMIMS MPSTME  |  Machine Learning, Sem V</a:t>
+            </a:r>
+          </a:p>
+        </p:txBody>
+      </p:sp>
+      <p:sp>
+        <p:nvSpPr>
+          <p:cNvPr id="6" name="TextBox 5"/>
+          <p:cNvSpPr txBox="1"/>
+          <p:nvPr/>
+        </p:nvSpPr>
+        <p:spPr>
+          <a:xfrm>
+            <a:off x="11155680" y="6446520"/>
+            <a:ext cx="502920" cy="228600"/>
+          </a:xfrm>
+          <a:prstGeom prst="rect">
+            <a:avLst/>
+          </a:prstGeom>
+          <a:noFill/>
+        </p:spPr>
+        <p:txBody>
+          <a:bodyPr wrap="square" lIns="0" tIns="0" rIns="0" bIns="0" anchor="t">
+            <a:spAutoFit/>
+          </a:bodyPr>
+          <a:lstStyle/>
+          <a:p>
+            <a:pPr algn="r"/>
+            <a:r>
+              <a:rPr sz="900" b="0" i="0">
+                <a:solidFill>
+                  <a:srgbClr val="8A8F98"/>
+                </a:solidFill>
+                <a:latin typeface="Calibri"/>
+              </a:rPr>
+              <a:t>7</a:t>
+            </a:r>
+          </a:p>
+        </p:txBody>
+      </p:sp>
+      <p:pic>
+        <p:nvPicPr>
+          <p:cNvPr id="7" name="Picture 6" descr="fig02_weekday_promo.png"/>
+          <p:cNvPicPr>
+            <a:picLocks noChangeAspect="1"/>
+          </p:cNvPicPr>
+          <p:nvPr/>
+        </p:nvPicPr>
+        <p:blipFill>
+          <a:blip r:embed="rId4"/>
+          <a:stretch>
+            <a:fillRect/>
+          </a:stretch>
+        </p:blipFill>
+        <p:spPr>
+          <a:xfrm>
             <a:off x="548640" y="1697087"/>
             <a:ext cx="5212080" cy="2732305"/>
           </a:xfrm>
@@ -17855,7 +18050,7 @@
           <p:nvPr/>
         </p:nvPicPr>
         <p:blipFill>
-          <a:blip r:embed="rId4"/>
+          <a:blip r:embed="rId5"/>
           <a:stretch>
             <a:fillRect/>
           </a:stretch>
@@ -17911,7 +18106,9 @@
         <p:txBody>
           <a:bodyPr rtlCol="0" anchor="ctr"/>
           <a:lstStyle/>
-          <a:p/>
+          <a:p>
+            <a:endParaRPr/>
+          </a:p>
         </p:txBody>
       </p:sp>
       <p:sp>
@@ -17931,7 +18128,7 @@
           <a:noFill/>
         </p:spPr>
         <p:txBody>
-          <a:bodyPr wrap="square" lIns="0" rIns="0" tIns="0" bIns="0" anchor="t">
+          <a:bodyPr wrap="square" lIns="0" tIns="0" rIns="0" bIns="0" anchor="t">
             <a:spAutoFit/>
           </a:bodyPr>
           <a:lstStyle/>
@@ -17966,7 +18163,7 @@
           <a:noFill/>
         </p:spPr>
         <p:txBody>
-          <a:bodyPr wrap="square" lIns="0" rIns="0" tIns="0" bIns="0" anchor="t">
+          <a:bodyPr wrap="square" lIns="0" tIns="0" rIns="0" bIns="0" anchor="t">
             <a:spAutoFit/>
           </a:bodyPr>
           <a:lstStyle/>
@@ -18025,7 +18222,9 @@
         <p:txBody>
           <a:bodyPr rtlCol="0" anchor="ctr"/>
           <a:lstStyle/>
-          <a:p/>
+          <a:p>
+            <a:endParaRPr/>
+          </a:p>
         </p:txBody>
       </p:sp>
       <p:sp>
@@ -18045,7 +18244,7 @@
           <a:noFill/>
         </p:spPr>
         <p:txBody>
-          <a:bodyPr wrap="square" lIns="0" rIns="0" tIns="0" bIns="0" anchor="t">
+          <a:bodyPr wrap="square" lIns="0" tIns="0" rIns="0" bIns="0" anchor="t">
             <a:spAutoFit/>
           </a:bodyPr>
           <a:lstStyle/>
@@ -18080,7 +18279,7 @@
           <a:noFill/>
         </p:spPr>
         <p:txBody>
-          <a:bodyPr wrap="square" lIns="0" rIns="0" tIns="0" bIns="0" anchor="t">
+          <a:bodyPr wrap="square" lIns="0" tIns="0" rIns="0" bIns="0" anchor="t">
             <a:spAutoFit/>
           </a:bodyPr>
           <a:lstStyle/>
@@ -18139,7 +18338,9 @@
         <p:txBody>
           <a:bodyPr rtlCol="0" anchor="ctr"/>
           <a:lstStyle/>
-          <a:p/>
+          <a:p>
+            <a:endParaRPr/>
+          </a:p>
         </p:txBody>
       </p:sp>
       <p:sp>
@@ -18159,7 +18360,7 @@
           <a:noFill/>
         </p:spPr>
         <p:txBody>
-          <a:bodyPr wrap="square" lIns="0" rIns="0" tIns="0" bIns="0" anchor="t">
+          <a:bodyPr wrap="square" lIns="0" tIns="0" rIns="0" bIns="0" anchor="t">
             <a:spAutoFit/>
           </a:bodyPr>
           <a:lstStyle/>
@@ -18194,7 +18395,7 @@
           <a:noFill/>
         </p:spPr>
         <p:txBody>
-          <a:bodyPr wrap="square" lIns="0" rIns="0" tIns="0" bIns="0" anchor="t">
+          <a:bodyPr wrap="square" lIns="0" tIns="0" rIns="0" bIns="0" anchor="t">
             <a:spAutoFit/>
           </a:bodyPr>
           <a:lstStyle/>
@@ -18221,7 +18422,7 @@
 </file>
 
 <file path=ppt/slides/slide8.xml><?xml version="1.0" encoding="utf-8"?>
-<p:sld xmlns:a="http://schemas.openxmlformats.org/drawingml/2006/main" xmlns:p="http://schemas.openxmlformats.org/presentationml/2006/main" xmlns:r="http://schemas.openxmlformats.org/officeDocument/2006/relationships">
+<p:sld xmlns:a="http://schemas.openxmlformats.org/drawingml/2006/main" xmlns:r="http://schemas.openxmlformats.org/officeDocument/2006/relationships" xmlns:p="http://schemas.openxmlformats.org/presentationml/2006/main">
   <p:cSld>
     <p:bg>
       <p:bgPr>
@@ -18237,7 +18438,14 @@
         <p:cNvGrpSpPr/>
         <p:nvPr/>
       </p:nvGrpSpPr>
-      <p:grpSpPr/>
+      <p:grpSpPr>
+        <a:xfrm>
+          <a:off x="0" y="0"/>
+          <a:ext cx="0" cy="0"/>
+          <a:chOff x="0" y="0"/>
+          <a:chExt cx="0" cy="0"/>
+        </a:xfrm>
+      </p:grpSpPr>
       <p:sp>
         <p:nvSpPr>
           <p:cNvPr id="2" name="Kicker"/>
@@ -18255,7 +18463,7 @@
           <a:noFill/>
         </p:spPr>
         <p:txBody>
-          <a:bodyPr wrap="square" lIns="0" rIns="0" tIns="0" bIns="0" anchor="t">
+          <a:bodyPr wrap="square" lIns="0" tIns="0" rIns="0" bIns="0" anchor="t">
             <a:spAutoFit/>
           </a:bodyPr>
           <a:lstStyle/>
@@ -18290,7 +18498,7 @@
           <a:noFill/>
         </p:spPr>
         <p:txBody>
-          <a:bodyPr wrap="square" lIns="0" rIns="0" tIns="0" bIns="0" anchor="t">
+          <a:bodyPr wrap="square" lIns="0" tIns="0" rIns="0" bIns="0" anchor="t">
             <a:spAutoFit/>
           </a:bodyPr>
           <a:lstStyle/>
@@ -18317,7 +18525,7 @@
           <p:nvPr/>
         </p:nvPicPr>
         <p:blipFill>
-          <a:blip r:embed="rId2"/>
+          <a:blip r:embed="rId3"/>
           <a:stretch>
             <a:fillRect/>
           </a:stretch>
@@ -18349,7 +18557,7 @@
           <a:noFill/>
         </p:spPr>
         <p:txBody>
-          <a:bodyPr wrap="square" lIns="0" rIns="0" tIns="0" bIns="0" anchor="t">
+          <a:bodyPr wrap="square" lIns="0" tIns="0" rIns="0" bIns="0" anchor="t">
             <a:spAutoFit/>
           </a:bodyPr>
           <a:lstStyle/>
@@ -18384,7 +18592,7 @@
           <a:noFill/>
         </p:spPr>
         <p:txBody>
-          <a:bodyPr wrap="square" lIns="0" rIns="0" tIns="0" bIns="0" anchor="t">
+          <a:bodyPr wrap="square" lIns="0" tIns="0" rIns="0" bIns="0" anchor="t">
             <a:spAutoFit/>
           </a:bodyPr>
           <a:lstStyle/>
@@ -18411,7 +18619,7 @@
           <p:nvPr/>
         </p:nvPicPr>
         <p:blipFill>
-          <a:blip r:embed="rId3"/>
+          <a:blip r:embed="rId4"/>
           <a:stretch>
             <a:fillRect/>
           </a:stretch>
@@ -18435,7 +18643,7 @@
 </file>
 
 <file path=ppt/slides/slide9.xml><?xml version="1.0" encoding="utf-8"?>
-<p:sld xmlns:a="http://schemas.openxmlformats.org/drawingml/2006/main" xmlns:p="http://schemas.openxmlformats.org/presentationml/2006/main" xmlns:r="http://schemas.openxmlformats.org/officeDocument/2006/relationships">
+<p:sld xmlns:a="http://schemas.openxmlformats.org/drawingml/2006/main" xmlns:r="http://schemas.openxmlformats.org/officeDocument/2006/relationships" xmlns:p="http://schemas.openxmlformats.org/presentationml/2006/main">
   <p:cSld>
     <p:bg>
       <p:bgPr>
@@ -18451,7 +18659,14 @@
         <p:cNvGrpSpPr/>
         <p:nvPr/>
       </p:nvGrpSpPr>
-      <p:grpSpPr/>
+      <p:grpSpPr>
+        <a:xfrm>
+          <a:off x="0" y="0"/>
+          <a:ext cx="0" cy="0"/>
+          <a:chOff x="0" y="0"/>
+          <a:chExt cx="0" cy="0"/>
+        </a:xfrm>
+      </p:grpSpPr>
       <p:sp>
         <p:nvSpPr>
           <p:cNvPr id="2" name="Kicker"/>
@@ -18469,7 +18684,7 @@
           <a:noFill/>
         </p:spPr>
         <p:txBody>
-          <a:bodyPr wrap="square" lIns="0" rIns="0" tIns="0" bIns="0" anchor="t">
+          <a:bodyPr wrap="square" lIns="0" tIns="0" rIns="0" bIns="0" anchor="t">
             <a:spAutoFit/>
           </a:bodyPr>
           <a:lstStyle/>
@@ -18504,7 +18719,7 @@
           <a:noFill/>
         </p:spPr>
         <p:txBody>
-          <a:bodyPr wrap="square" lIns="0" rIns="0" tIns="0" bIns="0" anchor="t">
+          <a:bodyPr wrap="square" lIns="0" tIns="0" rIns="0" bIns="0" anchor="t">
             <a:spAutoFit/>
           </a:bodyPr>
           <a:lstStyle/>
@@ -18525,100 +18740,6 @@
       <p:pic>
         <p:nvPicPr>
           <p:cNvPr id="4" name="Picture 3" descr="nmims_logo.png"/>
-          <p:cNvPicPr>
-            <a:picLocks noChangeAspect="1"/>
-          </p:cNvPicPr>
-          <p:nvPr/>
-        </p:nvPicPr>
-        <p:blipFill>
-          <a:blip r:embed="rId2"/>
-          <a:stretch>
-            <a:fillRect/>
-          </a:stretch>
-        </p:blipFill>
-        <p:spPr>
-          <a:xfrm>
-            <a:off x="11109960" y="274320"/>
-            <a:ext cx="570527" cy="566928"/>
-          </a:xfrm>
-          <a:prstGeom prst="rect">
-            <a:avLst/>
-          </a:prstGeom>
-        </p:spPr>
-      </p:pic>
-      <p:sp>
-        <p:nvSpPr>
-          <p:cNvPr id="5" name="TextBox 4"/>
-          <p:cNvSpPr txBox="1"/>
-          <p:nvPr/>
-        </p:nvSpPr>
-        <p:spPr>
-          <a:xfrm>
-            <a:off x="548640" y="6446520"/>
-            <a:ext cx="5486400" cy="228600"/>
-          </a:xfrm>
-          <a:prstGeom prst="rect">
-            <a:avLst/>
-          </a:prstGeom>
-          <a:noFill/>
-        </p:spPr>
-        <p:txBody>
-          <a:bodyPr wrap="square" lIns="0" rIns="0" tIns="0" bIns="0" anchor="t">
-            <a:spAutoFit/>
-          </a:bodyPr>
-          <a:lstStyle/>
-          <a:p>
-            <a:pPr algn="l"/>
-            <a:r>
-              <a:rPr sz="900" b="0" i="0">
-                <a:solidFill>
-                  <a:srgbClr val="8A8F98"/>
-                </a:solidFill>
-                <a:latin typeface="Calibri"/>
-              </a:rPr>
-              <a:t>DemandIQ  |  NMIMS MPSTME  |  Machine Learning, Sem V</a:t>
-            </a:r>
-          </a:p>
-        </p:txBody>
-      </p:sp>
-      <p:sp>
-        <p:nvSpPr>
-          <p:cNvPr id="6" name="TextBox 5"/>
-          <p:cNvSpPr txBox="1"/>
-          <p:nvPr/>
-        </p:nvSpPr>
-        <p:spPr>
-          <a:xfrm>
-            <a:off x="11155680" y="6446520"/>
-            <a:ext cx="502920" cy="228600"/>
-          </a:xfrm>
-          <a:prstGeom prst="rect">
-            <a:avLst/>
-          </a:prstGeom>
-          <a:noFill/>
-        </p:spPr>
-        <p:txBody>
-          <a:bodyPr wrap="square" lIns="0" rIns="0" tIns="0" bIns="0" anchor="t">
-            <a:spAutoFit/>
-          </a:bodyPr>
-          <a:lstStyle/>
-          <a:p>
-            <a:pPr algn="r"/>
-            <a:r>
-              <a:rPr sz="900" b="0" i="0">
-                <a:solidFill>
-                  <a:srgbClr val="8A8F98"/>
-                </a:solidFill>
-                <a:latin typeface="Calibri"/>
-              </a:rPr>
-              <a:t>9</a:t>
-            </a:r>
-          </a:p>
-        </p:txBody>
-      </p:sp>
-      <p:pic>
-        <p:nvPicPr>
-          <p:cNvPr id="7" name="Picture 6" descr="fig06_segment_profiles.png"/>
           <p:cNvPicPr>
             <a:picLocks noChangeAspect="1"/>
           </p:cNvPicPr>
@@ -18632,6 +18753,100 @@
         </p:blipFill>
         <p:spPr>
           <a:xfrm>
+            <a:off x="11109960" y="274320"/>
+            <a:ext cx="570527" cy="566928"/>
+          </a:xfrm>
+          <a:prstGeom prst="rect">
+            <a:avLst/>
+          </a:prstGeom>
+        </p:spPr>
+      </p:pic>
+      <p:sp>
+        <p:nvSpPr>
+          <p:cNvPr id="5" name="TextBox 4"/>
+          <p:cNvSpPr txBox="1"/>
+          <p:nvPr/>
+        </p:nvSpPr>
+        <p:spPr>
+          <a:xfrm>
+            <a:off x="548640" y="6446520"/>
+            <a:ext cx="5486400" cy="228600"/>
+          </a:xfrm>
+          <a:prstGeom prst="rect">
+            <a:avLst/>
+          </a:prstGeom>
+          <a:noFill/>
+        </p:spPr>
+        <p:txBody>
+          <a:bodyPr wrap="square" lIns="0" tIns="0" rIns="0" bIns="0" anchor="t">
+            <a:spAutoFit/>
+          </a:bodyPr>
+          <a:lstStyle/>
+          <a:p>
+            <a:pPr algn="l"/>
+            <a:r>
+              <a:rPr sz="900" b="0" i="0">
+                <a:solidFill>
+                  <a:srgbClr val="8A8F98"/>
+                </a:solidFill>
+                <a:latin typeface="Calibri"/>
+              </a:rPr>
+              <a:t>DemandIQ  |  NMIMS MPSTME  |  Machine Learning, Sem V</a:t>
+            </a:r>
+          </a:p>
+        </p:txBody>
+      </p:sp>
+      <p:sp>
+        <p:nvSpPr>
+          <p:cNvPr id="6" name="TextBox 5"/>
+          <p:cNvSpPr txBox="1"/>
+          <p:nvPr/>
+        </p:nvSpPr>
+        <p:spPr>
+          <a:xfrm>
+            <a:off x="11155680" y="6446520"/>
+            <a:ext cx="502920" cy="228600"/>
+          </a:xfrm>
+          <a:prstGeom prst="rect">
+            <a:avLst/>
+          </a:prstGeom>
+          <a:noFill/>
+        </p:spPr>
+        <p:txBody>
+          <a:bodyPr wrap="square" lIns="0" tIns="0" rIns="0" bIns="0" anchor="t">
+            <a:spAutoFit/>
+          </a:bodyPr>
+          <a:lstStyle/>
+          <a:p>
+            <a:pPr algn="r"/>
+            <a:r>
+              <a:rPr sz="900" b="0" i="0">
+                <a:solidFill>
+                  <a:srgbClr val="8A8F98"/>
+                </a:solidFill>
+                <a:latin typeface="Calibri"/>
+              </a:rPr>
+              <a:t>9</a:t>
+            </a:r>
+          </a:p>
+        </p:txBody>
+      </p:sp>
+      <p:pic>
+        <p:nvPicPr>
+          <p:cNvPr id="7" name="Picture 6" descr="fig06_segment_profiles.png"/>
+          <p:cNvPicPr>
+            <a:picLocks noChangeAspect="1"/>
+          </p:cNvPicPr>
+          <p:nvPr/>
+        </p:nvPicPr>
+        <p:blipFill>
+          <a:blip r:embed="rId4"/>
+          <a:stretch>
+            <a:fillRect/>
+          </a:stretch>
+        </p:blipFill>
+        <p:spPr>
+          <a:xfrm>
             <a:off x="457200" y="1802227"/>
             <a:ext cx="6949440" cy="2613464"/>
           </a:xfrm>
@@ -18677,7 +18892,7 @@
           </a:fontRef>
         </p:style>
         <p:txBody>
-          <a:bodyPr rtlCol="0" anchor="ctr" lIns="0" rIns="0" tIns="0" bIns="0"/>
+          <a:bodyPr lIns="0" tIns="0" rIns="0" bIns="0" rtlCol="0" anchor="ctr"/>
           <a:lstStyle/>
           <a:p>
             <a:pPr algn="ctr"/>
@@ -18710,7 +18925,7 @@
           <a:noFill/>
         </p:spPr>
         <p:txBody>
-          <a:bodyPr wrap="square" lIns="0" rIns="0" tIns="0" bIns="0" anchor="t">
+          <a:bodyPr wrap="square" lIns="0" tIns="0" rIns="0" bIns="0" anchor="t">
             <a:spAutoFit/>
           </a:bodyPr>
           <a:lstStyle/>
@@ -18745,7 +18960,7 @@
           <a:noFill/>
         </p:spPr>
         <p:txBody>
-          <a:bodyPr wrap="square" lIns="0" rIns="0" tIns="0" bIns="0" anchor="t">
+          <a:bodyPr wrap="square" lIns="0" tIns="0" rIns="0" bIns="0" anchor="t">
             <a:spAutoFit/>
           </a:bodyPr>
           <a:lstStyle/>
@@ -18800,7 +19015,7 @@
           </a:fontRef>
         </p:style>
         <p:txBody>
-          <a:bodyPr rtlCol="0" anchor="ctr" lIns="0" rIns="0" tIns="0" bIns="0"/>
+          <a:bodyPr lIns="0" tIns="0" rIns="0" bIns="0" rtlCol="0" anchor="ctr"/>
           <a:lstStyle/>
           <a:p>
             <a:pPr algn="ctr"/>
@@ -18833,7 +19048,7 @@
           <a:noFill/>
         </p:spPr>
         <p:txBody>
-          <a:bodyPr wrap="square" lIns="0" rIns="0" tIns="0" bIns="0" anchor="t">
+          <a:bodyPr wrap="square" lIns="0" tIns="0" rIns="0" bIns="0" anchor="t">
             <a:spAutoFit/>
           </a:bodyPr>
           <a:lstStyle/>
@@ -18868,7 +19083,7 @@
           <a:noFill/>
         </p:spPr>
         <p:txBody>
-          <a:bodyPr wrap="square" lIns="0" rIns="0" tIns="0" bIns="0" anchor="t">
+          <a:bodyPr wrap="square" lIns="0" tIns="0" rIns="0" bIns="0" anchor="t">
             <a:spAutoFit/>
           </a:bodyPr>
           <a:lstStyle/>
@@ -18923,7 +19138,7 @@
           </a:fontRef>
         </p:style>
         <p:txBody>
-          <a:bodyPr rtlCol="0" anchor="ctr" lIns="0" rIns="0" tIns="0" bIns="0"/>
+          <a:bodyPr lIns="0" tIns="0" rIns="0" bIns="0" rtlCol="0" anchor="ctr"/>
           <a:lstStyle/>
           <a:p>
             <a:pPr algn="ctr"/>
@@ -18956,7 +19171,7 @@
           <a:noFill/>
         </p:spPr>
         <p:txBody>
-          <a:bodyPr wrap="square" lIns="0" rIns="0" tIns="0" bIns="0" anchor="t">
+          <a:bodyPr wrap="square" lIns="0" tIns="0" rIns="0" bIns="0" anchor="t">
             <a:spAutoFit/>
           </a:bodyPr>
           <a:lstStyle/>
@@ -18991,7 +19206,7 @@
           <a:noFill/>
         </p:spPr>
         <p:txBody>
-          <a:bodyPr wrap="square" lIns="0" rIns="0" tIns="0" bIns="0" anchor="t">
+          <a:bodyPr wrap="square" lIns="0" tIns="0" rIns="0" bIns="0" anchor="t">
             <a:spAutoFit/>
           </a:bodyPr>
           <a:lstStyle/>
@@ -19046,7 +19261,7 @@
           </a:fontRef>
         </p:style>
         <p:txBody>
-          <a:bodyPr rtlCol="0" anchor="ctr" lIns="0" rIns="0" tIns="0" bIns="0"/>
+          <a:bodyPr lIns="0" tIns="0" rIns="0" bIns="0" rtlCol="0" anchor="ctr"/>
           <a:lstStyle/>
           <a:p>
             <a:pPr algn="ctr"/>
@@ -19079,7 +19294,7 @@
           <a:noFill/>
         </p:spPr>
         <p:txBody>
-          <a:bodyPr wrap="square" lIns="0" rIns="0" tIns="0" bIns="0" anchor="t">
+          <a:bodyPr wrap="square" lIns="0" tIns="0" rIns="0" bIns="0" anchor="t">
             <a:spAutoFit/>
           </a:bodyPr>
           <a:lstStyle/>
@@ -19114,7 +19329,7 @@
           <a:noFill/>
         </p:spPr>
         <p:txBody>
-          <a:bodyPr wrap="square" lIns="0" rIns="0" tIns="0" bIns="0" anchor="t">
+          <a:bodyPr wrap="square" lIns="0" tIns="0" rIns="0" bIns="0" anchor="t">
             <a:spAutoFit/>
           </a:bodyPr>
           <a:lstStyle/>
@@ -19173,7 +19388,9 @@
         <p:txBody>
           <a:bodyPr rtlCol="0" anchor="ctr"/>
           <a:lstStyle/>
-          <a:p/>
+          <a:p>
+            <a:endParaRPr/>
+          </a:p>
         </p:txBody>
       </p:sp>
       <p:sp>
@@ -19193,7 +19410,7 @@
           <a:noFill/>
         </p:spPr>
         <p:txBody>
-          <a:bodyPr wrap="square" lIns="0" rIns="0" tIns="0" bIns="0" anchor="ctr">
+          <a:bodyPr wrap="square" lIns="0" tIns="0" rIns="0" bIns="0" anchor="ctr">
             <a:spAutoFit/>
           </a:bodyPr>
           <a:lstStyle/>
@@ -19559,44 +19776,44 @@
         <a:sysClr val="window" lastClr="FFFFFF"/>
       </a:lt1>
       <a:dk2>
-        <a:srgbClr val="1F497D"/>
+        <a:srgbClr val="44546A"/>
       </a:dk2>
       <a:lt2>
-        <a:srgbClr val="EEECE1"/>
+        <a:srgbClr val="E7E6E6"/>
       </a:lt2>
       <a:accent1>
-        <a:srgbClr val="4F81BD"/>
+        <a:srgbClr val="4472C4"/>
       </a:accent1>
       <a:accent2>
-        <a:srgbClr val="C0504D"/>
+        <a:srgbClr val="ED7D31"/>
       </a:accent2>
       <a:accent3>
-        <a:srgbClr val="9BBB59"/>
+        <a:srgbClr val="A5A5A5"/>
       </a:accent3>
       <a:accent4>
-        <a:srgbClr val="8064A2"/>
+        <a:srgbClr val="FFC000"/>
       </a:accent4>
       <a:accent5>
-        <a:srgbClr val="4BACC6"/>
+        <a:srgbClr val="5B9BD5"/>
       </a:accent5>
       <a:accent6>
-        <a:srgbClr val="F79646"/>
+        <a:srgbClr val="70AD47"/>
       </a:accent6>
       <a:hlink>
-        <a:srgbClr val="0000FF"/>
+        <a:srgbClr val="0563C1"/>
       </a:hlink>
       <a:folHlink>
-        <a:srgbClr val="800080"/>
+        <a:srgbClr val="954F72"/>
       </a:folHlink>
     </a:clrScheme>
     <a:fontScheme name="Office">
       <a:majorFont>
-        <a:latin typeface="Calibri"/>
+        <a:latin typeface="Calibri Light" panose="020F0302020204030204"/>
         <a:ea typeface=""/>
         <a:cs typeface=""/>
-        <a:font script="Jpan" typeface="ＭＳ Ｐゴシック"/>
+        <a:font script="Jpan" typeface="游ゴシック Light"/>
         <a:font script="Hang" typeface="맑은 고딕"/>
-        <a:font script="Hans" typeface="宋体"/>
+        <a:font script="Hans" typeface="等线 Light"/>
         <a:font script="Hant" typeface="新細明體"/>
         <a:font script="Arab" typeface="Times New Roman"/>
         <a:font script="Hebr" typeface="Times New Roman"/>
@@ -19624,14 +19841,31 @@
         <a:font script="Viet" typeface="Times New Roman"/>
         <a:font script="Uigh" typeface="Microsoft Uighur"/>
         <a:font script="Geor" typeface="Sylfaen"/>
+        <a:font script="Armn" typeface="Arial"/>
+        <a:font script="Bugi" typeface="Leelawadee UI"/>
+        <a:font script="Bopo" typeface="Microsoft JhengHei"/>
+        <a:font script="Java" typeface="Javanese Text"/>
+        <a:font script="Lisu" typeface="Segoe UI"/>
+        <a:font script="Mymr" typeface="Myanmar Text"/>
+        <a:font script="Nkoo" typeface="Ebrima"/>
+        <a:font script="Olck" typeface="Nirmala UI"/>
+        <a:font script="Osma" typeface="Ebrima"/>
+        <a:font script="Phag" typeface="Phagspa"/>
+        <a:font script="Syrn" typeface="Estrangelo Edessa"/>
+        <a:font script="Syrj" typeface="Estrangelo Edessa"/>
+        <a:font script="Syre" typeface="Estrangelo Edessa"/>
+        <a:font script="Sora" typeface="Nirmala UI"/>
+        <a:font script="Tale" typeface="Microsoft Tai Le"/>
+        <a:font script="Talu" typeface="Microsoft New Tai Lue"/>
+        <a:font script="Tfng" typeface="Ebrima"/>
       </a:majorFont>
       <a:minorFont>
-        <a:latin typeface="Calibri"/>
+        <a:latin typeface="Calibri" panose="020F0502020204030204"/>
         <a:ea typeface=""/>
         <a:cs typeface=""/>
-        <a:font script="Jpan" typeface="ＭＳ Ｐゴシック"/>
+        <a:font script="Jpan" typeface="游ゴシック"/>
         <a:font script="Hang" typeface="맑은 고딕"/>
-        <a:font script="Hans" typeface="宋体"/>
+        <a:font script="Hans" typeface="等线"/>
         <a:font script="Hant" typeface="新細明體"/>
         <a:font script="Arab" typeface="Arial"/>
         <a:font script="Hebr" typeface="Arial"/>
@@ -19659,6 +19893,23 @@
         <a:font script="Viet" typeface="Arial"/>
         <a:font script="Uigh" typeface="Microsoft Uighur"/>
         <a:font script="Geor" typeface="Sylfaen"/>
+        <a:font script="Armn" typeface="Arial"/>
+        <a:font script="Bugi" typeface="Leelawadee UI"/>
+        <a:font script="Bopo" typeface="Microsoft JhengHei"/>
+        <a:font script="Java" typeface="Javanese Text"/>
+        <a:font script="Lisu" typeface="Segoe UI"/>
+        <a:font script="Mymr" typeface="Myanmar Text"/>
+        <a:font script="Nkoo" typeface="Ebrima"/>
+        <a:font script="Olck" typeface="Nirmala UI"/>
+        <a:font script="Osma" typeface="Ebrima"/>
+        <a:font script="Phag" typeface="Phagspa"/>
+        <a:font script="Syrn" typeface="Estrangelo Edessa"/>
+        <a:font script="Syrj" typeface="Estrangelo Edessa"/>
+        <a:font script="Syre" typeface="Estrangelo Edessa"/>
+        <a:font script="Sora" typeface="Nirmala UI"/>
+        <a:font script="Tale" typeface="Microsoft Tai Le"/>
+        <a:font script="Talu" typeface="Microsoft New Tai Lue"/>
+        <a:font script="Tfng" typeface="Ebrima"/>
       </a:minorFont>
     </a:fontScheme>
     <a:fmtScheme name="Office">
@@ -19670,200 +19921,141 @@
           <a:gsLst>
             <a:gs pos="0">
               <a:schemeClr val="phClr">
-                <a:tint val="50000"/>
-                <a:satMod val="300000"/>
+                <a:lumMod val="110000"/>
+                <a:satMod val="105000"/>
+                <a:tint val="67000"/>
               </a:schemeClr>
             </a:gs>
-            <a:gs pos="35000">
+            <a:gs pos="50000">
               <a:schemeClr val="phClr">
-                <a:tint val="37000"/>
-                <a:satMod val="300000"/>
+                <a:lumMod val="105000"/>
+                <a:satMod val="103000"/>
+                <a:tint val="73000"/>
               </a:schemeClr>
             </a:gs>
             <a:gs pos="100000">
               <a:schemeClr val="phClr">
-                <a:tint val="15000"/>
-                <a:satMod val="350000"/>
+                <a:lumMod val="105000"/>
+                <a:satMod val="109000"/>
+                <a:tint val="81000"/>
               </a:schemeClr>
             </a:gs>
           </a:gsLst>
-          <a:lin ang="16200000" scaled="1"/>
+          <a:lin ang="5400000" scaled="0"/>
         </a:gradFill>
         <a:gradFill rotWithShape="1">
           <a:gsLst>
             <a:gs pos="0">
               <a:schemeClr val="phClr">
-                <a:tint val="100000"/>
+                <a:satMod val="103000"/>
+                <a:lumMod val="102000"/>
+                <a:tint val="94000"/>
+              </a:schemeClr>
+            </a:gs>
+            <a:gs pos="50000">
+              <a:schemeClr val="phClr">
+                <a:satMod val="110000"/>
+                <a:lumMod val="100000"/>
                 <a:shade val="100000"/>
-                <a:satMod val="130000"/>
               </a:schemeClr>
             </a:gs>
             <a:gs pos="100000">
               <a:schemeClr val="phClr">
-                <a:tint val="50000"/>
-                <a:shade val="100000"/>
-                <a:satMod val="350000"/>
+                <a:lumMod val="99000"/>
+                <a:satMod val="120000"/>
+                <a:shade val="78000"/>
               </a:schemeClr>
             </a:gs>
           </a:gsLst>
-          <a:lin ang="16200000" scaled="0"/>
+          <a:lin ang="5400000" scaled="0"/>
         </a:gradFill>
       </a:fillStyleLst>
       <a:lnStyleLst>
-        <a:ln w="9525" cap="flat" cmpd="sng" algn="ctr">
-          <a:solidFill>
-            <a:schemeClr val="phClr">
-              <a:shade val="95000"/>
-              <a:satMod val="105000"/>
-            </a:schemeClr>
-          </a:solidFill>
-          <a:prstDash val="solid"/>
-        </a:ln>
-        <a:ln w="25400" cap="flat" cmpd="sng" algn="ctr">
+        <a:ln w="6350" cap="flat" cmpd="sng" algn="ctr">
           <a:solidFill>
             <a:schemeClr val="phClr"/>
           </a:solidFill>
           <a:prstDash val="solid"/>
+          <a:miter lim="800000"/>
         </a:ln>
-        <a:ln w="38100" cap="flat" cmpd="sng" algn="ctr">
+        <a:ln w="12700" cap="flat" cmpd="sng" algn="ctr">
           <a:solidFill>
             <a:schemeClr val="phClr"/>
           </a:solidFill>
           <a:prstDash val="solid"/>
+          <a:miter lim="800000"/>
+        </a:ln>
+        <a:ln w="19050" cap="flat" cmpd="sng" algn="ctr">
+          <a:solidFill>
+            <a:schemeClr val="phClr"/>
+          </a:solidFill>
+          <a:prstDash val="solid"/>
+          <a:miter lim="800000"/>
         </a:ln>
       </a:lnStyleLst>
       <a:effectStyleLst>
         <a:effectStyle>
+          <a:effectLst/>
+        </a:effectStyle>
+        <a:effectStyle>
+          <a:effectLst/>
+        </a:effectStyle>
+        <a:effectStyle>
           <a:effectLst>
-            <a:outerShdw blurRad="40000" dist="20000" dir="5400000" rotWithShape="0">
+            <a:outerShdw blurRad="57150" dist="19050" dir="5400000" algn="ctr" rotWithShape="0">
               <a:srgbClr val="000000">
-                <a:alpha val="38000"/>
+                <a:alpha val="63000"/>
               </a:srgbClr>
             </a:outerShdw>
           </a:effectLst>
-        </a:effectStyle>
-        <a:effectStyle>
-          <a:effectLst>
-            <a:outerShdw blurRad="40000" dist="23000" dir="5400000" rotWithShape="0">
-              <a:srgbClr val="000000">
-                <a:alpha val="35000"/>
-              </a:srgbClr>
-            </a:outerShdw>
-          </a:effectLst>
-        </a:effectStyle>
-        <a:effectStyle>
-          <a:effectLst>
-            <a:outerShdw blurRad="40000" dist="23000" dir="5400000" rotWithShape="0">
-              <a:srgbClr val="000000">
-                <a:alpha val="35000"/>
-              </a:srgbClr>
-            </a:outerShdw>
-          </a:effectLst>
-          <a:scene3d>
-            <a:camera prst="orthographicFront">
-              <a:rot lat="0" lon="0" rev="0"/>
-            </a:camera>
-            <a:lightRig rig="threePt" dir="t">
-              <a:rot lat="0" lon="0" rev="1200000"/>
-            </a:lightRig>
-          </a:scene3d>
-          <a:sp3d>
-            <a:bevelT w="63500" h="25400"/>
-          </a:sp3d>
         </a:effectStyle>
       </a:effectStyleLst>
       <a:bgFillStyleLst>
         <a:solidFill>
           <a:schemeClr val="phClr"/>
         </a:solidFill>
+        <a:solidFill>
+          <a:schemeClr val="phClr">
+            <a:tint val="95000"/>
+            <a:satMod val="170000"/>
+          </a:schemeClr>
+        </a:solidFill>
         <a:gradFill rotWithShape="1">
           <a:gsLst>
             <a:gs pos="0">
               <a:schemeClr val="phClr">
-                <a:tint val="40000"/>
-                <a:satMod val="350000"/>
+                <a:tint val="93000"/>
+                <a:satMod val="150000"/>
+                <a:shade val="98000"/>
+                <a:lumMod val="102000"/>
               </a:schemeClr>
             </a:gs>
-            <a:gs pos="40000">
+            <a:gs pos="50000">
               <a:schemeClr val="phClr">
-                <a:tint val="45000"/>
-                <a:shade val="99000"/>
-                <a:satMod val="350000"/>
+                <a:tint val="98000"/>
+                <a:satMod val="130000"/>
+                <a:shade val="90000"/>
+                <a:lumMod val="103000"/>
               </a:schemeClr>
             </a:gs>
             <a:gs pos="100000">
               <a:schemeClr val="phClr">
-                <a:shade val="20000"/>
-                <a:satMod val="255000"/>
+                <a:shade val="63000"/>
+                <a:satMod val="120000"/>
               </a:schemeClr>
             </a:gs>
           </a:gsLst>
-          <a:path path="circle">
-            <a:fillToRect l="50000" t="-80000" r="50000" b="180000"/>
-          </a:path>
-        </a:gradFill>
-        <a:gradFill rotWithShape="1">
-          <a:gsLst>
-            <a:gs pos="0">
-              <a:schemeClr val="phClr">
-                <a:tint val="80000"/>
-                <a:satMod val="300000"/>
-              </a:schemeClr>
-            </a:gs>
-            <a:gs pos="100000">
-              <a:schemeClr val="phClr">
-                <a:shade val="30000"/>
-                <a:satMod val="200000"/>
-              </a:schemeClr>
-            </a:gs>
-          </a:gsLst>
-          <a:path path="circle">
-            <a:fillToRect l="50000" t="50000" r="50000" b="50000"/>
-          </a:path>
+          <a:lin ang="5400000" scaled="0"/>
         </a:gradFill>
       </a:bgFillStyleLst>
     </a:fmtScheme>
   </a:themeElements>
-  <a:objectDefaults>
-    <a:spDef>
-      <a:spPr/>
-      <a:bodyPr/>
-      <a:lstStyle/>
-      <a:style>
-        <a:lnRef idx="1">
-          <a:schemeClr val="accent1"/>
-        </a:lnRef>
-        <a:fillRef idx="3">
-          <a:schemeClr val="accent1"/>
-        </a:fillRef>
-        <a:effectRef idx="2">
-          <a:schemeClr val="accent1"/>
-        </a:effectRef>
-        <a:fontRef idx="minor">
-          <a:schemeClr val="lt1"/>
-        </a:fontRef>
-      </a:style>
-    </a:spDef>
-    <a:lnDef>
-      <a:spPr/>
-      <a:bodyPr/>
-      <a:lstStyle/>
-      <a:style>
-        <a:lnRef idx="2">
-          <a:schemeClr val="accent1"/>
-        </a:lnRef>
-        <a:fillRef idx="0">
-          <a:schemeClr val="accent1"/>
-        </a:fillRef>
-        <a:effectRef idx="1">
-          <a:schemeClr val="accent1"/>
-        </a:effectRef>
-        <a:fontRef idx="minor">
-          <a:schemeClr val="tx1"/>
-        </a:fontRef>
-      </a:style>
-    </a:lnDef>
-  </a:objectDefaults>
+  <a:objectDefaults/>
   <a:extraClrSchemeLst/>
+  <a:extLst>
+    <a:ext uri="{05A4C25C-085E-4340-85A3-A5531E510DB2}">
+      <thm15:themeFamily xmlns:thm15="http://schemas.microsoft.com/office/thememl/2012/main" name="Office Theme" id="{62F939B6-93AF-4DB8-9C6B-D6C7DFDC589F}" vid="{4A3C46E8-61CC-4603-A589-7422A47A8E4A}"/>
+    </a:ext>
+  </a:extLst>
 </a:theme>
 </file>